--- a/image/raw.pptx
+++ b/image/raw.pptx
@@ -5,13 +5,8 @@
     <p:sldMasterId id="2147483648" r:id="rId1"/>
   </p:sldMasterIdLst>
   <p:sldIdLst>
-    <p:sldId id="256" r:id="rId2"/>
-    <p:sldId id="257" r:id="rId3"/>
-    <p:sldId id="258" r:id="rId4"/>
-    <p:sldId id="271" r:id="rId5"/>
-    <p:sldId id="270" r:id="rId6"/>
-    <p:sldId id="264" r:id="rId7"/>
-    <p:sldId id="272" r:id="rId8"/>
+    <p:sldId id="264" r:id="rId2"/>
+    <p:sldId id="272" r:id="rId3"/>
   </p:sldIdLst>
   <p:sldSz cx="12192000" cy="6858000"/>
   <p:notesSz cx="6858000" cy="9144000"/>
@@ -111,33 +106,6 @@
     </a:lvl9pPr>
   </p:defaultTextStyle>
   <p:extLst>
-    <p:ext uri="{521415D9-36F7-43E2-AB2F-B90AF26B5E84}">
-      <p14:sectionLst xmlns:p14="http://schemas.microsoft.com/office/powerpoint/2010/main">
-        <p14:section name="svm" id="{2CB418FF-EDE3-42F9-BE2D-F8FBE9335820}">
-          <p14:sldIdLst>
-            <p14:sldId id="256"/>
-            <p14:sldId id="257"/>
-            <p14:sldId id="258"/>
-          </p14:sldIdLst>
-        </p14:section>
-        <p14:section name="local-outlier-factor" id="{2AEAD4EB-CD32-460A-B693-D557358F18F3}">
-          <p14:sldIdLst>
-            <p14:sldId id="271"/>
-            <p14:sldId id="270"/>
-          </p14:sldIdLst>
-        </p14:section>
-        <p14:section name="matrix-factorization" id="{0DC92BB3-923E-A54B-87ED-BADEB6F45591}">
-          <p14:sldIdLst>
-            <p14:sldId id="264"/>
-          </p14:sldIdLst>
-        </p14:section>
-        <p14:section name="smote" id="{1AEBF380-1182-C04E-B9E7-4D87D3FB0B56}">
-          <p14:sldIdLst>
-            <p14:sldId id="272"/>
-          </p14:sldIdLst>
-        </p14:section>
-      </p14:sectionLst>
-    </p:ext>
     <p:ext uri="{EFAFB233-063F-42B5-8137-9DF3F51BA10A}">
       <p15:sldGuideLst xmlns:p15="http://schemas.microsoft.com/office/powerpoint/2012/main"/>
     </p:ext>
@@ -292,7 +260,7 @@
           <a:p>
             <a:fld id="{DC00918D-4361-4CFD-83C0-A19C315B9995}" type="datetimeFigureOut">
               <a:rPr lang="en-US" smtClean="0"/>
-              <a:t>2/7/26</a:t>
+              <a:t>2/8/26</a:t>
             </a:fld>
             <a:endParaRPr lang="en-US"/>
           </a:p>
@@ -490,7 +458,7 @@
           <a:p>
             <a:fld id="{DC00918D-4361-4CFD-83C0-A19C315B9995}" type="datetimeFigureOut">
               <a:rPr lang="en-US" smtClean="0"/>
-              <a:t>2/7/26</a:t>
+              <a:t>2/8/26</a:t>
             </a:fld>
             <a:endParaRPr lang="en-US"/>
           </a:p>
@@ -698,7 +666,7 @@
           <a:p>
             <a:fld id="{DC00918D-4361-4CFD-83C0-A19C315B9995}" type="datetimeFigureOut">
               <a:rPr lang="en-US" smtClean="0"/>
-              <a:t>2/7/26</a:t>
+              <a:t>2/8/26</a:t>
             </a:fld>
             <a:endParaRPr lang="en-US"/>
           </a:p>
@@ -896,7 +864,7 @@
           <a:p>
             <a:fld id="{DC00918D-4361-4CFD-83C0-A19C315B9995}" type="datetimeFigureOut">
               <a:rPr lang="en-US" smtClean="0"/>
-              <a:t>2/7/26</a:t>
+              <a:t>2/8/26</a:t>
             </a:fld>
             <a:endParaRPr lang="en-US"/>
           </a:p>
@@ -1171,7 +1139,7 @@
           <a:p>
             <a:fld id="{DC00918D-4361-4CFD-83C0-A19C315B9995}" type="datetimeFigureOut">
               <a:rPr lang="en-US" smtClean="0"/>
-              <a:t>2/7/26</a:t>
+              <a:t>2/8/26</a:t>
             </a:fld>
             <a:endParaRPr lang="en-US"/>
           </a:p>
@@ -1436,7 +1404,7 @@
           <a:p>
             <a:fld id="{DC00918D-4361-4CFD-83C0-A19C315B9995}" type="datetimeFigureOut">
               <a:rPr lang="en-US" smtClean="0"/>
-              <a:t>2/7/26</a:t>
+              <a:t>2/8/26</a:t>
             </a:fld>
             <a:endParaRPr lang="en-US"/>
           </a:p>
@@ -1848,7 +1816,7 @@
           <a:p>
             <a:fld id="{DC00918D-4361-4CFD-83C0-A19C315B9995}" type="datetimeFigureOut">
               <a:rPr lang="en-US" smtClean="0"/>
-              <a:t>2/7/26</a:t>
+              <a:t>2/8/26</a:t>
             </a:fld>
             <a:endParaRPr lang="en-US"/>
           </a:p>
@@ -1989,7 +1957,7 @@
           <a:p>
             <a:fld id="{DC00918D-4361-4CFD-83C0-A19C315B9995}" type="datetimeFigureOut">
               <a:rPr lang="en-US" smtClean="0"/>
-              <a:t>2/7/26</a:t>
+              <a:t>2/8/26</a:t>
             </a:fld>
             <a:endParaRPr lang="en-US"/>
           </a:p>
@@ -2102,7 +2070,7 @@
           <a:p>
             <a:fld id="{DC00918D-4361-4CFD-83C0-A19C315B9995}" type="datetimeFigureOut">
               <a:rPr lang="en-US" smtClean="0"/>
-              <a:t>2/7/26</a:t>
+              <a:t>2/8/26</a:t>
             </a:fld>
             <a:endParaRPr lang="en-US"/>
           </a:p>
@@ -2413,7 +2381,7 @@
           <a:p>
             <a:fld id="{DC00918D-4361-4CFD-83C0-A19C315B9995}" type="datetimeFigureOut">
               <a:rPr lang="en-US" smtClean="0"/>
-              <a:t>2/7/26</a:t>
+              <a:t>2/8/26</a:t>
             </a:fld>
             <a:endParaRPr lang="en-US"/>
           </a:p>
@@ -2701,7 +2669,7 @@
           <a:p>
             <a:fld id="{DC00918D-4361-4CFD-83C0-A19C315B9995}" type="datetimeFigureOut">
               <a:rPr lang="en-US" smtClean="0"/>
-              <a:t>2/7/26</a:t>
+              <a:t>2/8/26</a:t>
             </a:fld>
             <a:endParaRPr lang="en-US"/>
           </a:p>
@@ -2942,7 +2910,7 @@
           <a:p>
             <a:fld id="{DC00918D-4361-4CFD-83C0-A19C315B9995}" type="datetimeFigureOut">
               <a:rPr lang="en-US" smtClean="0"/>
-              <a:t>2/7/26</a:t>
+              <a:t>2/8/26</a:t>
             </a:fld>
             <a:endParaRPr lang="en-US"/>
           </a:p>
@@ -3343,6335 +3311,6 @@
 </file>
 
 <file path=ppt/slides/slide1.xml><?xml version="1.0" encoding="utf-8"?>
-<p:sld xmlns:a="http://schemas.openxmlformats.org/drawingml/2006/main" xmlns:r="http://schemas.openxmlformats.org/officeDocument/2006/relationships" xmlns:p="http://schemas.openxmlformats.org/presentationml/2006/main">
-  <p:cSld>
-    <p:spTree>
-      <p:nvGrpSpPr>
-        <p:cNvPr id="1" name=""/>
-        <p:cNvGrpSpPr/>
-        <p:nvPr/>
-      </p:nvGrpSpPr>
-      <p:grpSpPr>
-        <a:xfrm>
-          <a:off x="0" y="0"/>
-          <a:ext cx="0" cy="0"/>
-          <a:chOff x="0" y="0"/>
-          <a:chExt cx="0" cy="0"/>
-        </a:xfrm>
-      </p:grpSpPr>
-      <p:pic>
-        <p:nvPicPr>
-          <p:cNvPr id="52" name="Picture 51">
-            <a:extLst>
-              <a:ext uri="{FF2B5EF4-FFF2-40B4-BE49-F238E27FC236}">
-                <a16:creationId xmlns:a16="http://schemas.microsoft.com/office/drawing/2014/main" id="{0AB037B4-6EC6-B441-B614-DBA957930AB9}"/>
-              </a:ext>
-            </a:extLst>
-          </p:cNvPr>
-          <p:cNvPicPr>
-            <a:picLocks noChangeAspect="1"/>
-          </p:cNvPicPr>
-          <p:nvPr/>
-        </p:nvPicPr>
-        <p:blipFill rotWithShape="1">
-          <a:blip r:embed="rId2"/>
-          <a:srcRect l="50000"/>
-          <a:stretch/>
-        </p:blipFill>
-        <p:spPr>
-          <a:xfrm>
-            <a:off x="2807586" y="1102844"/>
-            <a:ext cx="298450" cy="342900"/>
-          </a:xfrm>
-          <a:prstGeom prst="rect">
-            <a:avLst/>
-          </a:prstGeom>
-        </p:spPr>
-      </p:pic>
-      <p:pic>
-        <p:nvPicPr>
-          <p:cNvPr id="14" name="Picture 13">
-            <a:extLst>
-              <a:ext uri="{FF2B5EF4-FFF2-40B4-BE49-F238E27FC236}">
-                <a16:creationId xmlns:a16="http://schemas.microsoft.com/office/drawing/2014/main" id="{6D83D62B-8E3D-5E46-93C4-47EC01A5B271}"/>
-              </a:ext>
-            </a:extLst>
-          </p:cNvPr>
-          <p:cNvPicPr>
-            <a:picLocks noChangeAspect="1"/>
-          </p:cNvPicPr>
-          <p:nvPr/>
-        </p:nvPicPr>
-        <p:blipFill rotWithShape="1">
-          <a:blip r:embed="rId2"/>
-          <a:srcRect r="50001"/>
-          <a:stretch/>
-        </p:blipFill>
-        <p:spPr>
-          <a:xfrm>
-            <a:off x="9074152" y="5433551"/>
-            <a:ext cx="298448" cy="342900"/>
-          </a:xfrm>
-          <a:prstGeom prst="rect">
-            <a:avLst/>
-          </a:prstGeom>
-        </p:spPr>
-      </p:pic>
-      <p:cxnSp>
-        <p:nvCxnSpPr>
-          <p:cNvPr id="75" name="Straight Connector 74">
-            <a:extLst>
-              <a:ext uri="{FF2B5EF4-FFF2-40B4-BE49-F238E27FC236}">
-                <a16:creationId xmlns:a16="http://schemas.microsoft.com/office/drawing/2014/main" id="{F07B4A82-2097-4968-BB61-C90CBE45789D}"/>
-              </a:ext>
-            </a:extLst>
-          </p:cNvPr>
-          <p:cNvCxnSpPr>
-            <a:cxnSpLocks/>
-            <a:stCxn id="50" idx="1"/>
-            <a:endCxn id="61" idx="6"/>
-          </p:cNvCxnSpPr>
-          <p:nvPr/>
-        </p:nvCxnSpPr>
-        <p:spPr>
-          <a:xfrm flipH="1">
-            <a:off x="6403656" y="3303114"/>
-            <a:ext cx="1627662" cy="715149"/>
-          </a:xfrm>
-          <a:prstGeom prst="line">
-            <a:avLst/>
-          </a:prstGeom>
-          <a:ln w="3175">
-            <a:solidFill>
-              <a:schemeClr val="tx1">
-                <a:lumMod val="75000"/>
-                <a:lumOff val="25000"/>
-              </a:schemeClr>
-            </a:solidFill>
-            <a:prstDash val="dash"/>
-          </a:ln>
-        </p:spPr>
-        <p:style>
-          <a:lnRef idx="1">
-            <a:schemeClr val="accent1"/>
-          </a:lnRef>
-          <a:fillRef idx="0">
-            <a:schemeClr val="accent1"/>
-          </a:fillRef>
-          <a:effectRef idx="0">
-            <a:schemeClr val="accent1"/>
-          </a:effectRef>
-          <a:fontRef idx="minor">
-            <a:schemeClr val="tx1"/>
-          </a:fontRef>
-        </p:style>
-      </p:cxnSp>
-      <p:cxnSp>
-        <p:nvCxnSpPr>
-          <p:cNvPr id="78" name="Straight Connector 77">
-            <a:extLst>
-              <a:ext uri="{FF2B5EF4-FFF2-40B4-BE49-F238E27FC236}">
-                <a16:creationId xmlns:a16="http://schemas.microsoft.com/office/drawing/2014/main" id="{9FC16FB1-322D-4A0A-A128-0AFD84E1D21C}"/>
-              </a:ext>
-            </a:extLst>
-          </p:cNvPr>
-          <p:cNvCxnSpPr>
-            <a:stCxn id="50" idx="1"/>
-            <a:endCxn id="58" idx="6"/>
-          </p:cNvCxnSpPr>
-          <p:nvPr/>
-        </p:nvCxnSpPr>
-        <p:spPr>
-          <a:xfrm flipH="1">
-            <a:off x="4829902" y="3303114"/>
-            <a:ext cx="3201416" cy="34074"/>
-          </a:xfrm>
-          <a:prstGeom prst="line">
-            <a:avLst/>
-          </a:prstGeom>
-          <a:ln w="3175">
-            <a:solidFill>
-              <a:schemeClr val="tx1">
-                <a:lumMod val="75000"/>
-                <a:lumOff val="25000"/>
-              </a:schemeClr>
-            </a:solidFill>
-            <a:prstDash val="dash"/>
-          </a:ln>
-        </p:spPr>
-        <p:style>
-          <a:lnRef idx="1">
-            <a:schemeClr val="accent1"/>
-          </a:lnRef>
-          <a:fillRef idx="0">
-            <a:schemeClr val="accent1"/>
-          </a:fillRef>
-          <a:effectRef idx="0">
-            <a:schemeClr val="accent1"/>
-          </a:effectRef>
-          <a:fontRef idx="minor">
-            <a:schemeClr val="tx1"/>
-          </a:fontRef>
-        </p:style>
-      </p:cxnSp>
-      <p:cxnSp>
-        <p:nvCxnSpPr>
-          <p:cNvPr id="80" name="Straight Connector 79">
-            <a:extLst>
-              <a:ext uri="{FF2B5EF4-FFF2-40B4-BE49-F238E27FC236}">
-                <a16:creationId xmlns:a16="http://schemas.microsoft.com/office/drawing/2014/main" id="{1B0B523C-ABB0-45C9-A4E8-FE34A0EFFC51}"/>
-              </a:ext>
-            </a:extLst>
-          </p:cNvPr>
-          <p:cNvCxnSpPr>
-            <a:stCxn id="50" idx="1"/>
-            <a:endCxn id="54" idx="6"/>
-          </p:cNvCxnSpPr>
-          <p:nvPr/>
-        </p:nvCxnSpPr>
-        <p:spPr>
-          <a:xfrm flipH="1">
-            <a:off x="4159338" y="3303114"/>
-            <a:ext cx="3871980" cy="703195"/>
-          </a:xfrm>
-          <a:prstGeom prst="line">
-            <a:avLst/>
-          </a:prstGeom>
-          <a:ln w="3175">
-            <a:solidFill>
-              <a:schemeClr val="tx1">
-                <a:lumMod val="75000"/>
-                <a:lumOff val="25000"/>
-              </a:schemeClr>
-            </a:solidFill>
-            <a:prstDash val="dash"/>
-          </a:ln>
-        </p:spPr>
-        <p:style>
-          <a:lnRef idx="1">
-            <a:schemeClr val="accent1"/>
-          </a:lnRef>
-          <a:fillRef idx="0">
-            <a:schemeClr val="accent1"/>
-          </a:fillRef>
-          <a:effectRef idx="0">
-            <a:schemeClr val="accent1"/>
-          </a:effectRef>
-          <a:fontRef idx="minor">
-            <a:schemeClr val="tx1"/>
-          </a:fontRef>
-        </p:style>
-      </p:cxnSp>
-      <p:sp>
-        <p:nvSpPr>
-          <p:cNvPr id="4" name="Flowchart: Connector 3">
-            <a:extLst>
-              <a:ext uri="{FF2B5EF4-FFF2-40B4-BE49-F238E27FC236}">
-                <a16:creationId xmlns:a16="http://schemas.microsoft.com/office/drawing/2014/main" id="{ED01BEC1-4E3B-46B1-94F2-437974460882}"/>
-              </a:ext>
-            </a:extLst>
-          </p:cNvPr>
-          <p:cNvSpPr/>
-          <p:nvPr/>
-        </p:nvSpPr>
-        <p:spPr>
-          <a:xfrm>
-            <a:off x="4662479" y="2359600"/>
-            <a:ext cx="206644" cy="206644"/>
-          </a:xfrm>
-          <a:prstGeom prst="flowChartConnector">
-            <a:avLst/>
-          </a:prstGeom>
-          <a:solidFill>
-            <a:schemeClr val="accent1">
-              <a:lumMod val="75000"/>
-            </a:schemeClr>
-          </a:solidFill>
-          <a:ln>
-            <a:noFill/>
-          </a:ln>
-        </p:spPr>
-        <p:style>
-          <a:lnRef idx="2">
-            <a:schemeClr val="accent1">
-              <a:shade val="50000"/>
-            </a:schemeClr>
-          </a:lnRef>
-          <a:fillRef idx="1">
-            <a:schemeClr val="accent1"/>
-          </a:fillRef>
-          <a:effectRef idx="0">
-            <a:schemeClr val="accent1"/>
-          </a:effectRef>
-          <a:fontRef idx="minor">
-            <a:schemeClr val="lt1"/>
-          </a:fontRef>
-        </p:style>
-        <p:txBody>
-          <a:bodyPr rtlCol="0" anchor="ctr"/>
-          <a:lstStyle/>
-          <a:p>
-            <a:pPr algn="ctr"/>
-            <a:endParaRPr lang="en-US"/>
-          </a:p>
-        </p:txBody>
-      </p:sp>
-      <p:sp>
-        <p:nvSpPr>
-          <p:cNvPr id="5" name="Flowchart: Connector 4">
-            <a:extLst>
-              <a:ext uri="{FF2B5EF4-FFF2-40B4-BE49-F238E27FC236}">
-                <a16:creationId xmlns:a16="http://schemas.microsoft.com/office/drawing/2014/main" id="{1B799897-5E51-416B-B411-04D297C6752E}"/>
-              </a:ext>
-            </a:extLst>
-          </p:cNvPr>
-          <p:cNvSpPr/>
-          <p:nvPr/>
-        </p:nvSpPr>
-        <p:spPr>
-          <a:xfrm>
-            <a:off x="3123961" y="3063816"/>
-            <a:ext cx="206644" cy="206644"/>
-          </a:xfrm>
-          <a:prstGeom prst="flowChartConnector">
-            <a:avLst/>
-          </a:prstGeom>
-          <a:solidFill>
-            <a:schemeClr val="accent1">
-              <a:lumMod val="75000"/>
-            </a:schemeClr>
-          </a:solidFill>
-          <a:ln>
-            <a:noFill/>
-          </a:ln>
-        </p:spPr>
-        <p:style>
-          <a:lnRef idx="2">
-            <a:schemeClr val="accent1">
-              <a:shade val="50000"/>
-            </a:schemeClr>
-          </a:lnRef>
-          <a:fillRef idx="1">
-            <a:schemeClr val="accent1"/>
-          </a:fillRef>
-          <a:effectRef idx="0">
-            <a:schemeClr val="accent1"/>
-          </a:effectRef>
-          <a:fontRef idx="minor">
-            <a:schemeClr val="lt1"/>
-          </a:fontRef>
-        </p:style>
-        <p:txBody>
-          <a:bodyPr rtlCol="0" anchor="ctr"/>
-          <a:lstStyle/>
-          <a:p>
-            <a:pPr algn="ctr"/>
-            <a:endParaRPr lang="en-US"/>
-          </a:p>
-        </p:txBody>
-      </p:sp>
-      <p:sp>
-        <p:nvSpPr>
-          <p:cNvPr id="6" name="Flowchart: Connector 5">
-            <a:extLst>
-              <a:ext uri="{FF2B5EF4-FFF2-40B4-BE49-F238E27FC236}">
-                <a16:creationId xmlns:a16="http://schemas.microsoft.com/office/drawing/2014/main" id="{263E8C3E-9DCF-46E7-A9DC-5B21A30D5E49}"/>
-              </a:ext>
-            </a:extLst>
-          </p:cNvPr>
-          <p:cNvSpPr/>
-          <p:nvPr/>
-        </p:nvSpPr>
-        <p:spPr>
-          <a:xfrm>
-            <a:off x="7154570" y="5082957"/>
-            <a:ext cx="206644" cy="206644"/>
-          </a:xfrm>
-          <a:prstGeom prst="flowChartConnector">
-            <a:avLst/>
-          </a:prstGeom>
-          <a:solidFill>
-            <a:srgbClr val="C00000"/>
-          </a:solidFill>
-          <a:ln>
-            <a:noFill/>
-          </a:ln>
-        </p:spPr>
-        <p:style>
-          <a:lnRef idx="2">
-            <a:schemeClr val="accent1">
-              <a:shade val="50000"/>
-            </a:schemeClr>
-          </a:lnRef>
-          <a:fillRef idx="1">
-            <a:schemeClr val="accent1"/>
-          </a:fillRef>
-          <a:effectRef idx="0">
-            <a:schemeClr val="accent1"/>
-          </a:effectRef>
-          <a:fontRef idx="minor">
-            <a:schemeClr val="lt1"/>
-          </a:fontRef>
-        </p:style>
-        <p:txBody>
-          <a:bodyPr rtlCol="0" anchor="ctr"/>
-          <a:lstStyle/>
-          <a:p>
-            <a:pPr algn="ctr"/>
-            <a:endParaRPr lang="en-US"/>
-          </a:p>
-        </p:txBody>
-      </p:sp>
-      <p:cxnSp>
-        <p:nvCxnSpPr>
-          <p:cNvPr id="10" name="Straight Arrow Connector 9">
-            <a:extLst>
-              <a:ext uri="{FF2B5EF4-FFF2-40B4-BE49-F238E27FC236}">
-                <a16:creationId xmlns:a16="http://schemas.microsoft.com/office/drawing/2014/main" id="{BADB0179-BF03-40DB-8FD5-E47883CFCD2A}"/>
-              </a:ext>
-            </a:extLst>
-          </p:cNvPr>
-          <p:cNvCxnSpPr>
-            <a:cxnSpLocks/>
-          </p:cNvCxnSpPr>
-          <p:nvPr/>
-        </p:nvCxnSpPr>
-        <p:spPr>
-          <a:xfrm flipV="1">
-            <a:off x="2732088" y="1192144"/>
-            <a:ext cx="0" cy="4572000"/>
-          </a:xfrm>
-          <a:prstGeom prst="straightConnector1">
-            <a:avLst/>
-          </a:prstGeom>
-          <a:ln w="28575">
-            <a:solidFill>
-              <a:schemeClr val="tx1">
-                <a:lumMod val="75000"/>
-                <a:lumOff val="25000"/>
-              </a:schemeClr>
-            </a:solidFill>
-            <a:tailEnd type="triangle"/>
-          </a:ln>
-        </p:spPr>
-        <p:style>
-          <a:lnRef idx="1">
-            <a:schemeClr val="accent1"/>
-          </a:lnRef>
-          <a:fillRef idx="0">
-            <a:schemeClr val="accent1"/>
-          </a:fillRef>
-          <a:effectRef idx="0">
-            <a:schemeClr val="accent1"/>
-          </a:effectRef>
-          <a:fontRef idx="minor">
-            <a:schemeClr val="tx1"/>
-          </a:fontRef>
-        </p:style>
-      </p:cxnSp>
-      <p:cxnSp>
-        <p:nvCxnSpPr>
-          <p:cNvPr id="13" name="Straight Arrow Connector 12">
-            <a:extLst>
-              <a:ext uri="{FF2B5EF4-FFF2-40B4-BE49-F238E27FC236}">
-                <a16:creationId xmlns:a16="http://schemas.microsoft.com/office/drawing/2014/main" id="{346F5D00-2DD7-46F3-9464-DD6771027887}"/>
-              </a:ext>
-            </a:extLst>
-          </p:cNvPr>
-          <p:cNvCxnSpPr>
-            <a:cxnSpLocks/>
-          </p:cNvCxnSpPr>
-          <p:nvPr/>
-        </p:nvCxnSpPr>
-        <p:spPr>
-          <a:xfrm>
-            <a:off x="2732088" y="5764144"/>
-            <a:ext cx="6640512" cy="0"/>
-          </a:xfrm>
-          <a:prstGeom prst="straightConnector1">
-            <a:avLst/>
-          </a:prstGeom>
-          <a:ln w="28575">
-            <a:solidFill>
-              <a:schemeClr val="tx1">
-                <a:lumMod val="75000"/>
-                <a:lumOff val="25000"/>
-              </a:schemeClr>
-            </a:solidFill>
-            <a:tailEnd type="triangle"/>
-          </a:ln>
-        </p:spPr>
-        <p:style>
-          <a:lnRef idx="1">
-            <a:schemeClr val="accent1"/>
-          </a:lnRef>
-          <a:fillRef idx="0">
-            <a:schemeClr val="accent1"/>
-          </a:fillRef>
-          <a:effectRef idx="0">
-            <a:schemeClr val="accent1"/>
-          </a:effectRef>
-          <a:fontRef idx="minor">
-            <a:schemeClr val="tx1"/>
-          </a:fontRef>
-        </p:style>
-      </p:cxnSp>
-      <p:sp>
-        <p:nvSpPr>
-          <p:cNvPr id="16" name="Flowchart: Connector 15">
-            <a:extLst>
-              <a:ext uri="{FF2B5EF4-FFF2-40B4-BE49-F238E27FC236}">
-                <a16:creationId xmlns:a16="http://schemas.microsoft.com/office/drawing/2014/main" id="{2052F860-7FBF-42EA-94D9-BF0177D233ED}"/>
-              </a:ext>
-            </a:extLst>
-          </p:cNvPr>
-          <p:cNvSpPr/>
-          <p:nvPr/>
-        </p:nvSpPr>
-        <p:spPr>
-          <a:xfrm>
-            <a:off x="7214507" y="3767976"/>
-            <a:ext cx="206644" cy="206644"/>
-          </a:xfrm>
-          <a:prstGeom prst="flowChartConnector">
-            <a:avLst/>
-          </a:prstGeom>
-          <a:solidFill>
-            <a:srgbClr val="C00000"/>
-          </a:solidFill>
-          <a:ln>
-            <a:noFill/>
-          </a:ln>
-        </p:spPr>
-        <p:style>
-          <a:lnRef idx="2">
-            <a:schemeClr val="accent1">
-              <a:shade val="50000"/>
-            </a:schemeClr>
-          </a:lnRef>
-          <a:fillRef idx="1">
-            <a:schemeClr val="accent1"/>
-          </a:fillRef>
-          <a:effectRef idx="0">
-            <a:schemeClr val="accent1"/>
-          </a:effectRef>
-          <a:fontRef idx="minor">
-            <a:schemeClr val="lt1"/>
-          </a:fontRef>
-        </p:style>
-        <p:txBody>
-          <a:bodyPr rtlCol="0" anchor="ctr"/>
-          <a:lstStyle/>
-          <a:p>
-            <a:pPr algn="ctr"/>
-            <a:endParaRPr lang="en-US"/>
-          </a:p>
-        </p:txBody>
-      </p:sp>
-      <p:sp>
-        <p:nvSpPr>
-          <p:cNvPr id="25" name="Flowchart: Connector 24">
-            <a:extLst>
-              <a:ext uri="{FF2B5EF4-FFF2-40B4-BE49-F238E27FC236}">
-                <a16:creationId xmlns:a16="http://schemas.microsoft.com/office/drawing/2014/main" id="{4615169B-B2DC-45EC-B51A-4F9C8DA65B9F}"/>
-              </a:ext>
-            </a:extLst>
-          </p:cNvPr>
-          <p:cNvSpPr/>
-          <p:nvPr/>
-        </p:nvSpPr>
-        <p:spPr>
-          <a:xfrm>
-            <a:off x="4102859" y="2340937"/>
-            <a:ext cx="206644" cy="206644"/>
-          </a:xfrm>
-          <a:prstGeom prst="flowChartConnector">
-            <a:avLst/>
-          </a:prstGeom>
-          <a:solidFill>
-            <a:schemeClr val="accent1">
-              <a:lumMod val="75000"/>
-            </a:schemeClr>
-          </a:solidFill>
-          <a:ln>
-            <a:noFill/>
-          </a:ln>
-        </p:spPr>
-        <p:style>
-          <a:lnRef idx="2">
-            <a:schemeClr val="accent1">
-              <a:shade val="50000"/>
-            </a:schemeClr>
-          </a:lnRef>
-          <a:fillRef idx="1">
-            <a:schemeClr val="accent1"/>
-          </a:fillRef>
-          <a:effectRef idx="0">
-            <a:schemeClr val="accent1"/>
-          </a:effectRef>
-          <a:fontRef idx="minor">
-            <a:schemeClr val="lt1"/>
-          </a:fontRef>
-        </p:style>
-        <p:txBody>
-          <a:bodyPr rtlCol="0" anchor="ctr"/>
-          <a:lstStyle/>
-          <a:p>
-            <a:pPr algn="ctr"/>
-            <a:endParaRPr lang="en-US"/>
-          </a:p>
-        </p:txBody>
-      </p:sp>
-      <p:sp>
-        <p:nvSpPr>
-          <p:cNvPr id="26" name="Flowchart: Connector 25">
-            <a:extLst>
-              <a:ext uri="{FF2B5EF4-FFF2-40B4-BE49-F238E27FC236}">
-                <a16:creationId xmlns:a16="http://schemas.microsoft.com/office/drawing/2014/main" id="{B4074890-4F27-4CB1-8A78-44B1E2D10CF8}"/>
-              </a:ext>
-            </a:extLst>
-          </p:cNvPr>
-          <p:cNvSpPr/>
-          <p:nvPr/>
-        </p:nvSpPr>
-        <p:spPr>
-          <a:xfrm>
-            <a:off x="3727921" y="2857172"/>
-            <a:ext cx="206644" cy="206644"/>
-          </a:xfrm>
-          <a:prstGeom prst="flowChartConnector">
-            <a:avLst/>
-          </a:prstGeom>
-          <a:solidFill>
-            <a:schemeClr val="accent1">
-              <a:lumMod val="75000"/>
-            </a:schemeClr>
-          </a:solidFill>
-          <a:ln>
-            <a:noFill/>
-          </a:ln>
-        </p:spPr>
-        <p:style>
-          <a:lnRef idx="2">
-            <a:schemeClr val="accent1">
-              <a:shade val="50000"/>
-            </a:schemeClr>
-          </a:lnRef>
-          <a:fillRef idx="1">
-            <a:schemeClr val="accent1"/>
-          </a:fillRef>
-          <a:effectRef idx="0">
-            <a:schemeClr val="accent1"/>
-          </a:effectRef>
-          <a:fontRef idx="minor">
-            <a:schemeClr val="lt1"/>
-          </a:fontRef>
-        </p:style>
-        <p:txBody>
-          <a:bodyPr rtlCol="0" anchor="ctr"/>
-          <a:lstStyle/>
-          <a:p>
-            <a:pPr algn="ctr"/>
-            <a:endParaRPr lang="en-US"/>
-          </a:p>
-        </p:txBody>
-      </p:sp>
-      <p:sp>
-        <p:nvSpPr>
-          <p:cNvPr id="27" name="Flowchart: Connector 26">
-            <a:extLst>
-              <a:ext uri="{FF2B5EF4-FFF2-40B4-BE49-F238E27FC236}">
-                <a16:creationId xmlns:a16="http://schemas.microsoft.com/office/drawing/2014/main" id="{AEFA72CA-C3DC-4954-B4EB-8EC4D085134B}"/>
-              </a:ext>
-            </a:extLst>
-          </p:cNvPr>
-          <p:cNvSpPr/>
-          <p:nvPr/>
-        </p:nvSpPr>
-        <p:spPr>
-          <a:xfrm>
-            <a:off x="3365809" y="2322273"/>
-            <a:ext cx="206644" cy="206644"/>
-          </a:xfrm>
-          <a:prstGeom prst="flowChartConnector">
-            <a:avLst/>
-          </a:prstGeom>
-          <a:solidFill>
-            <a:schemeClr val="accent1">
-              <a:lumMod val="75000"/>
-            </a:schemeClr>
-          </a:solidFill>
-          <a:ln>
-            <a:noFill/>
-          </a:ln>
-        </p:spPr>
-        <p:style>
-          <a:lnRef idx="2">
-            <a:schemeClr val="accent1">
-              <a:shade val="50000"/>
-            </a:schemeClr>
-          </a:lnRef>
-          <a:fillRef idx="1">
-            <a:schemeClr val="accent1"/>
-          </a:fillRef>
-          <a:effectRef idx="0">
-            <a:schemeClr val="accent1"/>
-          </a:effectRef>
-          <a:fontRef idx="minor">
-            <a:schemeClr val="lt1"/>
-          </a:fontRef>
-        </p:style>
-        <p:txBody>
-          <a:bodyPr rtlCol="0" anchor="ctr"/>
-          <a:lstStyle/>
-          <a:p>
-            <a:pPr algn="ctr"/>
-            <a:endParaRPr lang="en-US"/>
-          </a:p>
-        </p:txBody>
-      </p:sp>
-      <p:sp>
-        <p:nvSpPr>
-          <p:cNvPr id="28" name="Flowchart: Connector 27">
-            <a:extLst>
-              <a:ext uri="{FF2B5EF4-FFF2-40B4-BE49-F238E27FC236}">
-                <a16:creationId xmlns:a16="http://schemas.microsoft.com/office/drawing/2014/main" id="{ADE0F69C-6D70-4106-B730-1E948E492040}"/>
-              </a:ext>
-            </a:extLst>
-          </p:cNvPr>
-          <p:cNvSpPr/>
-          <p:nvPr/>
-        </p:nvSpPr>
-        <p:spPr>
-          <a:xfrm>
-            <a:off x="3477322" y="3439126"/>
-            <a:ext cx="206644" cy="206644"/>
-          </a:xfrm>
-          <a:prstGeom prst="flowChartConnector">
-            <a:avLst/>
-          </a:prstGeom>
-          <a:solidFill>
-            <a:schemeClr val="accent1">
-              <a:lumMod val="75000"/>
-            </a:schemeClr>
-          </a:solidFill>
-          <a:ln>
-            <a:noFill/>
-          </a:ln>
-        </p:spPr>
-        <p:style>
-          <a:lnRef idx="2">
-            <a:schemeClr val="accent1">
-              <a:shade val="50000"/>
-            </a:schemeClr>
-          </a:lnRef>
-          <a:fillRef idx="1">
-            <a:schemeClr val="accent1"/>
-          </a:fillRef>
-          <a:effectRef idx="0">
-            <a:schemeClr val="accent1"/>
-          </a:effectRef>
-          <a:fontRef idx="minor">
-            <a:schemeClr val="lt1"/>
-          </a:fontRef>
-        </p:style>
-        <p:txBody>
-          <a:bodyPr rtlCol="0" anchor="ctr"/>
-          <a:lstStyle/>
-          <a:p>
-            <a:pPr algn="ctr"/>
-            <a:endParaRPr lang="en-US"/>
-          </a:p>
-        </p:txBody>
-      </p:sp>
-      <p:grpSp>
-        <p:nvGrpSpPr>
-          <p:cNvPr id="56" name="Group 55">
-            <a:extLst>
-              <a:ext uri="{FF2B5EF4-FFF2-40B4-BE49-F238E27FC236}">
-                <a16:creationId xmlns:a16="http://schemas.microsoft.com/office/drawing/2014/main" id="{268709FE-11AE-43F5-8025-BC1BFC04B6B8}"/>
-              </a:ext>
-            </a:extLst>
-          </p:cNvPr>
-          <p:cNvGrpSpPr/>
-          <p:nvPr/>
-        </p:nvGrpSpPr>
-        <p:grpSpPr>
-          <a:xfrm>
-            <a:off x="3890670" y="3840963"/>
-            <a:ext cx="330692" cy="330692"/>
-            <a:chOff x="4737859" y="2615348"/>
-            <a:chExt cx="330692" cy="330692"/>
-          </a:xfrm>
-        </p:grpSpPr>
-        <p:sp>
-          <p:nvSpPr>
-            <p:cNvPr id="54" name="Flowchart: Connector 53">
-              <a:extLst>
-                <a:ext uri="{FF2B5EF4-FFF2-40B4-BE49-F238E27FC236}">
-                  <a16:creationId xmlns:a16="http://schemas.microsoft.com/office/drawing/2014/main" id="{A3D7F9FF-02A6-40BE-A3EA-95677107C6BB}"/>
-                </a:ext>
-              </a:extLst>
-            </p:cNvPr>
-            <p:cNvSpPr/>
-            <p:nvPr/>
-          </p:nvSpPr>
-          <p:spPr>
-            <a:xfrm>
-              <a:off x="4799883" y="2677372"/>
-              <a:ext cx="206644" cy="206644"/>
-            </a:xfrm>
-            <a:prstGeom prst="flowChartConnector">
-              <a:avLst/>
-            </a:prstGeom>
-            <a:solidFill>
-              <a:schemeClr val="accent1">
-                <a:lumMod val="75000"/>
-              </a:schemeClr>
-            </a:solidFill>
-            <a:ln>
-              <a:noFill/>
-            </a:ln>
-          </p:spPr>
-          <p:style>
-            <a:lnRef idx="2">
-              <a:schemeClr val="accent1">
-                <a:shade val="50000"/>
-              </a:schemeClr>
-            </a:lnRef>
-            <a:fillRef idx="1">
-              <a:schemeClr val="accent1"/>
-            </a:fillRef>
-            <a:effectRef idx="0">
-              <a:schemeClr val="accent1"/>
-            </a:effectRef>
-            <a:fontRef idx="minor">
-              <a:schemeClr val="lt1"/>
-            </a:fontRef>
-          </p:style>
-          <p:txBody>
-            <a:bodyPr rtlCol="0" anchor="ctr"/>
-            <a:lstStyle/>
-            <a:p>
-              <a:pPr algn="ctr"/>
-              <a:endParaRPr lang="en-US"/>
-            </a:p>
-          </p:txBody>
-        </p:sp>
-        <p:sp>
-          <p:nvSpPr>
-            <p:cNvPr id="55" name="Flowchart: Connector 54">
-              <a:extLst>
-                <a:ext uri="{FF2B5EF4-FFF2-40B4-BE49-F238E27FC236}">
-                  <a16:creationId xmlns:a16="http://schemas.microsoft.com/office/drawing/2014/main" id="{F2749AF0-183B-4492-9B5E-A5D4FABF072A}"/>
-                </a:ext>
-              </a:extLst>
-            </p:cNvPr>
-            <p:cNvSpPr/>
-            <p:nvPr/>
-          </p:nvSpPr>
-          <p:spPr>
-            <a:xfrm>
-              <a:off x="4737859" y="2615348"/>
-              <a:ext cx="330692" cy="330692"/>
-            </a:xfrm>
-            <a:prstGeom prst="flowChartConnector">
-              <a:avLst/>
-            </a:prstGeom>
-            <a:noFill/>
-            <a:ln w="28575">
-              <a:solidFill>
-                <a:schemeClr val="tx1">
-                  <a:lumMod val="75000"/>
-                  <a:lumOff val="25000"/>
-                </a:schemeClr>
-              </a:solidFill>
-            </a:ln>
-          </p:spPr>
-          <p:style>
-            <a:lnRef idx="2">
-              <a:schemeClr val="accent1">
-                <a:shade val="50000"/>
-              </a:schemeClr>
-            </a:lnRef>
-            <a:fillRef idx="1">
-              <a:schemeClr val="accent1"/>
-            </a:fillRef>
-            <a:effectRef idx="0">
-              <a:schemeClr val="accent1"/>
-            </a:effectRef>
-            <a:fontRef idx="minor">
-              <a:schemeClr val="lt1"/>
-            </a:fontRef>
-          </p:style>
-          <p:txBody>
-            <a:bodyPr rtlCol="0" anchor="ctr"/>
-            <a:lstStyle/>
-            <a:p>
-              <a:pPr algn="ctr"/>
-              <a:endParaRPr lang="en-US"/>
-            </a:p>
-          </p:txBody>
-        </p:sp>
-      </p:grpSp>
-      <p:grpSp>
-        <p:nvGrpSpPr>
-          <p:cNvPr id="57" name="Group 56">
-            <a:extLst>
-              <a:ext uri="{FF2B5EF4-FFF2-40B4-BE49-F238E27FC236}">
-                <a16:creationId xmlns:a16="http://schemas.microsoft.com/office/drawing/2014/main" id="{A952E881-D982-4C2D-BFA7-CC0669E40982}"/>
-              </a:ext>
-            </a:extLst>
-          </p:cNvPr>
-          <p:cNvGrpSpPr/>
-          <p:nvPr/>
-        </p:nvGrpSpPr>
-        <p:grpSpPr>
-          <a:xfrm>
-            <a:off x="4561234" y="3171842"/>
-            <a:ext cx="330692" cy="330692"/>
-            <a:chOff x="4737859" y="2615348"/>
-            <a:chExt cx="330692" cy="330692"/>
-          </a:xfrm>
-        </p:grpSpPr>
-        <p:sp>
-          <p:nvSpPr>
-            <p:cNvPr id="58" name="Flowchart: Connector 57">
-              <a:extLst>
-                <a:ext uri="{FF2B5EF4-FFF2-40B4-BE49-F238E27FC236}">
-                  <a16:creationId xmlns:a16="http://schemas.microsoft.com/office/drawing/2014/main" id="{065366C8-FB2B-4CA1-9BB4-F215BC63C1BF}"/>
-                </a:ext>
-              </a:extLst>
-            </p:cNvPr>
-            <p:cNvSpPr/>
-            <p:nvPr/>
-          </p:nvSpPr>
-          <p:spPr>
-            <a:xfrm>
-              <a:off x="4799883" y="2677372"/>
-              <a:ext cx="206644" cy="206644"/>
-            </a:xfrm>
-            <a:prstGeom prst="flowChartConnector">
-              <a:avLst/>
-            </a:prstGeom>
-            <a:solidFill>
-              <a:schemeClr val="accent1">
-                <a:lumMod val="75000"/>
-              </a:schemeClr>
-            </a:solidFill>
-            <a:ln>
-              <a:noFill/>
-            </a:ln>
-          </p:spPr>
-          <p:style>
-            <a:lnRef idx="2">
-              <a:schemeClr val="accent1">
-                <a:shade val="50000"/>
-              </a:schemeClr>
-            </a:lnRef>
-            <a:fillRef idx="1">
-              <a:schemeClr val="accent1"/>
-            </a:fillRef>
-            <a:effectRef idx="0">
-              <a:schemeClr val="accent1"/>
-            </a:effectRef>
-            <a:fontRef idx="minor">
-              <a:schemeClr val="lt1"/>
-            </a:fontRef>
-          </p:style>
-          <p:txBody>
-            <a:bodyPr rtlCol="0" anchor="ctr"/>
-            <a:lstStyle/>
-            <a:p>
-              <a:pPr algn="ctr"/>
-              <a:endParaRPr lang="en-US"/>
-            </a:p>
-          </p:txBody>
-        </p:sp>
-        <p:sp>
-          <p:nvSpPr>
-            <p:cNvPr id="59" name="Flowchart: Connector 58">
-              <a:extLst>
-                <a:ext uri="{FF2B5EF4-FFF2-40B4-BE49-F238E27FC236}">
-                  <a16:creationId xmlns:a16="http://schemas.microsoft.com/office/drawing/2014/main" id="{02EAC9FC-815F-4E31-B6F3-2E31AC7CC625}"/>
-                </a:ext>
-              </a:extLst>
-            </p:cNvPr>
-            <p:cNvSpPr/>
-            <p:nvPr/>
-          </p:nvSpPr>
-          <p:spPr>
-            <a:xfrm>
-              <a:off x="4737859" y="2615348"/>
-              <a:ext cx="330692" cy="330692"/>
-            </a:xfrm>
-            <a:prstGeom prst="flowChartConnector">
-              <a:avLst/>
-            </a:prstGeom>
-            <a:noFill/>
-            <a:ln w="28575">
-              <a:solidFill>
-                <a:schemeClr val="tx1">
-                  <a:lumMod val="75000"/>
-                  <a:lumOff val="25000"/>
-                </a:schemeClr>
-              </a:solidFill>
-            </a:ln>
-          </p:spPr>
-          <p:style>
-            <a:lnRef idx="2">
-              <a:schemeClr val="accent1">
-                <a:shade val="50000"/>
-              </a:schemeClr>
-            </a:lnRef>
-            <a:fillRef idx="1">
-              <a:schemeClr val="accent1"/>
-            </a:fillRef>
-            <a:effectRef idx="0">
-              <a:schemeClr val="accent1"/>
-            </a:effectRef>
-            <a:fontRef idx="minor">
-              <a:schemeClr val="lt1"/>
-            </a:fontRef>
-          </p:style>
-          <p:txBody>
-            <a:bodyPr rtlCol="0" anchor="ctr"/>
-            <a:lstStyle/>
-            <a:p>
-              <a:pPr algn="ctr"/>
-              <a:endParaRPr lang="en-US"/>
-            </a:p>
-          </p:txBody>
-        </p:sp>
-      </p:grpSp>
-      <p:grpSp>
-        <p:nvGrpSpPr>
-          <p:cNvPr id="60" name="Group 59">
-            <a:extLst>
-              <a:ext uri="{FF2B5EF4-FFF2-40B4-BE49-F238E27FC236}">
-                <a16:creationId xmlns:a16="http://schemas.microsoft.com/office/drawing/2014/main" id="{D9F10C00-E4EB-4446-BCAB-57D6B4F14AAA}"/>
-              </a:ext>
-            </a:extLst>
-          </p:cNvPr>
-          <p:cNvGrpSpPr/>
-          <p:nvPr/>
-        </p:nvGrpSpPr>
-        <p:grpSpPr>
-          <a:xfrm>
-            <a:off x="6134988" y="3852917"/>
-            <a:ext cx="330692" cy="330692"/>
-            <a:chOff x="4737859" y="2615348"/>
-            <a:chExt cx="330692" cy="330692"/>
-          </a:xfrm>
-        </p:grpSpPr>
-        <p:sp>
-          <p:nvSpPr>
-            <p:cNvPr id="61" name="Flowchart: Connector 60">
-              <a:extLst>
-                <a:ext uri="{FF2B5EF4-FFF2-40B4-BE49-F238E27FC236}">
-                  <a16:creationId xmlns:a16="http://schemas.microsoft.com/office/drawing/2014/main" id="{949AB44D-FA2C-42F7-A3CB-5E6FAF1238EC}"/>
-                </a:ext>
-              </a:extLst>
-            </p:cNvPr>
-            <p:cNvSpPr/>
-            <p:nvPr/>
-          </p:nvSpPr>
-          <p:spPr>
-            <a:xfrm>
-              <a:off x="4799883" y="2677372"/>
-              <a:ext cx="206644" cy="206644"/>
-            </a:xfrm>
-            <a:prstGeom prst="flowChartConnector">
-              <a:avLst/>
-            </a:prstGeom>
-            <a:solidFill>
-              <a:srgbClr val="C00000"/>
-            </a:solidFill>
-            <a:ln>
-              <a:noFill/>
-            </a:ln>
-          </p:spPr>
-          <p:style>
-            <a:lnRef idx="2">
-              <a:schemeClr val="accent1">
-                <a:shade val="50000"/>
-              </a:schemeClr>
-            </a:lnRef>
-            <a:fillRef idx="1">
-              <a:schemeClr val="accent1"/>
-            </a:fillRef>
-            <a:effectRef idx="0">
-              <a:schemeClr val="accent1"/>
-            </a:effectRef>
-            <a:fontRef idx="minor">
-              <a:schemeClr val="lt1"/>
-            </a:fontRef>
-          </p:style>
-          <p:txBody>
-            <a:bodyPr rtlCol="0" anchor="ctr"/>
-            <a:lstStyle/>
-            <a:p>
-              <a:pPr algn="ctr"/>
-              <a:endParaRPr lang="en-US"/>
-            </a:p>
-          </p:txBody>
-        </p:sp>
-        <p:sp>
-          <p:nvSpPr>
-            <p:cNvPr id="62" name="Flowchart: Connector 61">
-              <a:extLst>
-                <a:ext uri="{FF2B5EF4-FFF2-40B4-BE49-F238E27FC236}">
-                  <a16:creationId xmlns:a16="http://schemas.microsoft.com/office/drawing/2014/main" id="{22561974-2A5A-424C-9A04-E625086B425C}"/>
-                </a:ext>
-              </a:extLst>
-            </p:cNvPr>
-            <p:cNvSpPr/>
-            <p:nvPr/>
-          </p:nvSpPr>
-          <p:spPr>
-            <a:xfrm>
-              <a:off x="4737859" y="2615348"/>
-              <a:ext cx="330692" cy="330692"/>
-            </a:xfrm>
-            <a:prstGeom prst="flowChartConnector">
-              <a:avLst/>
-            </a:prstGeom>
-            <a:noFill/>
-            <a:ln w="28575">
-              <a:solidFill>
-                <a:schemeClr val="tx1">
-                  <a:lumMod val="75000"/>
-                  <a:lumOff val="25000"/>
-                </a:schemeClr>
-              </a:solidFill>
-            </a:ln>
-          </p:spPr>
-          <p:style>
-            <a:lnRef idx="2">
-              <a:schemeClr val="accent1">
-                <a:shade val="50000"/>
-              </a:schemeClr>
-            </a:lnRef>
-            <a:fillRef idx="1">
-              <a:schemeClr val="accent1"/>
-            </a:fillRef>
-            <a:effectRef idx="0">
-              <a:schemeClr val="accent1"/>
-            </a:effectRef>
-            <a:fontRef idx="minor">
-              <a:schemeClr val="lt1"/>
-            </a:fontRef>
-          </p:style>
-          <p:txBody>
-            <a:bodyPr rtlCol="0" anchor="ctr"/>
-            <a:lstStyle/>
-            <a:p>
-              <a:pPr algn="ctr"/>
-              <a:endParaRPr lang="en-US"/>
-            </a:p>
-          </p:txBody>
-        </p:sp>
-      </p:grpSp>
-      <p:sp>
-        <p:nvSpPr>
-          <p:cNvPr id="63" name="Flowchart: Connector 62">
-            <a:extLst>
-              <a:ext uri="{FF2B5EF4-FFF2-40B4-BE49-F238E27FC236}">
-                <a16:creationId xmlns:a16="http://schemas.microsoft.com/office/drawing/2014/main" id="{0A3980B5-D378-4070-BAB3-2DA8DD04DBA5}"/>
-              </a:ext>
-            </a:extLst>
-          </p:cNvPr>
-          <p:cNvSpPr/>
-          <p:nvPr/>
-        </p:nvSpPr>
-        <p:spPr>
-          <a:xfrm>
-            <a:off x="6035922" y="4876313"/>
-            <a:ext cx="206644" cy="206644"/>
-          </a:xfrm>
-          <a:prstGeom prst="flowChartConnector">
-            <a:avLst/>
-          </a:prstGeom>
-          <a:solidFill>
-            <a:srgbClr val="C00000"/>
-          </a:solidFill>
-          <a:ln>
-            <a:noFill/>
-          </a:ln>
-        </p:spPr>
-        <p:style>
-          <a:lnRef idx="2">
-            <a:schemeClr val="accent1">
-              <a:shade val="50000"/>
-            </a:schemeClr>
-          </a:lnRef>
-          <a:fillRef idx="1">
-            <a:schemeClr val="accent1"/>
-          </a:fillRef>
-          <a:effectRef idx="0">
-            <a:schemeClr val="accent1"/>
-          </a:effectRef>
-          <a:fontRef idx="minor">
-            <a:schemeClr val="lt1"/>
-          </a:fontRef>
-        </p:style>
-        <p:txBody>
-          <a:bodyPr rtlCol="0" anchor="ctr"/>
-          <a:lstStyle/>
-          <a:p>
-            <a:pPr algn="ctr"/>
-            <a:endParaRPr lang="en-US"/>
-          </a:p>
-        </p:txBody>
-      </p:sp>
-      <p:sp>
-        <p:nvSpPr>
-          <p:cNvPr id="64" name="Flowchart: Connector 63">
-            <a:extLst>
-              <a:ext uri="{FF2B5EF4-FFF2-40B4-BE49-F238E27FC236}">
-                <a16:creationId xmlns:a16="http://schemas.microsoft.com/office/drawing/2014/main" id="{86831F6A-CE3F-44FF-B5F2-EC068D807CBE}"/>
-              </a:ext>
-            </a:extLst>
-          </p:cNvPr>
-          <p:cNvSpPr/>
-          <p:nvPr/>
-        </p:nvSpPr>
-        <p:spPr>
-          <a:xfrm>
-            <a:off x="7656826" y="4311552"/>
-            <a:ext cx="206644" cy="206644"/>
-          </a:xfrm>
-          <a:prstGeom prst="flowChartConnector">
-            <a:avLst/>
-          </a:prstGeom>
-          <a:solidFill>
-            <a:srgbClr val="C00000"/>
-          </a:solidFill>
-          <a:ln>
-            <a:noFill/>
-          </a:ln>
-        </p:spPr>
-        <p:style>
-          <a:lnRef idx="2">
-            <a:schemeClr val="accent1">
-              <a:shade val="50000"/>
-            </a:schemeClr>
-          </a:lnRef>
-          <a:fillRef idx="1">
-            <a:schemeClr val="accent1"/>
-          </a:fillRef>
-          <a:effectRef idx="0">
-            <a:schemeClr val="accent1"/>
-          </a:effectRef>
-          <a:fontRef idx="minor">
-            <a:schemeClr val="lt1"/>
-          </a:fontRef>
-        </p:style>
-        <p:txBody>
-          <a:bodyPr rtlCol="0" anchor="ctr"/>
-          <a:lstStyle/>
-          <a:p>
-            <a:pPr algn="ctr"/>
-            <a:endParaRPr lang="en-US"/>
-          </a:p>
-        </p:txBody>
-      </p:sp>
-      <p:sp>
-        <p:nvSpPr>
-          <p:cNvPr id="65" name="Flowchart: Connector 64">
-            <a:extLst>
-              <a:ext uri="{FF2B5EF4-FFF2-40B4-BE49-F238E27FC236}">
-                <a16:creationId xmlns:a16="http://schemas.microsoft.com/office/drawing/2014/main" id="{98B93E27-AC14-4150-9CBC-6B691A4EE286}"/>
-              </a:ext>
-            </a:extLst>
-          </p:cNvPr>
-          <p:cNvSpPr/>
-          <p:nvPr/>
-        </p:nvSpPr>
-        <p:spPr>
-          <a:xfrm>
-            <a:off x="6780569" y="4538748"/>
-            <a:ext cx="206644" cy="206644"/>
-          </a:xfrm>
-          <a:prstGeom prst="flowChartConnector">
-            <a:avLst/>
-          </a:prstGeom>
-          <a:solidFill>
-            <a:srgbClr val="C00000"/>
-          </a:solidFill>
-          <a:ln>
-            <a:noFill/>
-          </a:ln>
-        </p:spPr>
-        <p:style>
-          <a:lnRef idx="2">
-            <a:schemeClr val="accent1">
-              <a:shade val="50000"/>
-            </a:schemeClr>
-          </a:lnRef>
-          <a:fillRef idx="1">
-            <a:schemeClr val="accent1"/>
-          </a:fillRef>
-          <a:effectRef idx="0">
-            <a:schemeClr val="accent1"/>
-          </a:effectRef>
-          <a:fontRef idx="minor">
-            <a:schemeClr val="lt1"/>
-          </a:fontRef>
-        </p:style>
-        <p:txBody>
-          <a:bodyPr rtlCol="0" anchor="ctr"/>
-          <a:lstStyle/>
-          <a:p>
-            <a:pPr algn="ctr"/>
-            <a:endParaRPr lang="en-US"/>
-          </a:p>
-        </p:txBody>
-      </p:sp>
-      <p:cxnSp>
-        <p:nvCxnSpPr>
-          <p:cNvPr id="3" name="Straight Connector 2">
-            <a:extLst>
-              <a:ext uri="{FF2B5EF4-FFF2-40B4-BE49-F238E27FC236}">
-                <a16:creationId xmlns:a16="http://schemas.microsoft.com/office/drawing/2014/main" id="{93CAD2FA-EFF6-4355-BA08-8BBE93F97D4C}"/>
-              </a:ext>
-            </a:extLst>
-          </p:cNvPr>
-          <p:cNvCxnSpPr>
-            <a:cxnSpLocks/>
-          </p:cNvCxnSpPr>
-          <p:nvPr/>
-        </p:nvCxnSpPr>
-        <p:spPr>
-          <a:xfrm flipH="1">
-            <a:off x="3429972" y="1484244"/>
-            <a:ext cx="4266013" cy="4266013"/>
-          </a:xfrm>
-          <a:prstGeom prst="line">
-            <a:avLst/>
-          </a:prstGeom>
-          <a:ln w="28575">
-            <a:solidFill>
-              <a:schemeClr val="tx1">
-                <a:lumMod val="75000"/>
-                <a:lumOff val="25000"/>
-              </a:schemeClr>
-            </a:solidFill>
-          </a:ln>
-        </p:spPr>
-        <p:style>
-          <a:lnRef idx="1">
-            <a:schemeClr val="accent1"/>
-          </a:lnRef>
-          <a:fillRef idx="0">
-            <a:schemeClr val="accent1"/>
-          </a:fillRef>
-          <a:effectRef idx="0">
-            <a:schemeClr val="accent1"/>
-          </a:effectRef>
-          <a:fontRef idx="minor">
-            <a:schemeClr val="tx1"/>
-          </a:fontRef>
-        </p:style>
-      </p:cxnSp>
-      <p:cxnSp>
-        <p:nvCxnSpPr>
-          <p:cNvPr id="33" name="Straight Connector 32">
-            <a:extLst>
-              <a:ext uri="{FF2B5EF4-FFF2-40B4-BE49-F238E27FC236}">
-                <a16:creationId xmlns:a16="http://schemas.microsoft.com/office/drawing/2014/main" id="{2FABCC97-0F3E-4B45-AB61-F89CCC2EF2B8}"/>
-              </a:ext>
-            </a:extLst>
-          </p:cNvPr>
-          <p:cNvCxnSpPr>
-            <a:cxnSpLocks/>
-          </p:cNvCxnSpPr>
-          <p:nvPr/>
-        </p:nvCxnSpPr>
-        <p:spPr>
-          <a:xfrm flipH="1">
-            <a:off x="4572681" y="1498132"/>
-            <a:ext cx="4252124" cy="4252125"/>
-          </a:xfrm>
-          <a:prstGeom prst="line">
-            <a:avLst/>
-          </a:prstGeom>
-          <a:ln w="28575">
-            <a:solidFill>
-              <a:schemeClr val="tx1">
-                <a:lumMod val="75000"/>
-                <a:lumOff val="25000"/>
-              </a:schemeClr>
-            </a:solidFill>
-            <a:prstDash val="sysDot"/>
-          </a:ln>
-        </p:spPr>
-        <p:style>
-          <a:lnRef idx="1">
-            <a:schemeClr val="accent1"/>
-          </a:lnRef>
-          <a:fillRef idx="0">
-            <a:schemeClr val="accent1"/>
-          </a:fillRef>
-          <a:effectRef idx="0">
-            <a:schemeClr val="accent1"/>
-          </a:effectRef>
-          <a:fontRef idx="minor">
-            <a:schemeClr val="tx1"/>
-          </a:fontRef>
-        </p:style>
-      </p:cxnSp>
-      <p:cxnSp>
-        <p:nvCxnSpPr>
-          <p:cNvPr id="35" name="Straight Connector 34">
-            <a:extLst>
-              <a:ext uri="{FF2B5EF4-FFF2-40B4-BE49-F238E27FC236}">
-                <a16:creationId xmlns:a16="http://schemas.microsoft.com/office/drawing/2014/main" id="{B80F012F-7DCA-4672-8206-5CA383E43CF4}"/>
-              </a:ext>
-            </a:extLst>
-          </p:cNvPr>
-          <p:cNvCxnSpPr>
-            <a:cxnSpLocks/>
-          </p:cNvCxnSpPr>
-          <p:nvPr/>
-        </p:nvCxnSpPr>
-        <p:spPr>
-          <a:xfrm flipH="1">
-            <a:off x="2732088" y="1498131"/>
-            <a:ext cx="3821188" cy="3821188"/>
-          </a:xfrm>
-          <a:prstGeom prst="line">
-            <a:avLst/>
-          </a:prstGeom>
-          <a:ln w="28575">
-            <a:solidFill>
-              <a:schemeClr val="tx1">
-                <a:lumMod val="75000"/>
-                <a:lumOff val="25000"/>
-              </a:schemeClr>
-            </a:solidFill>
-            <a:prstDash val="sysDot"/>
-          </a:ln>
-        </p:spPr>
-        <p:style>
-          <a:lnRef idx="1">
-            <a:schemeClr val="accent1"/>
-          </a:lnRef>
-          <a:fillRef idx="0">
-            <a:schemeClr val="accent1"/>
-          </a:fillRef>
-          <a:effectRef idx="0">
-            <a:schemeClr val="accent1"/>
-          </a:effectRef>
-          <a:fontRef idx="minor">
-            <a:schemeClr val="tx1"/>
-          </a:fontRef>
-        </p:style>
-      </p:cxnSp>
-      <p:cxnSp>
-        <p:nvCxnSpPr>
-          <p:cNvPr id="51" name="Straight Connector 50">
-            <a:extLst>
-              <a:ext uri="{FF2B5EF4-FFF2-40B4-BE49-F238E27FC236}">
-                <a16:creationId xmlns:a16="http://schemas.microsoft.com/office/drawing/2014/main" id="{38F72B24-1885-4EA9-9541-F3A457D2A403}"/>
-              </a:ext>
-            </a:extLst>
-          </p:cNvPr>
-          <p:cNvCxnSpPr>
-            <a:cxnSpLocks/>
-          </p:cNvCxnSpPr>
-          <p:nvPr/>
-        </p:nvCxnSpPr>
-        <p:spPr>
-          <a:xfrm flipH="1" flipV="1">
-            <a:off x="3592282" y="4469912"/>
-            <a:ext cx="562303" cy="562303"/>
-          </a:xfrm>
-          <a:prstGeom prst="line">
-            <a:avLst/>
-          </a:prstGeom>
-          <a:ln w="28575">
-            <a:solidFill>
-              <a:schemeClr val="tx1">
-                <a:lumMod val="75000"/>
-                <a:lumOff val="25000"/>
-              </a:schemeClr>
-            </a:solidFill>
-            <a:headEnd type="triangle" w="med" len="med"/>
-            <a:tailEnd type="triangle" w="med" len="med"/>
-          </a:ln>
-        </p:spPr>
-        <p:style>
-          <a:lnRef idx="1">
-            <a:schemeClr val="accent1"/>
-          </a:lnRef>
-          <a:fillRef idx="0">
-            <a:schemeClr val="accent1"/>
-          </a:fillRef>
-          <a:effectRef idx="0">
-            <a:schemeClr val="accent1"/>
-          </a:effectRef>
-          <a:fontRef idx="minor">
-            <a:schemeClr val="tx1"/>
-          </a:fontRef>
-        </p:style>
-      </p:cxnSp>
-      <p:cxnSp>
-        <p:nvCxnSpPr>
-          <p:cNvPr id="67" name="Straight Connector 66">
-            <a:extLst>
-              <a:ext uri="{FF2B5EF4-FFF2-40B4-BE49-F238E27FC236}">
-                <a16:creationId xmlns:a16="http://schemas.microsoft.com/office/drawing/2014/main" id="{37A3195E-9D8C-4DA3-B2AD-564F78CA8EEB}"/>
-              </a:ext>
-            </a:extLst>
-          </p:cNvPr>
-          <p:cNvCxnSpPr>
-            <a:cxnSpLocks/>
-          </p:cNvCxnSpPr>
-          <p:nvPr/>
-        </p:nvCxnSpPr>
-        <p:spPr>
-          <a:xfrm flipH="1" flipV="1">
-            <a:off x="4150023" y="5034176"/>
-            <a:ext cx="568972" cy="568972"/>
-          </a:xfrm>
-          <a:prstGeom prst="line">
-            <a:avLst/>
-          </a:prstGeom>
-          <a:ln w="28575">
-            <a:solidFill>
-              <a:schemeClr val="tx1">
-                <a:lumMod val="75000"/>
-                <a:lumOff val="25000"/>
-              </a:schemeClr>
-            </a:solidFill>
-            <a:headEnd type="triangle" w="med" len="med"/>
-            <a:tailEnd type="triangle" w="med" len="med"/>
-          </a:ln>
-        </p:spPr>
-        <p:style>
-          <a:lnRef idx="1">
-            <a:schemeClr val="accent1"/>
-          </a:lnRef>
-          <a:fillRef idx="0">
-            <a:schemeClr val="accent1"/>
-          </a:fillRef>
-          <a:effectRef idx="0">
-            <a:schemeClr val="accent1"/>
-          </a:effectRef>
-          <a:fontRef idx="minor">
-            <a:schemeClr val="tx1"/>
-          </a:fontRef>
-        </p:style>
-      </p:cxnSp>
-      <p:sp>
-        <p:nvSpPr>
-          <p:cNvPr id="37" name="TextBox 36">
-            <a:extLst>
-              <a:ext uri="{FF2B5EF4-FFF2-40B4-BE49-F238E27FC236}">
-                <a16:creationId xmlns:a16="http://schemas.microsoft.com/office/drawing/2014/main" id="{834E67F0-37D5-4075-A2D8-04EA3E2BD35B}"/>
-              </a:ext>
-            </a:extLst>
-          </p:cNvPr>
-          <p:cNvSpPr txBox="1"/>
-          <p:nvPr/>
-        </p:nvSpPr>
-        <p:spPr>
-          <a:xfrm rot="2700000">
-            <a:off x="3621318" y="4487884"/>
-            <a:ext cx="763427" cy="261610"/>
-          </a:xfrm>
-          <a:prstGeom prst="rect">
-            <a:avLst/>
-          </a:prstGeom>
-          <a:noFill/>
-        </p:spPr>
-        <p:txBody>
-          <a:bodyPr wrap="square" rtlCol="0">
-            <a:spAutoFit/>
-          </a:bodyPr>
-          <a:lstStyle/>
-          <a:p>
-            <a:pPr algn="ctr"/>
-            <a:r>
-              <a:rPr lang="en-US" sz="1100">
-                <a:solidFill>
-                  <a:schemeClr val="tx1">
-                    <a:lumMod val="75000"/>
-                    <a:lumOff val="25000"/>
-                  </a:schemeClr>
-                </a:solidFill>
-                <a:latin typeface="Open Sans" panose="020B0606030504020204" pitchFamily="34" charset="0"/>
-                <a:ea typeface="Open Sans" panose="020B0606030504020204" pitchFamily="34" charset="0"/>
-                <a:cs typeface="Open Sans" panose="020B0606030504020204" pitchFamily="34" charset="0"/>
-              </a:rPr>
-              <a:t>margin</a:t>
-            </a:r>
-          </a:p>
-        </p:txBody>
-      </p:sp>
-      <p:sp>
-        <p:nvSpPr>
-          <p:cNvPr id="68" name="TextBox 67">
-            <a:extLst>
-              <a:ext uri="{FF2B5EF4-FFF2-40B4-BE49-F238E27FC236}">
-                <a16:creationId xmlns:a16="http://schemas.microsoft.com/office/drawing/2014/main" id="{9F6CD4BD-BBD2-4FAE-BB82-773EEB45EF11}"/>
-              </a:ext>
-            </a:extLst>
-          </p:cNvPr>
-          <p:cNvSpPr txBox="1"/>
-          <p:nvPr/>
-        </p:nvSpPr>
-        <p:spPr>
-          <a:xfrm rot="2700000">
-            <a:off x="4167105" y="5052176"/>
-            <a:ext cx="794093" cy="261610"/>
-          </a:xfrm>
-          <a:prstGeom prst="rect">
-            <a:avLst/>
-          </a:prstGeom>
-          <a:noFill/>
-        </p:spPr>
-        <p:txBody>
-          <a:bodyPr wrap="square" rtlCol="0">
-            <a:spAutoFit/>
-          </a:bodyPr>
-          <a:lstStyle/>
-          <a:p>
-            <a:pPr algn="ctr"/>
-            <a:r>
-              <a:rPr lang="en-US" sz="1100">
-                <a:solidFill>
-                  <a:schemeClr val="tx1">
-                    <a:lumMod val="75000"/>
-                    <a:lumOff val="25000"/>
-                  </a:schemeClr>
-                </a:solidFill>
-                <a:latin typeface="Open Sans" panose="020B0606030504020204" pitchFamily="34" charset="0"/>
-                <a:ea typeface="Open Sans" panose="020B0606030504020204" pitchFamily="34" charset="0"/>
-                <a:cs typeface="Open Sans" panose="020B0606030504020204" pitchFamily="34" charset="0"/>
-              </a:rPr>
-              <a:t>margin</a:t>
-            </a:r>
-          </a:p>
-        </p:txBody>
-      </p:sp>
-      <p:sp>
-        <p:nvSpPr>
-          <p:cNvPr id="50" name="TextBox 49">
-            <a:extLst>
-              <a:ext uri="{FF2B5EF4-FFF2-40B4-BE49-F238E27FC236}">
-                <a16:creationId xmlns:a16="http://schemas.microsoft.com/office/drawing/2014/main" id="{7A73BF5B-D8BD-4BE0-A350-1D1B2129F2C9}"/>
-              </a:ext>
-            </a:extLst>
-          </p:cNvPr>
-          <p:cNvSpPr txBox="1"/>
-          <p:nvPr/>
-        </p:nvSpPr>
-        <p:spPr>
-          <a:xfrm>
-            <a:off x="8031318" y="3041504"/>
-            <a:ext cx="1090719" cy="523220"/>
-          </a:xfrm>
-          <a:prstGeom prst="rect">
-            <a:avLst/>
-          </a:prstGeom>
-          <a:noFill/>
-        </p:spPr>
-        <p:txBody>
-          <a:bodyPr wrap="square" rtlCol="0">
-            <a:spAutoFit/>
-          </a:bodyPr>
-          <a:lstStyle/>
-          <a:p>
-            <a:r>
-              <a:rPr lang="en-US" sz="1400" b="1">
-                <a:solidFill>
-                  <a:schemeClr val="tx1">
-                    <a:lumMod val="75000"/>
-                    <a:lumOff val="25000"/>
-                  </a:schemeClr>
-                </a:solidFill>
-                <a:latin typeface="Open Sans" panose="020B0606030504020204" pitchFamily="34" charset="0"/>
-                <a:ea typeface="Open Sans" panose="020B0606030504020204" pitchFamily="34" charset="0"/>
-                <a:cs typeface="Open Sans" panose="020B0606030504020204" pitchFamily="34" charset="0"/>
-              </a:rPr>
-              <a:t>support vectors</a:t>
-            </a:r>
-          </a:p>
-        </p:txBody>
-      </p:sp>
-      <p:pic>
-        <p:nvPicPr>
-          <p:cNvPr id="12" name="Picture 11">
-            <a:extLst>
-              <a:ext uri="{FF2B5EF4-FFF2-40B4-BE49-F238E27FC236}">
-                <a16:creationId xmlns:a16="http://schemas.microsoft.com/office/drawing/2014/main" id="{FABD9EDD-08AC-5F47-AF40-8959F7FE38D9}"/>
-              </a:ext>
-            </a:extLst>
-          </p:cNvPr>
-          <p:cNvPicPr>
-            <a:picLocks noChangeAspect="1"/>
-          </p:cNvPicPr>
-          <p:nvPr/>
-        </p:nvPicPr>
-        <p:blipFill rotWithShape="1">
-          <a:blip r:embed="rId3"/>
-          <a:srcRect l="1213" t="5968" r="9379" b="73648"/>
-          <a:stretch/>
-        </p:blipFill>
-        <p:spPr>
-          <a:xfrm rot="18900000">
-            <a:off x="6096782" y="1927718"/>
-            <a:ext cx="1657832" cy="216270"/>
-          </a:xfrm>
-          <a:prstGeom prst="rect">
-            <a:avLst/>
-          </a:prstGeom>
-        </p:spPr>
-      </p:pic>
-      <p:pic>
-        <p:nvPicPr>
-          <p:cNvPr id="48" name="Picture 47">
-            <a:extLst>
-              <a:ext uri="{FF2B5EF4-FFF2-40B4-BE49-F238E27FC236}">
-                <a16:creationId xmlns:a16="http://schemas.microsoft.com/office/drawing/2014/main" id="{F2484BDB-6814-6E44-A3DD-CAA3FCB64E31}"/>
-              </a:ext>
-            </a:extLst>
-          </p:cNvPr>
-          <p:cNvPicPr>
-            <a:picLocks noChangeAspect="1"/>
-          </p:cNvPicPr>
-          <p:nvPr/>
-        </p:nvPicPr>
-        <p:blipFill rotWithShape="1">
-          <a:blip r:embed="rId3"/>
-          <a:srcRect l="925" t="39513" r="9667" b="40103"/>
-          <a:stretch/>
-        </p:blipFill>
-        <p:spPr>
-          <a:xfrm rot="18900000">
-            <a:off x="5025560" y="1897032"/>
-            <a:ext cx="1657832" cy="216270"/>
-          </a:xfrm>
-          <a:prstGeom prst="rect">
-            <a:avLst/>
-          </a:prstGeom>
-        </p:spPr>
-      </p:pic>
-      <p:pic>
-        <p:nvPicPr>
-          <p:cNvPr id="49" name="Picture 48">
-            <a:extLst>
-              <a:ext uri="{FF2B5EF4-FFF2-40B4-BE49-F238E27FC236}">
-                <a16:creationId xmlns:a16="http://schemas.microsoft.com/office/drawing/2014/main" id="{1ECBCFCC-B500-A547-A5F9-3AAC916465EE}"/>
-              </a:ext>
-            </a:extLst>
-          </p:cNvPr>
-          <p:cNvPicPr>
-            <a:picLocks noChangeAspect="1"/>
-          </p:cNvPicPr>
-          <p:nvPr/>
-        </p:nvPicPr>
-        <p:blipFill rotWithShape="1">
-          <a:blip r:embed="rId3"/>
-          <a:srcRect l="1212" t="68301" r="5461" b="6673"/>
-          <a:stretch/>
-        </p:blipFill>
-        <p:spPr>
-          <a:xfrm rot="18900000">
-            <a:off x="7145454" y="1971745"/>
-            <a:ext cx="1730502" cy="265524"/>
-          </a:xfrm>
-          <a:prstGeom prst="rect">
-            <a:avLst/>
-          </a:prstGeom>
-        </p:spPr>
-      </p:pic>
-    </p:spTree>
-    <p:extLst>
-      <p:ext uri="{BB962C8B-B14F-4D97-AF65-F5344CB8AC3E}">
-        <p14:creationId xmlns:p14="http://schemas.microsoft.com/office/powerpoint/2010/main" val="1040351659"/>
-      </p:ext>
-    </p:extLst>
-  </p:cSld>
-  <p:clrMapOvr>
-    <a:masterClrMapping/>
-  </p:clrMapOvr>
-</p:sld>
-</file>
-
-<file path=ppt/slides/slide2.xml><?xml version="1.0" encoding="utf-8"?>
-<p:sld xmlns:a="http://schemas.openxmlformats.org/drawingml/2006/main" xmlns:r="http://schemas.openxmlformats.org/officeDocument/2006/relationships" xmlns:p="http://schemas.openxmlformats.org/presentationml/2006/main">
-  <p:cSld>
-    <p:spTree>
-      <p:nvGrpSpPr>
-        <p:cNvPr id="1" name=""/>
-        <p:cNvGrpSpPr/>
-        <p:nvPr/>
-      </p:nvGrpSpPr>
-      <p:grpSpPr>
-        <a:xfrm>
-          <a:off x="0" y="0"/>
-          <a:ext cx="0" cy="0"/>
-          <a:chOff x="0" y="0"/>
-          <a:chExt cx="0" cy="0"/>
-        </a:xfrm>
-      </p:grpSpPr>
-      <p:pic>
-        <p:nvPicPr>
-          <p:cNvPr id="12" name="Picture 11">
-            <a:extLst>
-              <a:ext uri="{FF2B5EF4-FFF2-40B4-BE49-F238E27FC236}">
-                <a16:creationId xmlns:a16="http://schemas.microsoft.com/office/drawing/2014/main" id="{D87181E1-D9FC-1E4D-923C-04AC29CF43D0}"/>
-              </a:ext>
-            </a:extLst>
-          </p:cNvPr>
-          <p:cNvPicPr>
-            <a:picLocks noChangeAspect="1"/>
-          </p:cNvPicPr>
-          <p:nvPr/>
-        </p:nvPicPr>
-        <p:blipFill>
-          <a:blip r:embed="rId2"/>
-          <a:stretch>
-            <a:fillRect/>
-          </a:stretch>
-        </p:blipFill>
-        <p:spPr>
-          <a:xfrm>
-            <a:off x="5318464" y="3074657"/>
-            <a:ext cx="462177" cy="277306"/>
-          </a:xfrm>
-          <a:prstGeom prst="rect">
-            <a:avLst/>
-          </a:prstGeom>
-        </p:spPr>
-      </p:pic>
-      <p:pic>
-        <p:nvPicPr>
-          <p:cNvPr id="8" name="Picture 7">
-            <a:extLst>
-              <a:ext uri="{FF2B5EF4-FFF2-40B4-BE49-F238E27FC236}">
-                <a16:creationId xmlns:a16="http://schemas.microsoft.com/office/drawing/2014/main" id="{7EB823CC-6947-A848-BE3C-0E1EABF5367D}"/>
-              </a:ext>
-            </a:extLst>
-          </p:cNvPr>
-          <p:cNvPicPr>
-            <a:picLocks noChangeAspect="1"/>
-          </p:cNvPicPr>
-          <p:nvPr/>
-        </p:nvPicPr>
-        <p:blipFill>
-          <a:blip r:embed="rId3"/>
-          <a:stretch>
-            <a:fillRect/>
-          </a:stretch>
-        </p:blipFill>
-        <p:spPr>
-          <a:xfrm>
-            <a:off x="3180550" y="4979176"/>
-            <a:ext cx="790837" cy="277306"/>
-          </a:xfrm>
-          <a:prstGeom prst="rect">
-            <a:avLst/>
-          </a:prstGeom>
-        </p:spPr>
-      </p:pic>
-      <p:pic>
-        <p:nvPicPr>
-          <p:cNvPr id="40" name="Picture 39">
-            <a:extLst>
-              <a:ext uri="{FF2B5EF4-FFF2-40B4-BE49-F238E27FC236}">
-                <a16:creationId xmlns:a16="http://schemas.microsoft.com/office/drawing/2014/main" id="{F41E5136-7661-2244-9147-681202FB4AE9}"/>
-              </a:ext>
-            </a:extLst>
-          </p:cNvPr>
-          <p:cNvPicPr>
-            <a:picLocks noChangeAspect="1"/>
-          </p:cNvPicPr>
-          <p:nvPr/>
-        </p:nvPicPr>
-        <p:blipFill rotWithShape="1">
-          <a:blip r:embed="rId4"/>
-          <a:srcRect r="50001"/>
-          <a:stretch/>
-        </p:blipFill>
-        <p:spPr>
-          <a:xfrm>
-            <a:off x="9074152" y="5433551"/>
-            <a:ext cx="298448" cy="342900"/>
-          </a:xfrm>
-          <a:prstGeom prst="rect">
-            <a:avLst/>
-          </a:prstGeom>
-        </p:spPr>
-      </p:pic>
-      <p:pic>
-        <p:nvPicPr>
-          <p:cNvPr id="9" name="Picture 8">
-            <a:extLst>
-              <a:ext uri="{FF2B5EF4-FFF2-40B4-BE49-F238E27FC236}">
-                <a16:creationId xmlns:a16="http://schemas.microsoft.com/office/drawing/2014/main" id="{DE710FD0-F05C-4F9D-A947-04AE39487E48}"/>
-              </a:ext>
-            </a:extLst>
-          </p:cNvPr>
-          <p:cNvPicPr>
-            <a:picLocks noChangeAspect="1"/>
-          </p:cNvPicPr>
-          <p:nvPr/>
-        </p:nvPicPr>
-        <p:blipFill>
-          <a:blip r:embed="rId5"/>
-          <a:stretch>
-            <a:fillRect/>
-          </a:stretch>
-        </p:blipFill>
-        <p:spPr>
-          <a:xfrm>
-            <a:off x="7913964" y="3590717"/>
-            <a:ext cx="495369" cy="333422"/>
-          </a:xfrm>
-          <a:prstGeom prst="rect">
-            <a:avLst/>
-          </a:prstGeom>
-        </p:spPr>
-      </p:pic>
-      <p:sp>
-        <p:nvSpPr>
-          <p:cNvPr id="4" name="Flowchart: Connector 3">
-            <a:extLst>
-              <a:ext uri="{FF2B5EF4-FFF2-40B4-BE49-F238E27FC236}">
-                <a16:creationId xmlns:a16="http://schemas.microsoft.com/office/drawing/2014/main" id="{ED01BEC1-4E3B-46B1-94F2-437974460882}"/>
-              </a:ext>
-            </a:extLst>
-          </p:cNvPr>
-          <p:cNvSpPr/>
-          <p:nvPr/>
-        </p:nvSpPr>
-        <p:spPr>
-          <a:xfrm>
-            <a:off x="4662479" y="2359600"/>
-            <a:ext cx="206644" cy="206644"/>
-          </a:xfrm>
-          <a:prstGeom prst="flowChartConnector">
-            <a:avLst/>
-          </a:prstGeom>
-          <a:solidFill>
-            <a:schemeClr val="accent1">
-              <a:lumMod val="75000"/>
-            </a:schemeClr>
-          </a:solidFill>
-          <a:ln>
-            <a:noFill/>
-          </a:ln>
-        </p:spPr>
-        <p:style>
-          <a:lnRef idx="2">
-            <a:schemeClr val="accent1">
-              <a:shade val="50000"/>
-            </a:schemeClr>
-          </a:lnRef>
-          <a:fillRef idx="1">
-            <a:schemeClr val="accent1"/>
-          </a:fillRef>
-          <a:effectRef idx="0">
-            <a:schemeClr val="accent1"/>
-          </a:effectRef>
-          <a:fontRef idx="minor">
-            <a:schemeClr val="lt1"/>
-          </a:fontRef>
-        </p:style>
-        <p:txBody>
-          <a:bodyPr rtlCol="0" anchor="ctr"/>
-          <a:lstStyle/>
-          <a:p>
-            <a:pPr algn="ctr"/>
-            <a:endParaRPr lang="en-US"/>
-          </a:p>
-        </p:txBody>
-      </p:sp>
-      <p:sp>
-        <p:nvSpPr>
-          <p:cNvPr id="5" name="Flowchart: Connector 4">
-            <a:extLst>
-              <a:ext uri="{FF2B5EF4-FFF2-40B4-BE49-F238E27FC236}">
-                <a16:creationId xmlns:a16="http://schemas.microsoft.com/office/drawing/2014/main" id="{1B799897-5E51-416B-B411-04D297C6752E}"/>
-              </a:ext>
-            </a:extLst>
-          </p:cNvPr>
-          <p:cNvSpPr/>
-          <p:nvPr/>
-        </p:nvSpPr>
-        <p:spPr>
-          <a:xfrm>
-            <a:off x="3123961" y="3063816"/>
-            <a:ext cx="206644" cy="206644"/>
-          </a:xfrm>
-          <a:prstGeom prst="flowChartConnector">
-            <a:avLst/>
-          </a:prstGeom>
-          <a:solidFill>
-            <a:schemeClr val="accent1">
-              <a:lumMod val="75000"/>
-            </a:schemeClr>
-          </a:solidFill>
-          <a:ln>
-            <a:noFill/>
-          </a:ln>
-        </p:spPr>
-        <p:style>
-          <a:lnRef idx="2">
-            <a:schemeClr val="accent1">
-              <a:shade val="50000"/>
-            </a:schemeClr>
-          </a:lnRef>
-          <a:fillRef idx="1">
-            <a:schemeClr val="accent1"/>
-          </a:fillRef>
-          <a:effectRef idx="0">
-            <a:schemeClr val="accent1"/>
-          </a:effectRef>
-          <a:fontRef idx="minor">
-            <a:schemeClr val="lt1"/>
-          </a:fontRef>
-        </p:style>
-        <p:txBody>
-          <a:bodyPr rtlCol="0" anchor="ctr"/>
-          <a:lstStyle/>
-          <a:p>
-            <a:pPr algn="ctr"/>
-            <a:endParaRPr lang="en-US"/>
-          </a:p>
-        </p:txBody>
-      </p:sp>
-      <p:sp>
-        <p:nvSpPr>
-          <p:cNvPr id="6" name="Flowchart: Connector 5">
-            <a:extLst>
-              <a:ext uri="{FF2B5EF4-FFF2-40B4-BE49-F238E27FC236}">
-                <a16:creationId xmlns:a16="http://schemas.microsoft.com/office/drawing/2014/main" id="{263E8C3E-9DCF-46E7-A9DC-5B21A30D5E49}"/>
-              </a:ext>
-            </a:extLst>
-          </p:cNvPr>
-          <p:cNvSpPr/>
-          <p:nvPr/>
-        </p:nvSpPr>
-        <p:spPr>
-          <a:xfrm>
-            <a:off x="7154570" y="5082957"/>
-            <a:ext cx="206644" cy="206644"/>
-          </a:xfrm>
-          <a:prstGeom prst="flowChartConnector">
-            <a:avLst/>
-          </a:prstGeom>
-          <a:solidFill>
-            <a:srgbClr val="C00000"/>
-          </a:solidFill>
-          <a:ln>
-            <a:noFill/>
-          </a:ln>
-        </p:spPr>
-        <p:style>
-          <a:lnRef idx="2">
-            <a:schemeClr val="accent1">
-              <a:shade val="50000"/>
-            </a:schemeClr>
-          </a:lnRef>
-          <a:fillRef idx="1">
-            <a:schemeClr val="accent1"/>
-          </a:fillRef>
-          <a:effectRef idx="0">
-            <a:schemeClr val="accent1"/>
-          </a:effectRef>
-          <a:fontRef idx="minor">
-            <a:schemeClr val="lt1"/>
-          </a:fontRef>
-        </p:style>
-        <p:txBody>
-          <a:bodyPr rtlCol="0" anchor="ctr"/>
-          <a:lstStyle/>
-          <a:p>
-            <a:pPr algn="ctr"/>
-            <a:endParaRPr lang="en-US"/>
-          </a:p>
-        </p:txBody>
-      </p:sp>
-      <p:cxnSp>
-        <p:nvCxnSpPr>
-          <p:cNvPr id="10" name="Straight Arrow Connector 9">
-            <a:extLst>
-              <a:ext uri="{FF2B5EF4-FFF2-40B4-BE49-F238E27FC236}">
-                <a16:creationId xmlns:a16="http://schemas.microsoft.com/office/drawing/2014/main" id="{BADB0179-BF03-40DB-8FD5-E47883CFCD2A}"/>
-              </a:ext>
-            </a:extLst>
-          </p:cNvPr>
-          <p:cNvCxnSpPr>
-            <a:cxnSpLocks/>
-          </p:cNvCxnSpPr>
-          <p:nvPr/>
-        </p:nvCxnSpPr>
-        <p:spPr>
-          <a:xfrm flipV="1">
-            <a:off x="2732088" y="1192144"/>
-            <a:ext cx="0" cy="4572000"/>
-          </a:xfrm>
-          <a:prstGeom prst="straightConnector1">
-            <a:avLst/>
-          </a:prstGeom>
-          <a:ln w="28575">
-            <a:solidFill>
-              <a:schemeClr val="tx1">
-                <a:lumMod val="75000"/>
-                <a:lumOff val="25000"/>
-              </a:schemeClr>
-            </a:solidFill>
-            <a:tailEnd type="triangle"/>
-          </a:ln>
-        </p:spPr>
-        <p:style>
-          <a:lnRef idx="1">
-            <a:schemeClr val="accent1"/>
-          </a:lnRef>
-          <a:fillRef idx="0">
-            <a:schemeClr val="accent1"/>
-          </a:fillRef>
-          <a:effectRef idx="0">
-            <a:schemeClr val="accent1"/>
-          </a:effectRef>
-          <a:fontRef idx="minor">
-            <a:schemeClr val="tx1"/>
-          </a:fontRef>
-        </p:style>
-      </p:cxnSp>
-      <p:cxnSp>
-        <p:nvCxnSpPr>
-          <p:cNvPr id="13" name="Straight Arrow Connector 12">
-            <a:extLst>
-              <a:ext uri="{FF2B5EF4-FFF2-40B4-BE49-F238E27FC236}">
-                <a16:creationId xmlns:a16="http://schemas.microsoft.com/office/drawing/2014/main" id="{346F5D00-2DD7-46F3-9464-DD6771027887}"/>
-              </a:ext>
-            </a:extLst>
-          </p:cNvPr>
-          <p:cNvCxnSpPr>
-            <a:cxnSpLocks/>
-          </p:cNvCxnSpPr>
-          <p:nvPr/>
-        </p:nvCxnSpPr>
-        <p:spPr>
-          <a:xfrm>
-            <a:off x="2732088" y="5764144"/>
-            <a:ext cx="6640512" cy="0"/>
-          </a:xfrm>
-          <a:prstGeom prst="straightConnector1">
-            <a:avLst/>
-          </a:prstGeom>
-          <a:ln w="28575">
-            <a:solidFill>
-              <a:schemeClr val="tx1">
-                <a:lumMod val="75000"/>
-                <a:lumOff val="25000"/>
-              </a:schemeClr>
-            </a:solidFill>
-            <a:tailEnd type="triangle"/>
-          </a:ln>
-        </p:spPr>
-        <p:style>
-          <a:lnRef idx="1">
-            <a:schemeClr val="accent1"/>
-          </a:lnRef>
-          <a:fillRef idx="0">
-            <a:schemeClr val="accent1"/>
-          </a:fillRef>
-          <a:effectRef idx="0">
-            <a:schemeClr val="accent1"/>
-          </a:effectRef>
-          <a:fontRef idx="minor">
-            <a:schemeClr val="tx1"/>
-          </a:fontRef>
-        </p:style>
-      </p:cxnSp>
-      <p:sp>
-        <p:nvSpPr>
-          <p:cNvPr id="16" name="Flowchart: Connector 15">
-            <a:extLst>
-              <a:ext uri="{FF2B5EF4-FFF2-40B4-BE49-F238E27FC236}">
-                <a16:creationId xmlns:a16="http://schemas.microsoft.com/office/drawing/2014/main" id="{2052F860-7FBF-42EA-94D9-BF0177D233ED}"/>
-              </a:ext>
-            </a:extLst>
-          </p:cNvPr>
-          <p:cNvSpPr/>
-          <p:nvPr/>
-        </p:nvSpPr>
-        <p:spPr>
-          <a:xfrm>
-            <a:off x="7214507" y="3767976"/>
-            <a:ext cx="206644" cy="206644"/>
-          </a:xfrm>
-          <a:prstGeom prst="flowChartConnector">
-            <a:avLst/>
-          </a:prstGeom>
-          <a:solidFill>
-            <a:srgbClr val="C00000"/>
-          </a:solidFill>
-          <a:ln>
-            <a:noFill/>
-          </a:ln>
-        </p:spPr>
-        <p:style>
-          <a:lnRef idx="2">
-            <a:schemeClr val="accent1">
-              <a:shade val="50000"/>
-            </a:schemeClr>
-          </a:lnRef>
-          <a:fillRef idx="1">
-            <a:schemeClr val="accent1"/>
-          </a:fillRef>
-          <a:effectRef idx="0">
-            <a:schemeClr val="accent1"/>
-          </a:effectRef>
-          <a:fontRef idx="minor">
-            <a:schemeClr val="lt1"/>
-          </a:fontRef>
-        </p:style>
-        <p:txBody>
-          <a:bodyPr rtlCol="0" anchor="ctr"/>
-          <a:lstStyle/>
-          <a:p>
-            <a:pPr algn="ctr"/>
-            <a:endParaRPr lang="en-US"/>
-          </a:p>
-        </p:txBody>
-      </p:sp>
-      <p:sp>
-        <p:nvSpPr>
-          <p:cNvPr id="25" name="Flowchart: Connector 24">
-            <a:extLst>
-              <a:ext uri="{FF2B5EF4-FFF2-40B4-BE49-F238E27FC236}">
-                <a16:creationId xmlns:a16="http://schemas.microsoft.com/office/drawing/2014/main" id="{4615169B-B2DC-45EC-B51A-4F9C8DA65B9F}"/>
-              </a:ext>
-            </a:extLst>
-          </p:cNvPr>
-          <p:cNvSpPr/>
-          <p:nvPr/>
-        </p:nvSpPr>
-        <p:spPr>
-          <a:xfrm>
-            <a:off x="4102859" y="2340937"/>
-            <a:ext cx="206644" cy="206644"/>
-          </a:xfrm>
-          <a:prstGeom prst="flowChartConnector">
-            <a:avLst/>
-          </a:prstGeom>
-          <a:solidFill>
-            <a:schemeClr val="accent1">
-              <a:lumMod val="75000"/>
-            </a:schemeClr>
-          </a:solidFill>
-          <a:ln>
-            <a:noFill/>
-          </a:ln>
-        </p:spPr>
-        <p:style>
-          <a:lnRef idx="2">
-            <a:schemeClr val="accent1">
-              <a:shade val="50000"/>
-            </a:schemeClr>
-          </a:lnRef>
-          <a:fillRef idx="1">
-            <a:schemeClr val="accent1"/>
-          </a:fillRef>
-          <a:effectRef idx="0">
-            <a:schemeClr val="accent1"/>
-          </a:effectRef>
-          <a:fontRef idx="minor">
-            <a:schemeClr val="lt1"/>
-          </a:fontRef>
-        </p:style>
-        <p:txBody>
-          <a:bodyPr rtlCol="0" anchor="ctr"/>
-          <a:lstStyle/>
-          <a:p>
-            <a:pPr algn="ctr"/>
-            <a:endParaRPr lang="en-US"/>
-          </a:p>
-        </p:txBody>
-      </p:sp>
-      <p:sp>
-        <p:nvSpPr>
-          <p:cNvPr id="26" name="Flowchart: Connector 25">
-            <a:extLst>
-              <a:ext uri="{FF2B5EF4-FFF2-40B4-BE49-F238E27FC236}">
-                <a16:creationId xmlns:a16="http://schemas.microsoft.com/office/drawing/2014/main" id="{B4074890-4F27-4CB1-8A78-44B1E2D10CF8}"/>
-              </a:ext>
-            </a:extLst>
-          </p:cNvPr>
-          <p:cNvSpPr/>
-          <p:nvPr/>
-        </p:nvSpPr>
-        <p:spPr>
-          <a:xfrm>
-            <a:off x="3727921" y="2857172"/>
-            <a:ext cx="206644" cy="206644"/>
-          </a:xfrm>
-          <a:prstGeom prst="flowChartConnector">
-            <a:avLst/>
-          </a:prstGeom>
-          <a:solidFill>
-            <a:schemeClr val="accent1">
-              <a:lumMod val="75000"/>
-            </a:schemeClr>
-          </a:solidFill>
-          <a:ln>
-            <a:noFill/>
-          </a:ln>
-        </p:spPr>
-        <p:style>
-          <a:lnRef idx="2">
-            <a:schemeClr val="accent1">
-              <a:shade val="50000"/>
-            </a:schemeClr>
-          </a:lnRef>
-          <a:fillRef idx="1">
-            <a:schemeClr val="accent1"/>
-          </a:fillRef>
-          <a:effectRef idx="0">
-            <a:schemeClr val="accent1"/>
-          </a:effectRef>
-          <a:fontRef idx="minor">
-            <a:schemeClr val="lt1"/>
-          </a:fontRef>
-        </p:style>
-        <p:txBody>
-          <a:bodyPr rtlCol="0" anchor="ctr"/>
-          <a:lstStyle/>
-          <a:p>
-            <a:pPr algn="ctr"/>
-            <a:endParaRPr lang="en-US"/>
-          </a:p>
-        </p:txBody>
-      </p:sp>
-      <p:sp>
-        <p:nvSpPr>
-          <p:cNvPr id="27" name="Flowchart: Connector 26">
-            <a:extLst>
-              <a:ext uri="{FF2B5EF4-FFF2-40B4-BE49-F238E27FC236}">
-                <a16:creationId xmlns:a16="http://schemas.microsoft.com/office/drawing/2014/main" id="{AEFA72CA-C3DC-4954-B4EB-8EC4D085134B}"/>
-              </a:ext>
-            </a:extLst>
-          </p:cNvPr>
-          <p:cNvSpPr/>
-          <p:nvPr/>
-        </p:nvSpPr>
-        <p:spPr>
-          <a:xfrm>
-            <a:off x="3365809" y="2322273"/>
-            <a:ext cx="206644" cy="206644"/>
-          </a:xfrm>
-          <a:prstGeom prst="flowChartConnector">
-            <a:avLst/>
-          </a:prstGeom>
-          <a:solidFill>
-            <a:schemeClr val="accent1">
-              <a:lumMod val="75000"/>
-            </a:schemeClr>
-          </a:solidFill>
-          <a:ln>
-            <a:noFill/>
-          </a:ln>
-        </p:spPr>
-        <p:style>
-          <a:lnRef idx="2">
-            <a:schemeClr val="accent1">
-              <a:shade val="50000"/>
-            </a:schemeClr>
-          </a:lnRef>
-          <a:fillRef idx="1">
-            <a:schemeClr val="accent1"/>
-          </a:fillRef>
-          <a:effectRef idx="0">
-            <a:schemeClr val="accent1"/>
-          </a:effectRef>
-          <a:fontRef idx="minor">
-            <a:schemeClr val="lt1"/>
-          </a:fontRef>
-        </p:style>
-        <p:txBody>
-          <a:bodyPr rtlCol="0" anchor="ctr"/>
-          <a:lstStyle/>
-          <a:p>
-            <a:pPr algn="ctr"/>
-            <a:endParaRPr lang="en-US"/>
-          </a:p>
-        </p:txBody>
-      </p:sp>
-      <p:sp>
-        <p:nvSpPr>
-          <p:cNvPr id="28" name="Flowchart: Connector 27">
-            <a:extLst>
-              <a:ext uri="{FF2B5EF4-FFF2-40B4-BE49-F238E27FC236}">
-                <a16:creationId xmlns:a16="http://schemas.microsoft.com/office/drawing/2014/main" id="{ADE0F69C-6D70-4106-B730-1E948E492040}"/>
-              </a:ext>
-            </a:extLst>
-          </p:cNvPr>
-          <p:cNvSpPr/>
-          <p:nvPr/>
-        </p:nvSpPr>
-        <p:spPr>
-          <a:xfrm>
-            <a:off x="3477322" y="3439126"/>
-            <a:ext cx="206644" cy="206644"/>
-          </a:xfrm>
-          <a:prstGeom prst="flowChartConnector">
-            <a:avLst/>
-          </a:prstGeom>
-          <a:solidFill>
-            <a:schemeClr val="accent1">
-              <a:lumMod val="75000"/>
-            </a:schemeClr>
-          </a:solidFill>
-          <a:ln>
-            <a:noFill/>
-          </a:ln>
-        </p:spPr>
-        <p:style>
-          <a:lnRef idx="2">
-            <a:schemeClr val="accent1">
-              <a:shade val="50000"/>
-            </a:schemeClr>
-          </a:lnRef>
-          <a:fillRef idx="1">
-            <a:schemeClr val="accent1"/>
-          </a:fillRef>
-          <a:effectRef idx="0">
-            <a:schemeClr val="accent1"/>
-          </a:effectRef>
-          <a:fontRef idx="minor">
-            <a:schemeClr val="lt1"/>
-          </a:fontRef>
-        </p:style>
-        <p:txBody>
-          <a:bodyPr rtlCol="0" anchor="ctr"/>
-          <a:lstStyle/>
-          <a:p>
-            <a:pPr algn="ctr"/>
-            <a:endParaRPr lang="en-US"/>
-          </a:p>
-        </p:txBody>
-      </p:sp>
-      <p:grpSp>
-        <p:nvGrpSpPr>
-          <p:cNvPr id="56" name="Group 55">
-            <a:extLst>
-              <a:ext uri="{FF2B5EF4-FFF2-40B4-BE49-F238E27FC236}">
-                <a16:creationId xmlns:a16="http://schemas.microsoft.com/office/drawing/2014/main" id="{268709FE-11AE-43F5-8025-BC1BFC04B6B8}"/>
-              </a:ext>
-            </a:extLst>
-          </p:cNvPr>
-          <p:cNvGrpSpPr/>
-          <p:nvPr/>
-        </p:nvGrpSpPr>
-        <p:grpSpPr>
-          <a:xfrm>
-            <a:off x="3890670" y="3840963"/>
-            <a:ext cx="330692" cy="330692"/>
-            <a:chOff x="4737859" y="2615348"/>
-            <a:chExt cx="330692" cy="330692"/>
-          </a:xfrm>
-        </p:grpSpPr>
-        <p:sp>
-          <p:nvSpPr>
-            <p:cNvPr id="54" name="Flowchart: Connector 53">
-              <a:extLst>
-                <a:ext uri="{FF2B5EF4-FFF2-40B4-BE49-F238E27FC236}">
-                  <a16:creationId xmlns:a16="http://schemas.microsoft.com/office/drawing/2014/main" id="{A3D7F9FF-02A6-40BE-A3EA-95677107C6BB}"/>
-                </a:ext>
-              </a:extLst>
-            </p:cNvPr>
-            <p:cNvSpPr/>
-            <p:nvPr/>
-          </p:nvSpPr>
-          <p:spPr>
-            <a:xfrm>
-              <a:off x="4799883" y="2677372"/>
-              <a:ext cx="206644" cy="206644"/>
-            </a:xfrm>
-            <a:prstGeom prst="flowChartConnector">
-              <a:avLst/>
-            </a:prstGeom>
-            <a:solidFill>
-              <a:schemeClr val="accent1">
-                <a:lumMod val="75000"/>
-              </a:schemeClr>
-            </a:solidFill>
-            <a:ln>
-              <a:noFill/>
-            </a:ln>
-          </p:spPr>
-          <p:style>
-            <a:lnRef idx="2">
-              <a:schemeClr val="accent1">
-                <a:shade val="50000"/>
-              </a:schemeClr>
-            </a:lnRef>
-            <a:fillRef idx="1">
-              <a:schemeClr val="accent1"/>
-            </a:fillRef>
-            <a:effectRef idx="0">
-              <a:schemeClr val="accent1"/>
-            </a:effectRef>
-            <a:fontRef idx="minor">
-              <a:schemeClr val="lt1"/>
-            </a:fontRef>
-          </p:style>
-          <p:txBody>
-            <a:bodyPr rtlCol="0" anchor="ctr"/>
-            <a:lstStyle/>
-            <a:p>
-              <a:pPr algn="ctr"/>
-              <a:endParaRPr lang="en-US"/>
-            </a:p>
-          </p:txBody>
-        </p:sp>
-        <p:sp>
-          <p:nvSpPr>
-            <p:cNvPr id="55" name="Flowchart: Connector 54">
-              <a:extLst>
-                <a:ext uri="{FF2B5EF4-FFF2-40B4-BE49-F238E27FC236}">
-                  <a16:creationId xmlns:a16="http://schemas.microsoft.com/office/drawing/2014/main" id="{F2749AF0-183B-4492-9B5E-A5D4FABF072A}"/>
-                </a:ext>
-              </a:extLst>
-            </p:cNvPr>
-            <p:cNvSpPr/>
-            <p:nvPr/>
-          </p:nvSpPr>
-          <p:spPr>
-            <a:xfrm>
-              <a:off x="4737859" y="2615348"/>
-              <a:ext cx="330692" cy="330692"/>
-            </a:xfrm>
-            <a:prstGeom prst="flowChartConnector">
-              <a:avLst/>
-            </a:prstGeom>
-            <a:noFill/>
-            <a:ln w="28575">
-              <a:solidFill>
-                <a:schemeClr val="tx1">
-                  <a:lumMod val="75000"/>
-                  <a:lumOff val="25000"/>
-                </a:schemeClr>
-              </a:solidFill>
-            </a:ln>
-          </p:spPr>
-          <p:style>
-            <a:lnRef idx="2">
-              <a:schemeClr val="accent1">
-                <a:shade val="50000"/>
-              </a:schemeClr>
-            </a:lnRef>
-            <a:fillRef idx="1">
-              <a:schemeClr val="accent1"/>
-            </a:fillRef>
-            <a:effectRef idx="0">
-              <a:schemeClr val="accent1"/>
-            </a:effectRef>
-            <a:fontRef idx="minor">
-              <a:schemeClr val="lt1"/>
-            </a:fontRef>
-          </p:style>
-          <p:txBody>
-            <a:bodyPr rtlCol="0" anchor="ctr"/>
-            <a:lstStyle/>
-            <a:p>
-              <a:pPr algn="ctr"/>
-              <a:endParaRPr lang="en-US"/>
-            </a:p>
-          </p:txBody>
-        </p:sp>
-      </p:grpSp>
-      <p:grpSp>
-        <p:nvGrpSpPr>
-          <p:cNvPr id="57" name="Group 56">
-            <a:extLst>
-              <a:ext uri="{FF2B5EF4-FFF2-40B4-BE49-F238E27FC236}">
-                <a16:creationId xmlns:a16="http://schemas.microsoft.com/office/drawing/2014/main" id="{A952E881-D982-4C2D-BFA7-CC0669E40982}"/>
-              </a:ext>
-            </a:extLst>
-          </p:cNvPr>
-          <p:cNvGrpSpPr/>
-          <p:nvPr/>
-        </p:nvGrpSpPr>
-        <p:grpSpPr>
-          <a:xfrm>
-            <a:off x="4561234" y="3171842"/>
-            <a:ext cx="330692" cy="330692"/>
-            <a:chOff x="4737859" y="2615348"/>
-            <a:chExt cx="330692" cy="330692"/>
-          </a:xfrm>
-        </p:grpSpPr>
-        <p:sp>
-          <p:nvSpPr>
-            <p:cNvPr id="58" name="Flowchart: Connector 57">
-              <a:extLst>
-                <a:ext uri="{FF2B5EF4-FFF2-40B4-BE49-F238E27FC236}">
-                  <a16:creationId xmlns:a16="http://schemas.microsoft.com/office/drawing/2014/main" id="{065366C8-FB2B-4CA1-9BB4-F215BC63C1BF}"/>
-                </a:ext>
-              </a:extLst>
-            </p:cNvPr>
-            <p:cNvSpPr/>
-            <p:nvPr/>
-          </p:nvSpPr>
-          <p:spPr>
-            <a:xfrm>
-              <a:off x="4799883" y="2677372"/>
-              <a:ext cx="206644" cy="206644"/>
-            </a:xfrm>
-            <a:prstGeom prst="flowChartConnector">
-              <a:avLst/>
-            </a:prstGeom>
-            <a:solidFill>
-              <a:schemeClr val="accent1">
-                <a:lumMod val="75000"/>
-              </a:schemeClr>
-            </a:solidFill>
-            <a:ln>
-              <a:noFill/>
-            </a:ln>
-          </p:spPr>
-          <p:style>
-            <a:lnRef idx="2">
-              <a:schemeClr val="accent1">
-                <a:shade val="50000"/>
-              </a:schemeClr>
-            </a:lnRef>
-            <a:fillRef idx="1">
-              <a:schemeClr val="accent1"/>
-            </a:fillRef>
-            <a:effectRef idx="0">
-              <a:schemeClr val="accent1"/>
-            </a:effectRef>
-            <a:fontRef idx="minor">
-              <a:schemeClr val="lt1"/>
-            </a:fontRef>
-          </p:style>
-          <p:txBody>
-            <a:bodyPr rtlCol="0" anchor="ctr"/>
-            <a:lstStyle/>
-            <a:p>
-              <a:pPr algn="ctr"/>
-              <a:endParaRPr lang="en-US"/>
-            </a:p>
-          </p:txBody>
-        </p:sp>
-        <p:sp>
-          <p:nvSpPr>
-            <p:cNvPr id="59" name="Flowchart: Connector 58">
-              <a:extLst>
-                <a:ext uri="{FF2B5EF4-FFF2-40B4-BE49-F238E27FC236}">
-                  <a16:creationId xmlns:a16="http://schemas.microsoft.com/office/drawing/2014/main" id="{02EAC9FC-815F-4E31-B6F3-2E31AC7CC625}"/>
-                </a:ext>
-              </a:extLst>
-            </p:cNvPr>
-            <p:cNvSpPr/>
-            <p:nvPr/>
-          </p:nvSpPr>
-          <p:spPr>
-            <a:xfrm>
-              <a:off x="4737859" y="2615348"/>
-              <a:ext cx="330692" cy="330692"/>
-            </a:xfrm>
-            <a:prstGeom prst="flowChartConnector">
-              <a:avLst/>
-            </a:prstGeom>
-            <a:noFill/>
-            <a:ln w="28575">
-              <a:solidFill>
-                <a:schemeClr val="tx1">
-                  <a:lumMod val="75000"/>
-                  <a:lumOff val="25000"/>
-                </a:schemeClr>
-              </a:solidFill>
-            </a:ln>
-          </p:spPr>
-          <p:style>
-            <a:lnRef idx="2">
-              <a:schemeClr val="accent1">
-                <a:shade val="50000"/>
-              </a:schemeClr>
-            </a:lnRef>
-            <a:fillRef idx="1">
-              <a:schemeClr val="accent1"/>
-            </a:fillRef>
-            <a:effectRef idx="0">
-              <a:schemeClr val="accent1"/>
-            </a:effectRef>
-            <a:fontRef idx="minor">
-              <a:schemeClr val="lt1"/>
-            </a:fontRef>
-          </p:style>
-          <p:txBody>
-            <a:bodyPr rtlCol="0" anchor="ctr"/>
-            <a:lstStyle/>
-            <a:p>
-              <a:pPr algn="ctr"/>
-              <a:endParaRPr lang="en-US"/>
-            </a:p>
-          </p:txBody>
-        </p:sp>
-      </p:grpSp>
-      <p:grpSp>
-        <p:nvGrpSpPr>
-          <p:cNvPr id="60" name="Group 59">
-            <a:extLst>
-              <a:ext uri="{FF2B5EF4-FFF2-40B4-BE49-F238E27FC236}">
-                <a16:creationId xmlns:a16="http://schemas.microsoft.com/office/drawing/2014/main" id="{D9F10C00-E4EB-4446-BCAB-57D6B4F14AAA}"/>
-              </a:ext>
-            </a:extLst>
-          </p:cNvPr>
-          <p:cNvGrpSpPr/>
-          <p:nvPr/>
-        </p:nvGrpSpPr>
-        <p:grpSpPr>
-          <a:xfrm>
-            <a:off x="6134988" y="3852917"/>
-            <a:ext cx="330692" cy="330692"/>
-            <a:chOff x="4737859" y="2615348"/>
-            <a:chExt cx="330692" cy="330692"/>
-          </a:xfrm>
-        </p:grpSpPr>
-        <p:sp>
-          <p:nvSpPr>
-            <p:cNvPr id="61" name="Flowchart: Connector 60">
-              <a:extLst>
-                <a:ext uri="{FF2B5EF4-FFF2-40B4-BE49-F238E27FC236}">
-                  <a16:creationId xmlns:a16="http://schemas.microsoft.com/office/drawing/2014/main" id="{949AB44D-FA2C-42F7-A3CB-5E6FAF1238EC}"/>
-                </a:ext>
-              </a:extLst>
-            </p:cNvPr>
-            <p:cNvSpPr/>
-            <p:nvPr/>
-          </p:nvSpPr>
-          <p:spPr>
-            <a:xfrm>
-              <a:off x="4799883" y="2677372"/>
-              <a:ext cx="206644" cy="206644"/>
-            </a:xfrm>
-            <a:prstGeom prst="flowChartConnector">
-              <a:avLst/>
-            </a:prstGeom>
-            <a:solidFill>
-              <a:srgbClr val="C00000"/>
-            </a:solidFill>
-            <a:ln>
-              <a:noFill/>
-            </a:ln>
-          </p:spPr>
-          <p:style>
-            <a:lnRef idx="2">
-              <a:schemeClr val="accent1">
-                <a:shade val="50000"/>
-              </a:schemeClr>
-            </a:lnRef>
-            <a:fillRef idx="1">
-              <a:schemeClr val="accent1"/>
-            </a:fillRef>
-            <a:effectRef idx="0">
-              <a:schemeClr val="accent1"/>
-            </a:effectRef>
-            <a:fontRef idx="minor">
-              <a:schemeClr val="lt1"/>
-            </a:fontRef>
-          </p:style>
-          <p:txBody>
-            <a:bodyPr rtlCol="0" anchor="ctr"/>
-            <a:lstStyle/>
-            <a:p>
-              <a:pPr algn="ctr"/>
-              <a:endParaRPr lang="en-US"/>
-            </a:p>
-          </p:txBody>
-        </p:sp>
-        <p:sp>
-          <p:nvSpPr>
-            <p:cNvPr id="62" name="Flowchart: Connector 61">
-              <a:extLst>
-                <a:ext uri="{FF2B5EF4-FFF2-40B4-BE49-F238E27FC236}">
-                  <a16:creationId xmlns:a16="http://schemas.microsoft.com/office/drawing/2014/main" id="{22561974-2A5A-424C-9A04-E625086B425C}"/>
-                </a:ext>
-              </a:extLst>
-            </p:cNvPr>
-            <p:cNvSpPr/>
-            <p:nvPr/>
-          </p:nvSpPr>
-          <p:spPr>
-            <a:xfrm>
-              <a:off x="4737859" y="2615348"/>
-              <a:ext cx="330692" cy="330692"/>
-            </a:xfrm>
-            <a:prstGeom prst="flowChartConnector">
-              <a:avLst/>
-            </a:prstGeom>
-            <a:noFill/>
-            <a:ln w="28575">
-              <a:solidFill>
-                <a:schemeClr val="tx1">
-                  <a:lumMod val="75000"/>
-                  <a:lumOff val="25000"/>
-                </a:schemeClr>
-              </a:solidFill>
-            </a:ln>
-          </p:spPr>
-          <p:style>
-            <a:lnRef idx="2">
-              <a:schemeClr val="accent1">
-                <a:shade val="50000"/>
-              </a:schemeClr>
-            </a:lnRef>
-            <a:fillRef idx="1">
-              <a:schemeClr val="accent1"/>
-            </a:fillRef>
-            <a:effectRef idx="0">
-              <a:schemeClr val="accent1"/>
-            </a:effectRef>
-            <a:fontRef idx="minor">
-              <a:schemeClr val="lt1"/>
-            </a:fontRef>
-          </p:style>
-          <p:txBody>
-            <a:bodyPr rtlCol="0" anchor="ctr"/>
-            <a:lstStyle/>
-            <a:p>
-              <a:pPr algn="ctr"/>
-              <a:endParaRPr lang="en-US"/>
-            </a:p>
-          </p:txBody>
-        </p:sp>
-      </p:grpSp>
-      <p:sp>
-        <p:nvSpPr>
-          <p:cNvPr id="63" name="Flowchart: Connector 62">
-            <a:extLst>
-              <a:ext uri="{FF2B5EF4-FFF2-40B4-BE49-F238E27FC236}">
-                <a16:creationId xmlns:a16="http://schemas.microsoft.com/office/drawing/2014/main" id="{0A3980B5-D378-4070-BAB3-2DA8DD04DBA5}"/>
-              </a:ext>
-            </a:extLst>
-          </p:cNvPr>
-          <p:cNvSpPr/>
-          <p:nvPr/>
-        </p:nvSpPr>
-        <p:spPr>
-          <a:xfrm>
-            <a:off x="6035922" y="4876313"/>
-            <a:ext cx="206644" cy="206644"/>
-          </a:xfrm>
-          <a:prstGeom prst="flowChartConnector">
-            <a:avLst/>
-          </a:prstGeom>
-          <a:solidFill>
-            <a:srgbClr val="C00000"/>
-          </a:solidFill>
-          <a:ln>
-            <a:noFill/>
-          </a:ln>
-        </p:spPr>
-        <p:style>
-          <a:lnRef idx="2">
-            <a:schemeClr val="accent1">
-              <a:shade val="50000"/>
-            </a:schemeClr>
-          </a:lnRef>
-          <a:fillRef idx="1">
-            <a:schemeClr val="accent1"/>
-          </a:fillRef>
-          <a:effectRef idx="0">
-            <a:schemeClr val="accent1"/>
-          </a:effectRef>
-          <a:fontRef idx="minor">
-            <a:schemeClr val="lt1"/>
-          </a:fontRef>
-        </p:style>
-        <p:txBody>
-          <a:bodyPr rtlCol="0" anchor="ctr"/>
-          <a:lstStyle/>
-          <a:p>
-            <a:pPr algn="ctr"/>
-            <a:endParaRPr lang="en-US"/>
-          </a:p>
-        </p:txBody>
-      </p:sp>
-      <p:sp>
-        <p:nvSpPr>
-          <p:cNvPr id="64" name="Flowchart: Connector 63">
-            <a:extLst>
-              <a:ext uri="{FF2B5EF4-FFF2-40B4-BE49-F238E27FC236}">
-                <a16:creationId xmlns:a16="http://schemas.microsoft.com/office/drawing/2014/main" id="{86831F6A-CE3F-44FF-B5F2-EC068D807CBE}"/>
-              </a:ext>
-            </a:extLst>
-          </p:cNvPr>
-          <p:cNvSpPr/>
-          <p:nvPr/>
-        </p:nvSpPr>
-        <p:spPr>
-          <a:xfrm>
-            <a:off x="7656826" y="4311552"/>
-            <a:ext cx="206644" cy="206644"/>
-          </a:xfrm>
-          <a:prstGeom prst="flowChartConnector">
-            <a:avLst/>
-          </a:prstGeom>
-          <a:solidFill>
-            <a:srgbClr val="C00000"/>
-          </a:solidFill>
-          <a:ln>
-            <a:noFill/>
-          </a:ln>
-        </p:spPr>
-        <p:style>
-          <a:lnRef idx="2">
-            <a:schemeClr val="accent1">
-              <a:shade val="50000"/>
-            </a:schemeClr>
-          </a:lnRef>
-          <a:fillRef idx="1">
-            <a:schemeClr val="accent1"/>
-          </a:fillRef>
-          <a:effectRef idx="0">
-            <a:schemeClr val="accent1"/>
-          </a:effectRef>
-          <a:fontRef idx="minor">
-            <a:schemeClr val="lt1"/>
-          </a:fontRef>
-        </p:style>
-        <p:txBody>
-          <a:bodyPr rtlCol="0" anchor="ctr"/>
-          <a:lstStyle/>
-          <a:p>
-            <a:pPr algn="ctr"/>
-            <a:endParaRPr lang="en-US"/>
-          </a:p>
-        </p:txBody>
-      </p:sp>
-      <p:sp>
-        <p:nvSpPr>
-          <p:cNvPr id="65" name="Flowchart: Connector 64">
-            <a:extLst>
-              <a:ext uri="{FF2B5EF4-FFF2-40B4-BE49-F238E27FC236}">
-                <a16:creationId xmlns:a16="http://schemas.microsoft.com/office/drawing/2014/main" id="{98B93E27-AC14-4150-9CBC-6B691A4EE286}"/>
-              </a:ext>
-            </a:extLst>
-          </p:cNvPr>
-          <p:cNvSpPr/>
-          <p:nvPr/>
-        </p:nvSpPr>
-        <p:spPr>
-          <a:xfrm>
-            <a:off x="6780569" y="4538748"/>
-            <a:ext cx="206644" cy="206644"/>
-          </a:xfrm>
-          <a:prstGeom prst="flowChartConnector">
-            <a:avLst/>
-          </a:prstGeom>
-          <a:solidFill>
-            <a:srgbClr val="C00000"/>
-          </a:solidFill>
-          <a:ln>
-            <a:noFill/>
-          </a:ln>
-        </p:spPr>
-        <p:style>
-          <a:lnRef idx="2">
-            <a:schemeClr val="accent1">
-              <a:shade val="50000"/>
-            </a:schemeClr>
-          </a:lnRef>
-          <a:fillRef idx="1">
-            <a:schemeClr val="accent1"/>
-          </a:fillRef>
-          <a:effectRef idx="0">
-            <a:schemeClr val="accent1"/>
-          </a:effectRef>
-          <a:fontRef idx="minor">
-            <a:schemeClr val="lt1"/>
-          </a:fontRef>
-        </p:style>
-        <p:txBody>
-          <a:bodyPr rtlCol="0" anchor="ctr"/>
-          <a:lstStyle/>
-          <a:p>
-            <a:pPr algn="ctr"/>
-            <a:endParaRPr lang="en-US"/>
-          </a:p>
-        </p:txBody>
-      </p:sp>
-      <p:cxnSp>
-        <p:nvCxnSpPr>
-          <p:cNvPr id="3" name="Straight Connector 2">
-            <a:extLst>
-              <a:ext uri="{FF2B5EF4-FFF2-40B4-BE49-F238E27FC236}">
-                <a16:creationId xmlns:a16="http://schemas.microsoft.com/office/drawing/2014/main" id="{93CAD2FA-EFF6-4355-BA08-8BBE93F97D4C}"/>
-              </a:ext>
-            </a:extLst>
-          </p:cNvPr>
-          <p:cNvCxnSpPr>
-            <a:cxnSpLocks/>
-          </p:cNvCxnSpPr>
-          <p:nvPr/>
-        </p:nvCxnSpPr>
-        <p:spPr>
-          <a:xfrm flipH="1">
-            <a:off x="3429972" y="1484244"/>
-            <a:ext cx="4266013" cy="4266013"/>
-          </a:xfrm>
-          <a:prstGeom prst="line">
-            <a:avLst/>
-          </a:prstGeom>
-          <a:ln w="28575">
-            <a:solidFill>
-              <a:schemeClr val="tx1">
-                <a:lumMod val="75000"/>
-                <a:lumOff val="25000"/>
-              </a:schemeClr>
-            </a:solidFill>
-          </a:ln>
-        </p:spPr>
-        <p:style>
-          <a:lnRef idx="1">
-            <a:schemeClr val="accent1"/>
-          </a:lnRef>
-          <a:fillRef idx="0">
-            <a:schemeClr val="accent1"/>
-          </a:fillRef>
-          <a:effectRef idx="0">
-            <a:schemeClr val="accent1"/>
-          </a:effectRef>
-          <a:fontRef idx="minor">
-            <a:schemeClr val="tx1"/>
-          </a:fontRef>
-        </p:style>
-      </p:cxnSp>
-      <p:cxnSp>
-        <p:nvCxnSpPr>
-          <p:cNvPr id="33" name="Straight Connector 32">
-            <a:extLst>
-              <a:ext uri="{FF2B5EF4-FFF2-40B4-BE49-F238E27FC236}">
-                <a16:creationId xmlns:a16="http://schemas.microsoft.com/office/drawing/2014/main" id="{2FABCC97-0F3E-4B45-AB61-F89CCC2EF2B8}"/>
-              </a:ext>
-            </a:extLst>
-          </p:cNvPr>
-          <p:cNvCxnSpPr>
-            <a:cxnSpLocks/>
-          </p:cNvCxnSpPr>
-          <p:nvPr/>
-        </p:nvCxnSpPr>
-        <p:spPr>
-          <a:xfrm flipH="1">
-            <a:off x="4572681" y="1498132"/>
-            <a:ext cx="4252124" cy="4252125"/>
-          </a:xfrm>
-          <a:prstGeom prst="line">
-            <a:avLst/>
-          </a:prstGeom>
-          <a:ln w="28575">
-            <a:solidFill>
-              <a:schemeClr val="tx1">
-                <a:lumMod val="75000"/>
-                <a:lumOff val="25000"/>
-              </a:schemeClr>
-            </a:solidFill>
-            <a:prstDash val="sysDot"/>
-          </a:ln>
-        </p:spPr>
-        <p:style>
-          <a:lnRef idx="1">
-            <a:schemeClr val="accent1"/>
-          </a:lnRef>
-          <a:fillRef idx="0">
-            <a:schemeClr val="accent1"/>
-          </a:fillRef>
-          <a:effectRef idx="0">
-            <a:schemeClr val="accent1"/>
-          </a:effectRef>
-          <a:fontRef idx="minor">
-            <a:schemeClr val="tx1"/>
-          </a:fontRef>
-        </p:style>
-      </p:cxnSp>
-      <p:cxnSp>
-        <p:nvCxnSpPr>
-          <p:cNvPr id="35" name="Straight Connector 34">
-            <a:extLst>
-              <a:ext uri="{FF2B5EF4-FFF2-40B4-BE49-F238E27FC236}">
-                <a16:creationId xmlns:a16="http://schemas.microsoft.com/office/drawing/2014/main" id="{B80F012F-7DCA-4672-8206-5CA383E43CF4}"/>
-              </a:ext>
-            </a:extLst>
-          </p:cNvPr>
-          <p:cNvCxnSpPr>
-            <a:cxnSpLocks/>
-          </p:cNvCxnSpPr>
-          <p:nvPr/>
-        </p:nvCxnSpPr>
-        <p:spPr>
-          <a:xfrm flipH="1">
-            <a:off x="2732088" y="1498131"/>
-            <a:ext cx="3821188" cy="3821188"/>
-          </a:xfrm>
-          <a:prstGeom prst="line">
-            <a:avLst/>
-          </a:prstGeom>
-          <a:ln w="28575">
-            <a:solidFill>
-              <a:schemeClr val="tx1">
-                <a:lumMod val="75000"/>
-                <a:lumOff val="25000"/>
-              </a:schemeClr>
-            </a:solidFill>
-            <a:prstDash val="sysDot"/>
-          </a:ln>
-        </p:spPr>
-        <p:style>
-          <a:lnRef idx="1">
-            <a:schemeClr val="accent1"/>
-          </a:lnRef>
-          <a:fillRef idx="0">
-            <a:schemeClr val="accent1"/>
-          </a:fillRef>
-          <a:effectRef idx="0">
-            <a:schemeClr val="accent1"/>
-          </a:effectRef>
-          <a:fontRef idx="minor">
-            <a:schemeClr val="tx1"/>
-          </a:fontRef>
-        </p:style>
-      </p:cxnSp>
-      <p:sp>
-        <p:nvSpPr>
-          <p:cNvPr id="41" name="Flowchart: Connector 40">
-            <a:extLst>
-              <a:ext uri="{FF2B5EF4-FFF2-40B4-BE49-F238E27FC236}">
-                <a16:creationId xmlns:a16="http://schemas.microsoft.com/office/drawing/2014/main" id="{F51B8727-8492-4519-A5F4-D00EA6BA7390}"/>
-              </a:ext>
-            </a:extLst>
-          </p:cNvPr>
-          <p:cNvSpPr/>
-          <p:nvPr/>
-        </p:nvSpPr>
-        <p:spPr>
-          <a:xfrm>
-            <a:off x="3507742" y="4772991"/>
-            <a:ext cx="206644" cy="206644"/>
-          </a:xfrm>
-          <a:prstGeom prst="flowChartConnector">
-            <a:avLst/>
-          </a:prstGeom>
-          <a:solidFill>
-            <a:schemeClr val="accent1">
-              <a:lumMod val="75000"/>
-            </a:schemeClr>
-          </a:solidFill>
-          <a:ln>
-            <a:noFill/>
-          </a:ln>
-        </p:spPr>
-        <p:style>
-          <a:lnRef idx="2">
-            <a:schemeClr val="accent1">
-              <a:shade val="50000"/>
-            </a:schemeClr>
-          </a:lnRef>
-          <a:fillRef idx="1">
-            <a:schemeClr val="accent1"/>
-          </a:fillRef>
-          <a:effectRef idx="0">
-            <a:schemeClr val="accent1"/>
-          </a:effectRef>
-          <a:fontRef idx="minor">
-            <a:schemeClr val="lt1"/>
-          </a:fontRef>
-        </p:style>
-        <p:txBody>
-          <a:bodyPr rtlCol="0" anchor="ctr"/>
-          <a:lstStyle/>
-          <a:p>
-            <a:pPr algn="ctr"/>
-            <a:endParaRPr lang="en-US"/>
-          </a:p>
-        </p:txBody>
-      </p:sp>
-      <p:sp>
-        <p:nvSpPr>
-          <p:cNvPr id="43" name="Flowchart: Connector 42">
-            <a:extLst>
-              <a:ext uri="{FF2B5EF4-FFF2-40B4-BE49-F238E27FC236}">
-                <a16:creationId xmlns:a16="http://schemas.microsoft.com/office/drawing/2014/main" id="{91A58A8D-35EC-41BD-8F97-6AF55975EE50}"/>
-              </a:ext>
-            </a:extLst>
-          </p:cNvPr>
-          <p:cNvSpPr/>
-          <p:nvPr/>
-        </p:nvSpPr>
-        <p:spPr>
-          <a:xfrm>
-            <a:off x="8053627" y="3428555"/>
-            <a:ext cx="206644" cy="206644"/>
-          </a:xfrm>
-          <a:prstGeom prst="flowChartConnector">
-            <a:avLst/>
-          </a:prstGeom>
-          <a:solidFill>
-            <a:schemeClr val="accent1">
-              <a:lumMod val="75000"/>
-            </a:schemeClr>
-          </a:solidFill>
-          <a:ln>
-            <a:noFill/>
-          </a:ln>
-        </p:spPr>
-        <p:style>
-          <a:lnRef idx="2">
-            <a:schemeClr val="accent1">
-              <a:shade val="50000"/>
-            </a:schemeClr>
-          </a:lnRef>
-          <a:fillRef idx="1">
-            <a:schemeClr val="accent1"/>
-          </a:fillRef>
-          <a:effectRef idx="0">
-            <a:schemeClr val="accent1"/>
-          </a:effectRef>
-          <a:fontRef idx="minor">
-            <a:schemeClr val="lt1"/>
-          </a:fontRef>
-        </p:style>
-        <p:txBody>
-          <a:bodyPr rtlCol="0" anchor="ctr"/>
-          <a:lstStyle/>
-          <a:p>
-            <a:pPr algn="ctr"/>
-            <a:endParaRPr lang="en-US"/>
-          </a:p>
-        </p:txBody>
-      </p:sp>
-      <p:sp>
-        <p:nvSpPr>
-          <p:cNvPr id="47" name="Flowchart: Connector 46">
-            <a:extLst>
-              <a:ext uri="{FF2B5EF4-FFF2-40B4-BE49-F238E27FC236}">
-                <a16:creationId xmlns:a16="http://schemas.microsoft.com/office/drawing/2014/main" id="{22C0C5C6-AC17-4F6C-8F5A-5D13D15C704B}"/>
-              </a:ext>
-            </a:extLst>
-          </p:cNvPr>
-          <p:cNvSpPr/>
-          <p:nvPr/>
-        </p:nvSpPr>
-        <p:spPr>
-          <a:xfrm>
-            <a:off x="5443068" y="2864032"/>
-            <a:ext cx="206644" cy="206644"/>
-          </a:xfrm>
-          <a:prstGeom prst="flowChartConnector">
-            <a:avLst/>
-          </a:prstGeom>
-          <a:solidFill>
-            <a:srgbClr val="C00000"/>
-          </a:solidFill>
-          <a:ln>
-            <a:noFill/>
-          </a:ln>
-        </p:spPr>
-        <p:style>
-          <a:lnRef idx="2">
-            <a:schemeClr val="accent1">
-              <a:shade val="50000"/>
-            </a:schemeClr>
-          </a:lnRef>
-          <a:fillRef idx="1">
-            <a:schemeClr val="accent1"/>
-          </a:fillRef>
-          <a:effectRef idx="0">
-            <a:schemeClr val="accent1"/>
-          </a:effectRef>
-          <a:fontRef idx="minor">
-            <a:schemeClr val="lt1"/>
-          </a:fontRef>
-        </p:style>
-        <p:txBody>
-          <a:bodyPr rtlCol="0" anchor="ctr"/>
-          <a:lstStyle/>
-          <a:p>
-            <a:pPr algn="ctr"/>
-            <a:endParaRPr lang="en-US"/>
-          </a:p>
-        </p:txBody>
-      </p:sp>
-      <p:pic>
-        <p:nvPicPr>
-          <p:cNvPr id="39" name="Picture 38">
-            <a:extLst>
-              <a:ext uri="{FF2B5EF4-FFF2-40B4-BE49-F238E27FC236}">
-                <a16:creationId xmlns:a16="http://schemas.microsoft.com/office/drawing/2014/main" id="{37C9728A-DAC1-6C4D-AE75-2754CB3C2BEF}"/>
-              </a:ext>
-            </a:extLst>
-          </p:cNvPr>
-          <p:cNvPicPr>
-            <a:picLocks noChangeAspect="1"/>
-          </p:cNvPicPr>
-          <p:nvPr/>
-        </p:nvPicPr>
-        <p:blipFill rotWithShape="1">
-          <a:blip r:embed="rId4"/>
-          <a:srcRect l="50000"/>
-          <a:stretch/>
-        </p:blipFill>
-        <p:spPr>
-          <a:xfrm>
-            <a:off x="2807586" y="1102844"/>
-            <a:ext cx="298450" cy="342900"/>
-          </a:xfrm>
-          <a:prstGeom prst="rect">
-            <a:avLst/>
-          </a:prstGeom>
-        </p:spPr>
-      </p:pic>
-      <p:pic>
-        <p:nvPicPr>
-          <p:cNvPr id="49" name="Picture 48">
-            <a:extLst>
-              <a:ext uri="{FF2B5EF4-FFF2-40B4-BE49-F238E27FC236}">
-                <a16:creationId xmlns:a16="http://schemas.microsoft.com/office/drawing/2014/main" id="{27FE8574-4266-C244-9EC2-8466EDF5A00B}"/>
-              </a:ext>
-            </a:extLst>
-          </p:cNvPr>
-          <p:cNvPicPr>
-            <a:picLocks noChangeAspect="1"/>
-          </p:cNvPicPr>
-          <p:nvPr/>
-        </p:nvPicPr>
-        <p:blipFill rotWithShape="1">
-          <a:blip r:embed="rId6"/>
-          <a:srcRect l="1213" t="5968" r="9379" b="73648"/>
-          <a:stretch/>
-        </p:blipFill>
-        <p:spPr>
-          <a:xfrm rot="18900000">
-            <a:off x="6096782" y="1927718"/>
-            <a:ext cx="1657832" cy="216270"/>
-          </a:xfrm>
-          <a:prstGeom prst="rect">
-            <a:avLst/>
-          </a:prstGeom>
-        </p:spPr>
-      </p:pic>
-      <p:pic>
-        <p:nvPicPr>
-          <p:cNvPr id="50" name="Picture 49">
-            <a:extLst>
-              <a:ext uri="{FF2B5EF4-FFF2-40B4-BE49-F238E27FC236}">
-                <a16:creationId xmlns:a16="http://schemas.microsoft.com/office/drawing/2014/main" id="{80739766-D363-F043-9B59-44E2BC351EBB}"/>
-              </a:ext>
-            </a:extLst>
-          </p:cNvPr>
-          <p:cNvPicPr>
-            <a:picLocks noChangeAspect="1"/>
-          </p:cNvPicPr>
-          <p:nvPr/>
-        </p:nvPicPr>
-        <p:blipFill rotWithShape="1">
-          <a:blip r:embed="rId6"/>
-          <a:srcRect l="925" t="39513" r="9667" b="40103"/>
-          <a:stretch/>
-        </p:blipFill>
-        <p:spPr>
-          <a:xfrm rot="18900000">
-            <a:off x="5025560" y="1897032"/>
-            <a:ext cx="1657832" cy="216270"/>
-          </a:xfrm>
-          <a:prstGeom prst="rect">
-            <a:avLst/>
-          </a:prstGeom>
-        </p:spPr>
-      </p:pic>
-      <p:pic>
-        <p:nvPicPr>
-          <p:cNvPr id="51" name="Picture 50">
-            <a:extLst>
-              <a:ext uri="{FF2B5EF4-FFF2-40B4-BE49-F238E27FC236}">
-                <a16:creationId xmlns:a16="http://schemas.microsoft.com/office/drawing/2014/main" id="{AC403444-41BA-F84D-833B-762C2CD250D6}"/>
-              </a:ext>
-            </a:extLst>
-          </p:cNvPr>
-          <p:cNvPicPr>
-            <a:picLocks noChangeAspect="1"/>
-          </p:cNvPicPr>
-          <p:nvPr/>
-        </p:nvPicPr>
-        <p:blipFill rotWithShape="1">
-          <a:blip r:embed="rId6"/>
-          <a:srcRect l="1212" t="68301" r="5461" b="6673"/>
-          <a:stretch/>
-        </p:blipFill>
-        <p:spPr>
-          <a:xfrm rot="18900000">
-            <a:off x="7145454" y="1971745"/>
-            <a:ext cx="1730502" cy="265524"/>
-          </a:xfrm>
-          <a:prstGeom prst="rect">
-            <a:avLst/>
-          </a:prstGeom>
-        </p:spPr>
-      </p:pic>
-    </p:spTree>
-    <p:extLst>
-      <p:ext uri="{BB962C8B-B14F-4D97-AF65-F5344CB8AC3E}">
-        <p14:creationId xmlns:p14="http://schemas.microsoft.com/office/powerpoint/2010/main" val="942986313"/>
-      </p:ext>
-    </p:extLst>
-  </p:cSld>
-  <p:clrMapOvr>
-    <a:masterClrMapping/>
-  </p:clrMapOvr>
-</p:sld>
-</file>
-
-<file path=ppt/slides/slide3.xml><?xml version="1.0" encoding="utf-8"?>
-<p:sld xmlns:a="http://schemas.openxmlformats.org/drawingml/2006/main" xmlns:r="http://schemas.openxmlformats.org/officeDocument/2006/relationships" xmlns:p="http://schemas.openxmlformats.org/presentationml/2006/main">
-  <p:cSld>
-    <p:spTree>
-      <p:nvGrpSpPr>
-        <p:cNvPr id="1" name=""/>
-        <p:cNvGrpSpPr/>
-        <p:nvPr/>
-      </p:nvGrpSpPr>
-      <p:grpSpPr>
-        <a:xfrm>
-          <a:off x="0" y="0"/>
-          <a:ext cx="0" cy="0"/>
-          <a:chOff x="0" y="0"/>
-          <a:chExt cx="0" cy="0"/>
-        </a:xfrm>
-      </p:grpSpPr>
-      <p:pic>
-        <p:nvPicPr>
-          <p:cNvPr id="34" name="Picture 33">
-            <a:extLst>
-              <a:ext uri="{FF2B5EF4-FFF2-40B4-BE49-F238E27FC236}">
-                <a16:creationId xmlns:a16="http://schemas.microsoft.com/office/drawing/2014/main" id="{17519E4B-70FF-0043-9FFD-6C11AE37AB9E}"/>
-              </a:ext>
-            </a:extLst>
-          </p:cNvPr>
-          <p:cNvPicPr>
-            <a:picLocks noChangeAspect="1"/>
-          </p:cNvPicPr>
-          <p:nvPr/>
-        </p:nvPicPr>
-        <p:blipFill rotWithShape="1">
-          <a:blip r:embed="rId2"/>
-          <a:srcRect r="50001"/>
-          <a:stretch/>
-        </p:blipFill>
-        <p:spPr>
-          <a:xfrm>
-            <a:off x="9074152" y="5433551"/>
-            <a:ext cx="298448" cy="342900"/>
-          </a:xfrm>
-          <a:prstGeom prst="rect">
-            <a:avLst/>
-          </a:prstGeom>
-        </p:spPr>
-      </p:pic>
-      <p:sp>
-        <p:nvSpPr>
-          <p:cNvPr id="4" name="Flowchart: Connector 3">
-            <a:extLst>
-              <a:ext uri="{FF2B5EF4-FFF2-40B4-BE49-F238E27FC236}">
-                <a16:creationId xmlns:a16="http://schemas.microsoft.com/office/drawing/2014/main" id="{ED01BEC1-4E3B-46B1-94F2-437974460882}"/>
-              </a:ext>
-            </a:extLst>
-          </p:cNvPr>
-          <p:cNvSpPr/>
-          <p:nvPr/>
-        </p:nvSpPr>
-        <p:spPr>
-          <a:xfrm>
-            <a:off x="5269651" y="3374822"/>
-            <a:ext cx="206644" cy="206644"/>
-          </a:xfrm>
-          <a:prstGeom prst="flowChartConnector">
-            <a:avLst/>
-          </a:prstGeom>
-          <a:solidFill>
-            <a:schemeClr val="accent1">
-              <a:lumMod val="75000"/>
-            </a:schemeClr>
-          </a:solidFill>
-          <a:ln>
-            <a:noFill/>
-          </a:ln>
-        </p:spPr>
-        <p:style>
-          <a:lnRef idx="2">
-            <a:schemeClr val="accent1">
-              <a:shade val="50000"/>
-            </a:schemeClr>
-          </a:lnRef>
-          <a:fillRef idx="1">
-            <a:schemeClr val="accent1"/>
-          </a:fillRef>
-          <a:effectRef idx="0">
-            <a:schemeClr val="accent1"/>
-          </a:effectRef>
-          <a:fontRef idx="minor">
-            <a:schemeClr val="lt1"/>
-          </a:fontRef>
-        </p:style>
-        <p:txBody>
-          <a:bodyPr rtlCol="0" anchor="ctr"/>
-          <a:lstStyle/>
-          <a:p>
-            <a:pPr algn="ctr"/>
-            <a:endParaRPr lang="en-US"/>
-          </a:p>
-        </p:txBody>
-      </p:sp>
-      <p:sp>
-        <p:nvSpPr>
-          <p:cNvPr id="6" name="Flowchart: Connector 5">
-            <a:extLst>
-              <a:ext uri="{FF2B5EF4-FFF2-40B4-BE49-F238E27FC236}">
-                <a16:creationId xmlns:a16="http://schemas.microsoft.com/office/drawing/2014/main" id="{263E8C3E-9DCF-46E7-A9DC-5B21A30D5E49}"/>
-              </a:ext>
-            </a:extLst>
-          </p:cNvPr>
-          <p:cNvSpPr/>
-          <p:nvPr/>
-        </p:nvSpPr>
-        <p:spPr>
-          <a:xfrm>
-            <a:off x="7154570" y="5082957"/>
-            <a:ext cx="206644" cy="206644"/>
-          </a:xfrm>
-          <a:prstGeom prst="flowChartConnector">
-            <a:avLst/>
-          </a:prstGeom>
-          <a:solidFill>
-            <a:srgbClr val="C00000"/>
-          </a:solidFill>
-          <a:ln>
-            <a:noFill/>
-          </a:ln>
-        </p:spPr>
-        <p:style>
-          <a:lnRef idx="2">
-            <a:schemeClr val="accent1">
-              <a:shade val="50000"/>
-            </a:schemeClr>
-          </a:lnRef>
-          <a:fillRef idx="1">
-            <a:schemeClr val="accent1"/>
-          </a:fillRef>
-          <a:effectRef idx="0">
-            <a:schemeClr val="accent1"/>
-          </a:effectRef>
-          <a:fontRef idx="minor">
-            <a:schemeClr val="lt1"/>
-          </a:fontRef>
-        </p:style>
-        <p:txBody>
-          <a:bodyPr rtlCol="0" anchor="ctr"/>
-          <a:lstStyle/>
-          <a:p>
-            <a:pPr algn="ctr"/>
-            <a:endParaRPr lang="en-US"/>
-          </a:p>
-        </p:txBody>
-      </p:sp>
-      <p:cxnSp>
-        <p:nvCxnSpPr>
-          <p:cNvPr id="10" name="Straight Arrow Connector 9">
-            <a:extLst>
-              <a:ext uri="{FF2B5EF4-FFF2-40B4-BE49-F238E27FC236}">
-                <a16:creationId xmlns:a16="http://schemas.microsoft.com/office/drawing/2014/main" id="{BADB0179-BF03-40DB-8FD5-E47883CFCD2A}"/>
-              </a:ext>
-            </a:extLst>
-          </p:cNvPr>
-          <p:cNvCxnSpPr>
-            <a:cxnSpLocks/>
-          </p:cNvCxnSpPr>
-          <p:nvPr/>
-        </p:nvCxnSpPr>
-        <p:spPr>
-          <a:xfrm flipV="1">
-            <a:off x="2732088" y="1192144"/>
-            <a:ext cx="0" cy="4572000"/>
-          </a:xfrm>
-          <a:prstGeom prst="straightConnector1">
-            <a:avLst/>
-          </a:prstGeom>
-          <a:ln w="28575">
-            <a:solidFill>
-              <a:schemeClr val="tx1">
-                <a:lumMod val="75000"/>
-                <a:lumOff val="25000"/>
-              </a:schemeClr>
-            </a:solidFill>
-            <a:tailEnd type="triangle"/>
-          </a:ln>
-        </p:spPr>
-        <p:style>
-          <a:lnRef idx="1">
-            <a:schemeClr val="accent1"/>
-          </a:lnRef>
-          <a:fillRef idx="0">
-            <a:schemeClr val="accent1"/>
-          </a:fillRef>
-          <a:effectRef idx="0">
-            <a:schemeClr val="accent1"/>
-          </a:effectRef>
-          <a:fontRef idx="minor">
-            <a:schemeClr val="tx1"/>
-          </a:fontRef>
-        </p:style>
-      </p:cxnSp>
-      <p:cxnSp>
-        <p:nvCxnSpPr>
-          <p:cNvPr id="13" name="Straight Arrow Connector 12">
-            <a:extLst>
-              <a:ext uri="{FF2B5EF4-FFF2-40B4-BE49-F238E27FC236}">
-                <a16:creationId xmlns:a16="http://schemas.microsoft.com/office/drawing/2014/main" id="{346F5D00-2DD7-46F3-9464-DD6771027887}"/>
-              </a:ext>
-            </a:extLst>
-          </p:cNvPr>
-          <p:cNvCxnSpPr>
-            <a:cxnSpLocks/>
-          </p:cNvCxnSpPr>
-          <p:nvPr/>
-        </p:nvCxnSpPr>
-        <p:spPr>
-          <a:xfrm>
-            <a:off x="2732088" y="5764144"/>
-            <a:ext cx="6640512" cy="0"/>
-          </a:xfrm>
-          <a:prstGeom prst="straightConnector1">
-            <a:avLst/>
-          </a:prstGeom>
-          <a:ln w="28575">
-            <a:solidFill>
-              <a:schemeClr val="tx1">
-                <a:lumMod val="75000"/>
-                <a:lumOff val="25000"/>
-              </a:schemeClr>
-            </a:solidFill>
-            <a:tailEnd type="triangle"/>
-          </a:ln>
-        </p:spPr>
-        <p:style>
-          <a:lnRef idx="1">
-            <a:schemeClr val="accent1"/>
-          </a:lnRef>
-          <a:fillRef idx="0">
-            <a:schemeClr val="accent1"/>
-          </a:fillRef>
-          <a:effectRef idx="0">
-            <a:schemeClr val="accent1"/>
-          </a:effectRef>
-          <a:fontRef idx="minor">
-            <a:schemeClr val="tx1"/>
-          </a:fontRef>
-        </p:style>
-      </p:cxnSp>
-      <p:sp>
-        <p:nvSpPr>
-          <p:cNvPr id="16" name="Flowchart: Connector 15">
-            <a:extLst>
-              <a:ext uri="{FF2B5EF4-FFF2-40B4-BE49-F238E27FC236}">
-                <a16:creationId xmlns:a16="http://schemas.microsoft.com/office/drawing/2014/main" id="{2052F860-7FBF-42EA-94D9-BF0177D233ED}"/>
-              </a:ext>
-            </a:extLst>
-          </p:cNvPr>
-          <p:cNvSpPr/>
-          <p:nvPr/>
-        </p:nvSpPr>
-        <p:spPr>
-          <a:xfrm>
-            <a:off x="8032326" y="3542448"/>
-            <a:ext cx="206644" cy="206644"/>
-          </a:xfrm>
-          <a:prstGeom prst="flowChartConnector">
-            <a:avLst/>
-          </a:prstGeom>
-          <a:solidFill>
-            <a:srgbClr val="C00000"/>
-          </a:solidFill>
-          <a:ln>
-            <a:noFill/>
-          </a:ln>
-        </p:spPr>
-        <p:style>
-          <a:lnRef idx="2">
-            <a:schemeClr val="accent1">
-              <a:shade val="50000"/>
-            </a:schemeClr>
-          </a:lnRef>
-          <a:fillRef idx="1">
-            <a:schemeClr val="accent1"/>
-          </a:fillRef>
-          <a:effectRef idx="0">
-            <a:schemeClr val="accent1"/>
-          </a:effectRef>
-          <a:fontRef idx="minor">
-            <a:schemeClr val="lt1"/>
-          </a:fontRef>
-        </p:style>
-        <p:txBody>
-          <a:bodyPr rtlCol="0" anchor="ctr"/>
-          <a:lstStyle/>
-          <a:p>
-            <a:pPr algn="ctr"/>
-            <a:endParaRPr lang="en-US"/>
-          </a:p>
-        </p:txBody>
-      </p:sp>
-      <p:sp>
-        <p:nvSpPr>
-          <p:cNvPr id="25" name="Flowchart: Connector 24">
-            <a:extLst>
-              <a:ext uri="{FF2B5EF4-FFF2-40B4-BE49-F238E27FC236}">
-                <a16:creationId xmlns:a16="http://schemas.microsoft.com/office/drawing/2014/main" id="{4615169B-B2DC-45EC-B51A-4F9C8DA65B9F}"/>
-              </a:ext>
-            </a:extLst>
-          </p:cNvPr>
-          <p:cNvSpPr/>
-          <p:nvPr/>
-        </p:nvSpPr>
-        <p:spPr>
-          <a:xfrm>
-            <a:off x="6320910" y="3664654"/>
-            <a:ext cx="206644" cy="206644"/>
-          </a:xfrm>
-          <a:prstGeom prst="flowChartConnector">
-            <a:avLst/>
-          </a:prstGeom>
-          <a:solidFill>
-            <a:schemeClr val="accent1">
-              <a:lumMod val="75000"/>
-            </a:schemeClr>
-          </a:solidFill>
-          <a:ln>
-            <a:noFill/>
-          </a:ln>
-        </p:spPr>
-        <p:style>
-          <a:lnRef idx="2">
-            <a:schemeClr val="accent1">
-              <a:shade val="50000"/>
-            </a:schemeClr>
-          </a:lnRef>
-          <a:fillRef idx="1">
-            <a:schemeClr val="accent1"/>
-          </a:fillRef>
-          <a:effectRef idx="0">
-            <a:schemeClr val="accent1"/>
-          </a:effectRef>
-          <a:fontRef idx="minor">
-            <a:schemeClr val="lt1"/>
-          </a:fontRef>
-        </p:style>
-        <p:txBody>
-          <a:bodyPr rtlCol="0" anchor="ctr"/>
-          <a:lstStyle/>
-          <a:p>
-            <a:pPr algn="ctr"/>
-            <a:endParaRPr lang="en-US"/>
-          </a:p>
-        </p:txBody>
-      </p:sp>
-      <p:sp>
-        <p:nvSpPr>
-          <p:cNvPr id="26" name="Flowchart: Connector 25">
-            <a:extLst>
-              <a:ext uri="{FF2B5EF4-FFF2-40B4-BE49-F238E27FC236}">
-                <a16:creationId xmlns:a16="http://schemas.microsoft.com/office/drawing/2014/main" id="{B4074890-4F27-4CB1-8A78-44B1E2D10CF8}"/>
-              </a:ext>
-            </a:extLst>
-          </p:cNvPr>
-          <p:cNvSpPr/>
-          <p:nvPr/>
-        </p:nvSpPr>
-        <p:spPr>
-          <a:xfrm>
-            <a:off x="6647676" y="2714491"/>
-            <a:ext cx="206644" cy="206644"/>
-          </a:xfrm>
-          <a:prstGeom prst="flowChartConnector">
-            <a:avLst/>
-          </a:prstGeom>
-          <a:solidFill>
-            <a:schemeClr val="accent1">
-              <a:lumMod val="75000"/>
-            </a:schemeClr>
-          </a:solidFill>
-          <a:ln>
-            <a:noFill/>
-          </a:ln>
-        </p:spPr>
-        <p:style>
-          <a:lnRef idx="2">
-            <a:schemeClr val="accent1">
-              <a:shade val="50000"/>
-            </a:schemeClr>
-          </a:lnRef>
-          <a:fillRef idx="1">
-            <a:schemeClr val="accent1"/>
-          </a:fillRef>
-          <a:effectRef idx="0">
-            <a:schemeClr val="accent1"/>
-          </a:effectRef>
-          <a:fontRef idx="minor">
-            <a:schemeClr val="lt1"/>
-          </a:fontRef>
-        </p:style>
-        <p:txBody>
-          <a:bodyPr rtlCol="0" anchor="ctr"/>
-          <a:lstStyle/>
-          <a:p>
-            <a:pPr algn="ctr"/>
-            <a:endParaRPr lang="en-US"/>
-          </a:p>
-        </p:txBody>
-      </p:sp>
-      <p:sp>
-        <p:nvSpPr>
-          <p:cNvPr id="27" name="Flowchart: Connector 26">
-            <a:extLst>
-              <a:ext uri="{FF2B5EF4-FFF2-40B4-BE49-F238E27FC236}">
-                <a16:creationId xmlns:a16="http://schemas.microsoft.com/office/drawing/2014/main" id="{AEFA72CA-C3DC-4954-B4EB-8EC4D085134B}"/>
-              </a:ext>
-            </a:extLst>
-          </p:cNvPr>
-          <p:cNvSpPr/>
-          <p:nvPr/>
-        </p:nvSpPr>
-        <p:spPr>
-          <a:xfrm>
-            <a:off x="6028781" y="3270460"/>
-            <a:ext cx="206644" cy="206644"/>
-          </a:xfrm>
-          <a:prstGeom prst="flowChartConnector">
-            <a:avLst/>
-          </a:prstGeom>
-          <a:solidFill>
-            <a:schemeClr val="accent1">
-              <a:lumMod val="75000"/>
-            </a:schemeClr>
-          </a:solidFill>
-          <a:ln>
-            <a:noFill/>
-          </a:ln>
-        </p:spPr>
-        <p:style>
-          <a:lnRef idx="2">
-            <a:schemeClr val="accent1">
-              <a:shade val="50000"/>
-            </a:schemeClr>
-          </a:lnRef>
-          <a:fillRef idx="1">
-            <a:schemeClr val="accent1"/>
-          </a:fillRef>
-          <a:effectRef idx="0">
-            <a:schemeClr val="accent1"/>
-          </a:effectRef>
-          <a:fontRef idx="minor">
-            <a:schemeClr val="lt1"/>
-          </a:fontRef>
-        </p:style>
-        <p:txBody>
-          <a:bodyPr rtlCol="0" anchor="ctr"/>
-          <a:lstStyle/>
-          <a:p>
-            <a:pPr algn="ctr"/>
-            <a:endParaRPr lang="en-US"/>
-          </a:p>
-        </p:txBody>
-      </p:sp>
-      <p:sp>
-        <p:nvSpPr>
-          <p:cNvPr id="63" name="Flowchart: Connector 62">
-            <a:extLst>
-              <a:ext uri="{FF2B5EF4-FFF2-40B4-BE49-F238E27FC236}">
-                <a16:creationId xmlns:a16="http://schemas.microsoft.com/office/drawing/2014/main" id="{0A3980B5-D378-4070-BAB3-2DA8DD04DBA5}"/>
-              </a:ext>
-            </a:extLst>
-          </p:cNvPr>
-          <p:cNvSpPr/>
-          <p:nvPr/>
-        </p:nvSpPr>
-        <p:spPr>
-          <a:xfrm>
-            <a:off x="4794518" y="5055870"/>
-            <a:ext cx="206644" cy="206644"/>
-          </a:xfrm>
-          <a:prstGeom prst="flowChartConnector">
-            <a:avLst/>
-          </a:prstGeom>
-          <a:solidFill>
-            <a:srgbClr val="C00000"/>
-          </a:solidFill>
-          <a:ln>
-            <a:noFill/>
-          </a:ln>
-        </p:spPr>
-        <p:style>
-          <a:lnRef idx="2">
-            <a:schemeClr val="accent1">
-              <a:shade val="50000"/>
-            </a:schemeClr>
-          </a:lnRef>
-          <a:fillRef idx="1">
-            <a:schemeClr val="accent1"/>
-          </a:fillRef>
-          <a:effectRef idx="0">
-            <a:schemeClr val="accent1"/>
-          </a:effectRef>
-          <a:fontRef idx="minor">
-            <a:schemeClr val="lt1"/>
-          </a:fontRef>
-        </p:style>
-        <p:txBody>
-          <a:bodyPr rtlCol="0" anchor="ctr"/>
-          <a:lstStyle/>
-          <a:p>
-            <a:pPr algn="ctr"/>
-            <a:endParaRPr lang="en-US"/>
-          </a:p>
-        </p:txBody>
-      </p:sp>
-      <p:sp>
-        <p:nvSpPr>
-          <p:cNvPr id="64" name="Flowchart: Connector 63">
-            <a:extLst>
-              <a:ext uri="{FF2B5EF4-FFF2-40B4-BE49-F238E27FC236}">
-                <a16:creationId xmlns:a16="http://schemas.microsoft.com/office/drawing/2014/main" id="{86831F6A-CE3F-44FF-B5F2-EC068D807CBE}"/>
-              </a:ext>
-            </a:extLst>
-          </p:cNvPr>
-          <p:cNvSpPr/>
-          <p:nvPr/>
-        </p:nvSpPr>
-        <p:spPr>
-          <a:xfrm>
-            <a:off x="7656826" y="4311552"/>
-            <a:ext cx="206644" cy="206644"/>
-          </a:xfrm>
-          <a:prstGeom prst="flowChartConnector">
-            <a:avLst/>
-          </a:prstGeom>
-          <a:solidFill>
-            <a:srgbClr val="C00000"/>
-          </a:solidFill>
-          <a:ln>
-            <a:noFill/>
-          </a:ln>
-        </p:spPr>
-        <p:style>
-          <a:lnRef idx="2">
-            <a:schemeClr val="accent1">
-              <a:shade val="50000"/>
-            </a:schemeClr>
-          </a:lnRef>
-          <a:fillRef idx="1">
-            <a:schemeClr val="accent1"/>
-          </a:fillRef>
-          <a:effectRef idx="0">
-            <a:schemeClr val="accent1"/>
-          </a:effectRef>
-          <a:fontRef idx="minor">
-            <a:schemeClr val="lt1"/>
-          </a:fontRef>
-        </p:style>
-        <p:txBody>
-          <a:bodyPr rtlCol="0" anchor="ctr"/>
-          <a:lstStyle/>
-          <a:p>
-            <a:pPr algn="ctr"/>
-            <a:endParaRPr lang="en-US"/>
-          </a:p>
-        </p:txBody>
-      </p:sp>
-      <p:sp>
-        <p:nvSpPr>
-          <p:cNvPr id="65" name="Flowchart: Connector 64">
-            <a:extLst>
-              <a:ext uri="{FF2B5EF4-FFF2-40B4-BE49-F238E27FC236}">
-                <a16:creationId xmlns:a16="http://schemas.microsoft.com/office/drawing/2014/main" id="{98B93E27-AC14-4150-9CBC-6B691A4EE286}"/>
-              </a:ext>
-            </a:extLst>
-          </p:cNvPr>
-          <p:cNvSpPr/>
-          <p:nvPr/>
-        </p:nvSpPr>
-        <p:spPr>
-          <a:xfrm>
-            <a:off x="6663874" y="5133231"/>
-            <a:ext cx="206644" cy="206644"/>
-          </a:xfrm>
-          <a:prstGeom prst="flowChartConnector">
-            <a:avLst/>
-          </a:prstGeom>
-          <a:solidFill>
-            <a:srgbClr val="C00000"/>
-          </a:solidFill>
-          <a:ln>
-            <a:noFill/>
-          </a:ln>
-        </p:spPr>
-        <p:style>
-          <a:lnRef idx="2">
-            <a:schemeClr val="accent1">
-              <a:shade val="50000"/>
-            </a:schemeClr>
-          </a:lnRef>
-          <a:fillRef idx="1">
-            <a:schemeClr val="accent1"/>
-          </a:fillRef>
-          <a:effectRef idx="0">
-            <a:schemeClr val="accent1"/>
-          </a:effectRef>
-          <a:fontRef idx="minor">
-            <a:schemeClr val="lt1"/>
-          </a:fontRef>
-        </p:style>
-        <p:txBody>
-          <a:bodyPr rtlCol="0" anchor="ctr"/>
-          <a:lstStyle/>
-          <a:p>
-            <a:pPr algn="ctr"/>
-            <a:endParaRPr lang="en-US"/>
-          </a:p>
-        </p:txBody>
-      </p:sp>
-      <p:sp>
-        <p:nvSpPr>
-          <p:cNvPr id="41" name="Flowchart: Connector 40">
-            <a:extLst>
-              <a:ext uri="{FF2B5EF4-FFF2-40B4-BE49-F238E27FC236}">
-                <a16:creationId xmlns:a16="http://schemas.microsoft.com/office/drawing/2014/main" id="{F51B8727-8492-4519-A5F4-D00EA6BA7390}"/>
-              </a:ext>
-            </a:extLst>
-          </p:cNvPr>
-          <p:cNvSpPr/>
-          <p:nvPr/>
-        </p:nvSpPr>
-        <p:spPr>
-          <a:xfrm>
-            <a:off x="5553469" y="4418575"/>
-            <a:ext cx="206644" cy="206644"/>
-          </a:xfrm>
-          <a:prstGeom prst="flowChartConnector">
-            <a:avLst/>
-          </a:prstGeom>
-          <a:solidFill>
-            <a:schemeClr val="accent1">
-              <a:lumMod val="75000"/>
-            </a:schemeClr>
-          </a:solidFill>
-          <a:ln>
-            <a:noFill/>
-          </a:ln>
-        </p:spPr>
-        <p:style>
-          <a:lnRef idx="2">
-            <a:schemeClr val="accent1">
-              <a:shade val="50000"/>
-            </a:schemeClr>
-          </a:lnRef>
-          <a:fillRef idx="1">
-            <a:schemeClr val="accent1"/>
-          </a:fillRef>
-          <a:effectRef idx="0">
-            <a:schemeClr val="accent1"/>
-          </a:effectRef>
-          <a:fontRef idx="minor">
-            <a:schemeClr val="lt1"/>
-          </a:fontRef>
-        </p:style>
-        <p:txBody>
-          <a:bodyPr rtlCol="0" anchor="ctr"/>
-          <a:lstStyle/>
-          <a:p>
-            <a:pPr algn="ctr"/>
-            <a:endParaRPr lang="en-US"/>
-          </a:p>
-        </p:txBody>
-      </p:sp>
-      <p:sp>
-        <p:nvSpPr>
-          <p:cNvPr id="43" name="Flowchart: Connector 42">
-            <a:extLst>
-              <a:ext uri="{FF2B5EF4-FFF2-40B4-BE49-F238E27FC236}">
-                <a16:creationId xmlns:a16="http://schemas.microsoft.com/office/drawing/2014/main" id="{91A58A8D-35EC-41BD-8F97-6AF55975EE50}"/>
-              </a:ext>
-            </a:extLst>
-          </p:cNvPr>
-          <p:cNvSpPr/>
-          <p:nvPr/>
-        </p:nvSpPr>
-        <p:spPr>
-          <a:xfrm>
-            <a:off x="5822137" y="2614316"/>
-            <a:ext cx="206644" cy="206644"/>
-          </a:xfrm>
-          <a:prstGeom prst="flowChartConnector">
-            <a:avLst/>
-          </a:prstGeom>
-          <a:solidFill>
-            <a:schemeClr val="accent1">
-              <a:lumMod val="75000"/>
-            </a:schemeClr>
-          </a:solidFill>
-          <a:ln>
-            <a:noFill/>
-          </a:ln>
-        </p:spPr>
-        <p:style>
-          <a:lnRef idx="2">
-            <a:schemeClr val="accent1">
-              <a:shade val="50000"/>
-            </a:schemeClr>
-          </a:lnRef>
-          <a:fillRef idx="1">
-            <a:schemeClr val="accent1"/>
-          </a:fillRef>
-          <a:effectRef idx="0">
-            <a:schemeClr val="accent1"/>
-          </a:effectRef>
-          <a:fontRef idx="minor">
-            <a:schemeClr val="lt1"/>
-          </a:fontRef>
-        </p:style>
-        <p:txBody>
-          <a:bodyPr rtlCol="0" anchor="ctr"/>
-          <a:lstStyle/>
-          <a:p>
-            <a:pPr algn="ctr"/>
-            <a:endParaRPr lang="en-US"/>
-          </a:p>
-        </p:txBody>
-      </p:sp>
-      <p:sp>
-        <p:nvSpPr>
-          <p:cNvPr id="47" name="Flowchart: Connector 46">
-            <a:extLst>
-              <a:ext uri="{FF2B5EF4-FFF2-40B4-BE49-F238E27FC236}">
-                <a16:creationId xmlns:a16="http://schemas.microsoft.com/office/drawing/2014/main" id="{22C0C5C6-AC17-4F6C-8F5A-5D13D15C704B}"/>
-              </a:ext>
-            </a:extLst>
-          </p:cNvPr>
-          <p:cNvSpPr/>
-          <p:nvPr/>
-        </p:nvSpPr>
-        <p:spPr>
-          <a:xfrm>
-            <a:off x="7931553" y="2276617"/>
-            <a:ext cx="206644" cy="206644"/>
-          </a:xfrm>
-          <a:prstGeom prst="flowChartConnector">
-            <a:avLst/>
-          </a:prstGeom>
-          <a:solidFill>
-            <a:srgbClr val="C00000"/>
-          </a:solidFill>
-          <a:ln>
-            <a:noFill/>
-          </a:ln>
-        </p:spPr>
-        <p:style>
-          <a:lnRef idx="2">
-            <a:schemeClr val="accent1">
-              <a:shade val="50000"/>
-            </a:schemeClr>
-          </a:lnRef>
-          <a:fillRef idx="1">
-            <a:schemeClr val="accent1"/>
-          </a:fillRef>
-          <a:effectRef idx="0">
-            <a:schemeClr val="accent1"/>
-          </a:effectRef>
-          <a:fontRef idx="minor">
-            <a:schemeClr val="lt1"/>
-          </a:fontRef>
-        </p:style>
-        <p:txBody>
-          <a:bodyPr rtlCol="0" anchor="ctr"/>
-          <a:lstStyle/>
-          <a:p>
-            <a:pPr algn="ctr"/>
-            <a:endParaRPr lang="en-US"/>
-          </a:p>
-        </p:txBody>
-      </p:sp>
-      <p:sp>
-        <p:nvSpPr>
-          <p:cNvPr id="2" name="Oval 1">
-            <a:extLst>
-              <a:ext uri="{FF2B5EF4-FFF2-40B4-BE49-F238E27FC236}">
-                <a16:creationId xmlns:a16="http://schemas.microsoft.com/office/drawing/2014/main" id="{93A28D0A-CD79-46E3-ADA5-B0403EE13C92}"/>
-              </a:ext>
-            </a:extLst>
-          </p:cNvPr>
-          <p:cNvSpPr/>
-          <p:nvPr/>
-        </p:nvSpPr>
-        <p:spPr>
-          <a:xfrm>
-            <a:off x="4309503" y="1797008"/>
-            <a:ext cx="3284236" cy="3284236"/>
-          </a:xfrm>
-          <a:prstGeom prst="ellipse">
-            <a:avLst/>
-          </a:prstGeom>
-          <a:noFill/>
-          <a:ln w="28575">
-            <a:solidFill>
-              <a:schemeClr val="tx1">
-                <a:lumMod val="75000"/>
-                <a:lumOff val="25000"/>
-              </a:schemeClr>
-            </a:solidFill>
-          </a:ln>
-        </p:spPr>
-        <p:style>
-          <a:lnRef idx="2">
-            <a:schemeClr val="accent1">
-              <a:shade val="50000"/>
-            </a:schemeClr>
-          </a:lnRef>
-          <a:fillRef idx="1">
-            <a:schemeClr val="accent1"/>
-          </a:fillRef>
-          <a:effectRef idx="0">
-            <a:schemeClr val="accent1"/>
-          </a:effectRef>
-          <a:fontRef idx="minor">
-            <a:schemeClr val="lt1"/>
-          </a:fontRef>
-        </p:style>
-        <p:txBody>
-          <a:bodyPr rtlCol="0" anchor="ctr"/>
-          <a:lstStyle/>
-          <a:p>
-            <a:pPr algn="ctr"/>
-            <a:endParaRPr lang="en-US"/>
-          </a:p>
-        </p:txBody>
-      </p:sp>
-      <p:sp>
-        <p:nvSpPr>
-          <p:cNvPr id="39" name="Flowchart: Connector 38">
-            <a:extLst>
-              <a:ext uri="{FF2B5EF4-FFF2-40B4-BE49-F238E27FC236}">
-                <a16:creationId xmlns:a16="http://schemas.microsoft.com/office/drawing/2014/main" id="{33209442-A127-4A1B-8FAB-1FC704206BCB}"/>
-              </a:ext>
-            </a:extLst>
-          </p:cNvPr>
-          <p:cNvSpPr/>
-          <p:nvPr/>
-        </p:nvSpPr>
-        <p:spPr>
-          <a:xfrm>
-            <a:off x="7051248" y="1829599"/>
-            <a:ext cx="206644" cy="206644"/>
-          </a:xfrm>
-          <a:prstGeom prst="flowChartConnector">
-            <a:avLst/>
-          </a:prstGeom>
-          <a:solidFill>
-            <a:srgbClr val="C00000"/>
-          </a:solidFill>
-          <a:ln>
-            <a:noFill/>
-          </a:ln>
-        </p:spPr>
-        <p:style>
-          <a:lnRef idx="2">
-            <a:schemeClr val="accent1">
-              <a:shade val="50000"/>
-            </a:schemeClr>
-          </a:lnRef>
-          <a:fillRef idx="1">
-            <a:schemeClr val="accent1"/>
-          </a:fillRef>
-          <a:effectRef idx="0">
-            <a:schemeClr val="accent1"/>
-          </a:effectRef>
-          <a:fontRef idx="minor">
-            <a:schemeClr val="lt1"/>
-          </a:fontRef>
-        </p:style>
-        <p:txBody>
-          <a:bodyPr rtlCol="0" anchor="ctr"/>
-          <a:lstStyle/>
-          <a:p>
-            <a:pPr algn="ctr"/>
-            <a:endParaRPr lang="en-US"/>
-          </a:p>
-        </p:txBody>
-      </p:sp>
-      <p:sp>
-        <p:nvSpPr>
-          <p:cNvPr id="40" name="Flowchart: Connector 39">
-            <a:extLst>
-              <a:ext uri="{FF2B5EF4-FFF2-40B4-BE49-F238E27FC236}">
-                <a16:creationId xmlns:a16="http://schemas.microsoft.com/office/drawing/2014/main" id="{F561621C-59B3-4382-9598-B4C430227647}"/>
-              </a:ext>
-            </a:extLst>
-          </p:cNvPr>
-          <p:cNvSpPr/>
-          <p:nvPr/>
-        </p:nvSpPr>
-        <p:spPr>
-          <a:xfrm>
-            <a:off x="3971689" y="1864764"/>
-            <a:ext cx="206644" cy="206644"/>
-          </a:xfrm>
-          <a:prstGeom prst="flowChartConnector">
-            <a:avLst/>
-          </a:prstGeom>
-          <a:solidFill>
-            <a:srgbClr val="C00000"/>
-          </a:solidFill>
-          <a:ln>
-            <a:noFill/>
-          </a:ln>
-        </p:spPr>
-        <p:style>
-          <a:lnRef idx="2">
-            <a:schemeClr val="accent1">
-              <a:shade val="50000"/>
-            </a:schemeClr>
-          </a:lnRef>
-          <a:fillRef idx="1">
-            <a:schemeClr val="accent1"/>
-          </a:fillRef>
-          <a:effectRef idx="0">
-            <a:schemeClr val="accent1"/>
-          </a:effectRef>
-          <a:fontRef idx="minor">
-            <a:schemeClr val="lt1"/>
-          </a:fontRef>
-        </p:style>
-        <p:txBody>
-          <a:bodyPr rtlCol="0" anchor="ctr"/>
-          <a:lstStyle/>
-          <a:p>
-            <a:pPr algn="ctr"/>
-            <a:endParaRPr lang="en-US"/>
-          </a:p>
-        </p:txBody>
-      </p:sp>
-      <p:sp>
-        <p:nvSpPr>
-          <p:cNvPr id="44" name="Flowchart: Connector 43">
-            <a:extLst>
-              <a:ext uri="{FF2B5EF4-FFF2-40B4-BE49-F238E27FC236}">
-                <a16:creationId xmlns:a16="http://schemas.microsoft.com/office/drawing/2014/main" id="{8763FC05-48F8-46C0-B89E-0095898C9805}"/>
-              </a:ext>
-            </a:extLst>
-          </p:cNvPr>
-          <p:cNvSpPr/>
-          <p:nvPr/>
-        </p:nvSpPr>
-        <p:spPr>
-          <a:xfrm>
-            <a:off x="5099920" y="2452809"/>
-            <a:ext cx="206644" cy="206644"/>
-          </a:xfrm>
-          <a:prstGeom prst="flowChartConnector">
-            <a:avLst/>
-          </a:prstGeom>
-          <a:solidFill>
-            <a:schemeClr val="accent1">
-              <a:lumMod val="75000"/>
-            </a:schemeClr>
-          </a:solidFill>
-          <a:ln>
-            <a:noFill/>
-          </a:ln>
-        </p:spPr>
-        <p:style>
-          <a:lnRef idx="2">
-            <a:schemeClr val="accent1">
-              <a:shade val="50000"/>
-            </a:schemeClr>
-          </a:lnRef>
-          <a:fillRef idx="1">
-            <a:schemeClr val="accent1"/>
-          </a:fillRef>
-          <a:effectRef idx="0">
-            <a:schemeClr val="accent1"/>
-          </a:effectRef>
-          <a:fontRef idx="minor">
-            <a:schemeClr val="lt1"/>
-          </a:fontRef>
-        </p:style>
-        <p:txBody>
-          <a:bodyPr rtlCol="0" anchor="ctr"/>
-          <a:lstStyle/>
-          <a:p>
-            <a:pPr algn="ctr"/>
-            <a:endParaRPr lang="en-US"/>
-          </a:p>
-        </p:txBody>
-      </p:sp>
-      <p:sp>
-        <p:nvSpPr>
-          <p:cNvPr id="46" name="Flowchart: Connector 45">
-            <a:extLst>
-              <a:ext uri="{FF2B5EF4-FFF2-40B4-BE49-F238E27FC236}">
-                <a16:creationId xmlns:a16="http://schemas.microsoft.com/office/drawing/2014/main" id="{D5D0F13E-3549-437F-9F91-4C0CE25C4BA5}"/>
-              </a:ext>
-            </a:extLst>
-          </p:cNvPr>
-          <p:cNvSpPr/>
-          <p:nvPr/>
-        </p:nvSpPr>
-        <p:spPr>
-          <a:xfrm>
-            <a:off x="3911337" y="3176598"/>
-            <a:ext cx="206644" cy="206644"/>
-          </a:xfrm>
-          <a:prstGeom prst="flowChartConnector">
-            <a:avLst/>
-          </a:prstGeom>
-          <a:solidFill>
-            <a:srgbClr val="C00000"/>
-          </a:solidFill>
-          <a:ln>
-            <a:noFill/>
-          </a:ln>
-        </p:spPr>
-        <p:style>
-          <a:lnRef idx="2">
-            <a:schemeClr val="accent1">
-              <a:shade val="50000"/>
-            </a:schemeClr>
-          </a:lnRef>
-          <a:fillRef idx="1">
-            <a:schemeClr val="accent1"/>
-          </a:fillRef>
-          <a:effectRef idx="0">
-            <a:schemeClr val="accent1"/>
-          </a:effectRef>
-          <a:fontRef idx="minor">
-            <a:schemeClr val="lt1"/>
-          </a:fontRef>
-        </p:style>
-        <p:txBody>
-          <a:bodyPr rtlCol="0" anchor="ctr"/>
-          <a:lstStyle/>
-          <a:p>
-            <a:pPr algn="ctr"/>
-            <a:endParaRPr lang="en-US"/>
-          </a:p>
-        </p:txBody>
-      </p:sp>
-      <p:sp>
-        <p:nvSpPr>
-          <p:cNvPr id="48" name="Flowchart: Connector 47">
-            <a:extLst>
-              <a:ext uri="{FF2B5EF4-FFF2-40B4-BE49-F238E27FC236}">
-                <a16:creationId xmlns:a16="http://schemas.microsoft.com/office/drawing/2014/main" id="{59E70060-72A3-441B-B7E5-B8DBFB7B582C}"/>
-              </a:ext>
-            </a:extLst>
-          </p:cNvPr>
-          <p:cNvSpPr/>
-          <p:nvPr/>
-        </p:nvSpPr>
-        <p:spPr>
-          <a:xfrm>
-            <a:off x="7553504" y="5164454"/>
-            <a:ext cx="206644" cy="206644"/>
-          </a:xfrm>
-          <a:prstGeom prst="flowChartConnector">
-            <a:avLst/>
-          </a:prstGeom>
-          <a:solidFill>
-            <a:srgbClr val="C00000"/>
-          </a:solidFill>
-          <a:ln>
-            <a:noFill/>
-          </a:ln>
-        </p:spPr>
-        <p:style>
-          <a:lnRef idx="2">
-            <a:schemeClr val="accent1">
-              <a:shade val="50000"/>
-            </a:schemeClr>
-          </a:lnRef>
-          <a:fillRef idx="1">
-            <a:schemeClr val="accent1"/>
-          </a:fillRef>
-          <a:effectRef idx="0">
-            <a:schemeClr val="accent1"/>
-          </a:effectRef>
-          <a:fontRef idx="minor">
-            <a:schemeClr val="lt1"/>
-          </a:fontRef>
-        </p:style>
-        <p:txBody>
-          <a:bodyPr rtlCol="0" anchor="ctr"/>
-          <a:lstStyle/>
-          <a:p>
-            <a:pPr algn="ctr"/>
-            <a:endParaRPr lang="en-US"/>
-          </a:p>
-        </p:txBody>
-      </p:sp>
-      <p:sp>
-        <p:nvSpPr>
-          <p:cNvPr id="49" name="Flowchart: Connector 48">
-            <a:extLst>
-              <a:ext uri="{FF2B5EF4-FFF2-40B4-BE49-F238E27FC236}">
-                <a16:creationId xmlns:a16="http://schemas.microsoft.com/office/drawing/2014/main" id="{1B98E587-9693-43AF-A5FA-D0B7121E5FBC}"/>
-              </a:ext>
-            </a:extLst>
-          </p:cNvPr>
-          <p:cNvSpPr/>
-          <p:nvPr/>
-        </p:nvSpPr>
-        <p:spPr>
-          <a:xfrm>
-            <a:off x="8238970" y="4625219"/>
-            <a:ext cx="206644" cy="206644"/>
-          </a:xfrm>
-          <a:prstGeom prst="flowChartConnector">
-            <a:avLst/>
-          </a:prstGeom>
-          <a:solidFill>
-            <a:srgbClr val="C00000"/>
-          </a:solidFill>
-          <a:ln>
-            <a:noFill/>
-          </a:ln>
-        </p:spPr>
-        <p:style>
-          <a:lnRef idx="2">
-            <a:schemeClr val="accent1">
-              <a:shade val="50000"/>
-            </a:schemeClr>
-          </a:lnRef>
-          <a:fillRef idx="1">
-            <a:schemeClr val="accent1"/>
-          </a:fillRef>
-          <a:effectRef idx="0">
-            <a:schemeClr val="accent1"/>
-          </a:effectRef>
-          <a:fontRef idx="minor">
-            <a:schemeClr val="lt1"/>
-          </a:fontRef>
-        </p:style>
-        <p:txBody>
-          <a:bodyPr rtlCol="0" anchor="ctr"/>
-          <a:lstStyle/>
-          <a:p>
-            <a:pPr algn="ctr"/>
-            <a:endParaRPr lang="en-US"/>
-          </a:p>
-        </p:txBody>
-      </p:sp>
-      <p:sp>
-        <p:nvSpPr>
-          <p:cNvPr id="50" name="Flowchart: Connector 49">
-            <a:extLst>
-              <a:ext uri="{FF2B5EF4-FFF2-40B4-BE49-F238E27FC236}">
-                <a16:creationId xmlns:a16="http://schemas.microsoft.com/office/drawing/2014/main" id="{4909D926-6469-4E14-9CD9-18E1AEEDA2F8}"/>
-              </a:ext>
-            </a:extLst>
-          </p:cNvPr>
-          <p:cNvSpPr/>
-          <p:nvPr/>
-        </p:nvSpPr>
-        <p:spPr>
-          <a:xfrm>
-            <a:off x="3950431" y="5145652"/>
-            <a:ext cx="206644" cy="206644"/>
-          </a:xfrm>
-          <a:prstGeom prst="flowChartConnector">
-            <a:avLst/>
-          </a:prstGeom>
-          <a:solidFill>
-            <a:srgbClr val="C00000"/>
-          </a:solidFill>
-          <a:ln>
-            <a:noFill/>
-          </a:ln>
-        </p:spPr>
-        <p:style>
-          <a:lnRef idx="2">
-            <a:schemeClr val="accent1">
-              <a:shade val="50000"/>
-            </a:schemeClr>
-          </a:lnRef>
-          <a:fillRef idx="1">
-            <a:schemeClr val="accent1"/>
-          </a:fillRef>
-          <a:effectRef idx="0">
-            <a:schemeClr val="accent1"/>
-          </a:effectRef>
-          <a:fontRef idx="minor">
-            <a:schemeClr val="lt1"/>
-          </a:fontRef>
-        </p:style>
-        <p:txBody>
-          <a:bodyPr rtlCol="0" anchor="ctr"/>
-          <a:lstStyle/>
-          <a:p>
-            <a:pPr algn="ctr"/>
-            <a:endParaRPr lang="en-US"/>
-          </a:p>
-        </p:txBody>
-      </p:sp>
-      <p:sp>
-        <p:nvSpPr>
-          <p:cNvPr id="51" name="Flowchart: Connector 50">
-            <a:extLst>
-              <a:ext uri="{FF2B5EF4-FFF2-40B4-BE49-F238E27FC236}">
-                <a16:creationId xmlns:a16="http://schemas.microsoft.com/office/drawing/2014/main" id="{9E04EC8E-3C17-4F63-9225-032687A7ECD4}"/>
-              </a:ext>
-            </a:extLst>
-          </p:cNvPr>
-          <p:cNvSpPr/>
-          <p:nvPr/>
-        </p:nvSpPr>
-        <p:spPr>
-          <a:xfrm>
-            <a:off x="7394883" y="4715001"/>
-            <a:ext cx="206644" cy="206644"/>
-          </a:xfrm>
-          <a:prstGeom prst="flowChartConnector">
-            <a:avLst/>
-          </a:prstGeom>
-          <a:solidFill>
-            <a:srgbClr val="C00000"/>
-          </a:solidFill>
-          <a:ln>
-            <a:noFill/>
-          </a:ln>
-        </p:spPr>
-        <p:style>
-          <a:lnRef idx="2">
-            <a:schemeClr val="accent1">
-              <a:shade val="50000"/>
-            </a:schemeClr>
-          </a:lnRef>
-          <a:fillRef idx="1">
-            <a:schemeClr val="accent1"/>
-          </a:fillRef>
-          <a:effectRef idx="0">
-            <a:schemeClr val="accent1"/>
-          </a:effectRef>
-          <a:fontRef idx="minor">
-            <a:schemeClr val="lt1"/>
-          </a:fontRef>
-        </p:style>
-        <p:txBody>
-          <a:bodyPr rtlCol="0" anchor="ctr"/>
-          <a:lstStyle/>
-          <a:p>
-            <a:pPr algn="ctr"/>
-            <a:endParaRPr lang="en-US"/>
-          </a:p>
-        </p:txBody>
-      </p:sp>
-      <p:sp>
-        <p:nvSpPr>
-          <p:cNvPr id="53" name="Flowchart: Connector 52">
-            <a:extLst>
-              <a:ext uri="{FF2B5EF4-FFF2-40B4-BE49-F238E27FC236}">
-                <a16:creationId xmlns:a16="http://schemas.microsoft.com/office/drawing/2014/main" id="{5E419A89-4C5A-4382-AB8D-3FCAE038BA54}"/>
-              </a:ext>
-            </a:extLst>
-          </p:cNvPr>
-          <p:cNvSpPr/>
-          <p:nvPr/>
-        </p:nvSpPr>
-        <p:spPr>
-          <a:xfrm>
-            <a:off x="3204602" y="2397504"/>
-            <a:ext cx="206644" cy="206644"/>
-          </a:xfrm>
-          <a:prstGeom prst="flowChartConnector">
-            <a:avLst/>
-          </a:prstGeom>
-          <a:solidFill>
-            <a:srgbClr val="C00000"/>
-          </a:solidFill>
-          <a:ln>
-            <a:noFill/>
-          </a:ln>
-        </p:spPr>
-        <p:style>
-          <a:lnRef idx="2">
-            <a:schemeClr val="accent1">
-              <a:shade val="50000"/>
-            </a:schemeClr>
-          </a:lnRef>
-          <a:fillRef idx="1">
-            <a:schemeClr val="accent1"/>
-          </a:fillRef>
-          <a:effectRef idx="0">
-            <a:schemeClr val="accent1"/>
-          </a:effectRef>
-          <a:fontRef idx="minor">
-            <a:schemeClr val="lt1"/>
-          </a:fontRef>
-        </p:style>
-        <p:txBody>
-          <a:bodyPr rtlCol="0" anchor="ctr"/>
-          <a:lstStyle/>
-          <a:p>
-            <a:pPr algn="ctr"/>
-            <a:endParaRPr lang="en-US"/>
-          </a:p>
-        </p:txBody>
-      </p:sp>
-      <p:sp>
-        <p:nvSpPr>
-          <p:cNvPr id="66" name="Flowchart: Connector 65">
-            <a:extLst>
-              <a:ext uri="{FF2B5EF4-FFF2-40B4-BE49-F238E27FC236}">
-                <a16:creationId xmlns:a16="http://schemas.microsoft.com/office/drawing/2014/main" id="{ADC19D74-753F-4693-8D4B-601B364D1F20}"/>
-              </a:ext>
-            </a:extLst>
-          </p:cNvPr>
-          <p:cNvSpPr/>
-          <p:nvPr/>
-        </p:nvSpPr>
-        <p:spPr>
-          <a:xfrm>
-            <a:off x="8491996" y="2817813"/>
-            <a:ext cx="206644" cy="206644"/>
-          </a:xfrm>
-          <a:prstGeom prst="flowChartConnector">
-            <a:avLst/>
-          </a:prstGeom>
-          <a:solidFill>
-            <a:srgbClr val="C00000"/>
-          </a:solidFill>
-          <a:ln>
-            <a:noFill/>
-          </a:ln>
-        </p:spPr>
-        <p:style>
-          <a:lnRef idx="2">
-            <a:schemeClr val="accent1">
-              <a:shade val="50000"/>
-            </a:schemeClr>
-          </a:lnRef>
-          <a:fillRef idx="1">
-            <a:schemeClr val="accent1"/>
-          </a:fillRef>
-          <a:effectRef idx="0">
-            <a:schemeClr val="accent1"/>
-          </a:effectRef>
-          <a:fontRef idx="minor">
-            <a:schemeClr val="lt1"/>
-          </a:fontRef>
-        </p:style>
-        <p:txBody>
-          <a:bodyPr rtlCol="0" anchor="ctr"/>
-          <a:lstStyle/>
-          <a:p>
-            <a:pPr algn="ctr"/>
-            <a:endParaRPr lang="en-US"/>
-          </a:p>
-        </p:txBody>
-      </p:sp>
-      <p:sp>
-        <p:nvSpPr>
-          <p:cNvPr id="67" name="Flowchart: Connector 66">
-            <a:extLst>
-              <a:ext uri="{FF2B5EF4-FFF2-40B4-BE49-F238E27FC236}">
-                <a16:creationId xmlns:a16="http://schemas.microsoft.com/office/drawing/2014/main" id="{5E85AB91-DC78-449E-BFE0-8599047E6ECC}"/>
-              </a:ext>
-            </a:extLst>
-          </p:cNvPr>
-          <p:cNvSpPr/>
-          <p:nvPr/>
-        </p:nvSpPr>
-        <p:spPr>
-          <a:xfrm>
-            <a:off x="6947926" y="3317048"/>
-            <a:ext cx="206644" cy="206644"/>
-          </a:xfrm>
-          <a:prstGeom prst="flowChartConnector">
-            <a:avLst/>
-          </a:prstGeom>
-          <a:solidFill>
-            <a:schemeClr val="accent1">
-              <a:lumMod val="75000"/>
-            </a:schemeClr>
-          </a:solidFill>
-          <a:ln>
-            <a:noFill/>
-          </a:ln>
-        </p:spPr>
-        <p:style>
-          <a:lnRef idx="2">
-            <a:schemeClr val="accent1">
-              <a:shade val="50000"/>
-            </a:schemeClr>
-          </a:lnRef>
-          <a:fillRef idx="1">
-            <a:schemeClr val="accent1"/>
-          </a:fillRef>
-          <a:effectRef idx="0">
-            <a:schemeClr val="accent1"/>
-          </a:effectRef>
-          <a:fontRef idx="minor">
-            <a:schemeClr val="lt1"/>
-          </a:fontRef>
-        </p:style>
-        <p:txBody>
-          <a:bodyPr rtlCol="0" anchor="ctr"/>
-          <a:lstStyle/>
-          <a:p>
-            <a:pPr algn="ctr"/>
-            <a:endParaRPr lang="en-US"/>
-          </a:p>
-        </p:txBody>
-      </p:sp>
-      <p:sp>
-        <p:nvSpPr>
-          <p:cNvPr id="68" name="Flowchart: Connector 67">
-            <a:extLst>
-              <a:ext uri="{FF2B5EF4-FFF2-40B4-BE49-F238E27FC236}">
-                <a16:creationId xmlns:a16="http://schemas.microsoft.com/office/drawing/2014/main" id="{F1F0A5B3-5BD6-4ED6-AF87-2FFE2C929AEA}"/>
-              </a:ext>
-            </a:extLst>
-          </p:cNvPr>
-          <p:cNvSpPr/>
-          <p:nvPr/>
-        </p:nvSpPr>
-        <p:spPr>
-          <a:xfrm>
-            <a:off x="6054405" y="2236174"/>
-            <a:ext cx="206644" cy="206644"/>
-          </a:xfrm>
-          <a:prstGeom prst="flowChartConnector">
-            <a:avLst/>
-          </a:prstGeom>
-          <a:solidFill>
-            <a:schemeClr val="accent1">
-              <a:lumMod val="75000"/>
-            </a:schemeClr>
-          </a:solidFill>
-          <a:ln>
-            <a:noFill/>
-          </a:ln>
-        </p:spPr>
-        <p:style>
-          <a:lnRef idx="2">
-            <a:schemeClr val="accent1">
-              <a:shade val="50000"/>
-            </a:schemeClr>
-          </a:lnRef>
-          <a:fillRef idx="1">
-            <a:schemeClr val="accent1"/>
-          </a:fillRef>
-          <a:effectRef idx="0">
-            <a:schemeClr val="accent1"/>
-          </a:effectRef>
-          <a:fontRef idx="minor">
-            <a:schemeClr val="lt1"/>
-          </a:fontRef>
-        </p:style>
-        <p:txBody>
-          <a:bodyPr rtlCol="0" anchor="ctr"/>
-          <a:lstStyle/>
-          <a:p>
-            <a:pPr algn="ctr"/>
-            <a:endParaRPr lang="en-US"/>
-          </a:p>
-        </p:txBody>
-      </p:sp>
-      <p:sp>
-        <p:nvSpPr>
-          <p:cNvPr id="69" name="Flowchart: Connector 68">
-            <a:extLst>
-              <a:ext uri="{FF2B5EF4-FFF2-40B4-BE49-F238E27FC236}">
-                <a16:creationId xmlns:a16="http://schemas.microsoft.com/office/drawing/2014/main" id="{223F3B94-720F-4032-AB97-21E3DD521840}"/>
-              </a:ext>
-            </a:extLst>
-          </p:cNvPr>
-          <p:cNvSpPr/>
-          <p:nvPr/>
-        </p:nvSpPr>
-        <p:spPr>
-          <a:xfrm>
-            <a:off x="4794518" y="3027418"/>
-            <a:ext cx="206644" cy="206644"/>
-          </a:xfrm>
-          <a:prstGeom prst="flowChartConnector">
-            <a:avLst/>
-          </a:prstGeom>
-          <a:solidFill>
-            <a:schemeClr val="accent1">
-              <a:lumMod val="75000"/>
-            </a:schemeClr>
-          </a:solidFill>
-          <a:ln>
-            <a:noFill/>
-          </a:ln>
-        </p:spPr>
-        <p:style>
-          <a:lnRef idx="2">
-            <a:schemeClr val="accent1">
-              <a:shade val="50000"/>
-            </a:schemeClr>
-          </a:lnRef>
-          <a:fillRef idx="1">
-            <a:schemeClr val="accent1"/>
-          </a:fillRef>
-          <a:effectRef idx="0">
-            <a:schemeClr val="accent1"/>
-          </a:effectRef>
-          <a:fontRef idx="minor">
-            <a:schemeClr val="lt1"/>
-          </a:fontRef>
-        </p:style>
-        <p:txBody>
-          <a:bodyPr rtlCol="0" anchor="ctr"/>
-          <a:lstStyle/>
-          <a:p>
-            <a:pPr algn="ctr"/>
-            <a:endParaRPr lang="en-US"/>
-          </a:p>
-        </p:txBody>
-      </p:sp>
-      <p:sp>
-        <p:nvSpPr>
-          <p:cNvPr id="70" name="Flowchart: Connector 69">
-            <a:extLst>
-              <a:ext uri="{FF2B5EF4-FFF2-40B4-BE49-F238E27FC236}">
-                <a16:creationId xmlns:a16="http://schemas.microsoft.com/office/drawing/2014/main" id="{5A7270F4-A0AF-479D-B86F-8F471C35D3C6}"/>
-              </a:ext>
-            </a:extLst>
-          </p:cNvPr>
-          <p:cNvSpPr/>
-          <p:nvPr/>
-        </p:nvSpPr>
-        <p:spPr>
-          <a:xfrm>
-            <a:off x="6584969" y="4329940"/>
-            <a:ext cx="206644" cy="206644"/>
-          </a:xfrm>
-          <a:prstGeom prst="flowChartConnector">
-            <a:avLst/>
-          </a:prstGeom>
-          <a:solidFill>
-            <a:schemeClr val="accent1">
-              <a:lumMod val="75000"/>
-            </a:schemeClr>
-          </a:solidFill>
-          <a:ln>
-            <a:noFill/>
-          </a:ln>
-        </p:spPr>
-        <p:style>
-          <a:lnRef idx="2">
-            <a:schemeClr val="accent1">
-              <a:shade val="50000"/>
-            </a:schemeClr>
-          </a:lnRef>
-          <a:fillRef idx="1">
-            <a:schemeClr val="accent1"/>
-          </a:fillRef>
-          <a:effectRef idx="0">
-            <a:schemeClr val="accent1"/>
-          </a:effectRef>
-          <a:fontRef idx="minor">
-            <a:schemeClr val="lt1"/>
-          </a:fontRef>
-        </p:style>
-        <p:txBody>
-          <a:bodyPr rtlCol="0" anchor="ctr"/>
-          <a:lstStyle/>
-          <a:p>
-            <a:pPr algn="ctr"/>
-            <a:endParaRPr lang="en-US"/>
-          </a:p>
-        </p:txBody>
-      </p:sp>
-      <p:pic>
-        <p:nvPicPr>
-          <p:cNvPr id="35" name="Picture 34">
-            <a:extLst>
-              <a:ext uri="{FF2B5EF4-FFF2-40B4-BE49-F238E27FC236}">
-                <a16:creationId xmlns:a16="http://schemas.microsoft.com/office/drawing/2014/main" id="{4719D9D8-22D7-504A-81CF-715651700736}"/>
-              </a:ext>
-            </a:extLst>
-          </p:cNvPr>
-          <p:cNvPicPr>
-            <a:picLocks noChangeAspect="1"/>
-          </p:cNvPicPr>
-          <p:nvPr/>
-        </p:nvPicPr>
-        <p:blipFill rotWithShape="1">
-          <a:blip r:embed="rId2"/>
-          <a:srcRect l="50000"/>
-          <a:stretch/>
-        </p:blipFill>
-        <p:spPr>
-          <a:xfrm>
-            <a:off x="2807586" y="1102844"/>
-            <a:ext cx="298450" cy="342900"/>
-          </a:xfrm>
-          <a:prstGeom prst="rect">
-            <a:avLst/>
-          </a:prstGeom>
-        </p:spPr>
-      </p:pic>
-    </p:spTree>
-    <p:extLst>
-      <p:ext uri="{BB962C8B-B14F-4D97-AF65-F5344CB8AC3E}">
-        <p14:creationId xmlns:p14="http://schemas.microsoft.com/office/powerpoint/2010/main" val="3435788261"/>
-      </p:ext>
-    </p:extLst>
-  </p:cSld>
-  <p:clrMapOvr>
-    <a:masterClrMapping/>
-  </p:clrMapOvr>
-</p:sld>
-</file>
-
-<file path=ppt/slides/slide4.xml><?xml version="1.0" encoding="utf-8"?>
-<p:sld xmlns:a="http://schemas.openxmlformats.org/drawingml/2006/main" xmlns:r="http://schemas.openxmlformats.org/officeDocument/2006/relationships" xmlns:p="http://schemas.openxmlformats.org/presentationml/2006/main">
-  <p:cSld>
-    <p:spTree>
-      <p:nvGrpSpPr>
-        <p:cNvPr id="1" name=""/>
-        <p:cNvGrpSpPr/>
-        <p:nvPr/>
-      </p:nvGrpSpPr>
-      <p:grpSpPr>
-        <a:xfrm>
-          <a:off x="0" y="0"/>
-          <a:ext cx="0" cy="0"/>
-          <a:chOff x="0" y="0"/>
-          <a:chExt cx="0" cy="0"/>
-        </a:xfrm>
-      </p:grpSpPr>
-      <p:sp>
-        <p:nvSpPr>
-          <p:cNvPr id="5" name="Flowchart: Connector 17">
-            <a:extLst>
-              <a:ext uri="{FF2B5EF4-FFF2-40B4-BE49-F238E27FC236}">
-                <a16:creationId xmlns:a16="http://schemas.microsoft.com/office/drawing/2014/main" id="{30808DD7-5D69-E04C-85EE-C19FB6AABCCD}"/>
-              </a:ext>
-            </a:extLst>
-          </p:cNvPr>
-          <p:cNvSpPr/>
-          <p:nvPr/>
-        </p:nvSpPr>
-        <p:spPr>
-          <a:xfrm>
-            <a:off x="4889507" y="2236916"/>
-            <a:ext cx="180000" cy="180000"/>
-          </a:xfrm>
-          <a:prstGeom prst="flowChartConnector">
-            <a:avLst/>
-          </a:prstGeom>
-          <a:solidFill>
-            <a:srgbClr val="006082"/>
-          </a:solidFill>
-          <a:ln>
-            <a:noFill/>
-          </a:ln>
-        </p:spPr>
-        <p:style>
-          <a:lnRef idx="2">
-            <a:schemeClr val="accent1">
-              <a:shade val="50000"/>
-            </a:schemeClr>
-          </a:lnRef>
-          <a:fillRef idx="1">
-            <a:schemeClr val="accent1"/>
-          </a:fillRef>
-          <a:effectRef idx="0">
-            <a:schemeClr val="accent1"/>
-          </a:effectRef>
-          <a:fontRef idx="minor">
-            <a:schemeClr val="lt1"/>
-          </a:fontRef>
-        </p:style>
-        <p:txBody>
-          <a:bodyPr rtlCol="0" anchor="ctr"/>
-          <a:lstStyle/>
-          <a:p>
-            <a:pPr algn="ctr"/>
-            <a:endParaRPr lang="en-US"/>
-          </a:p>
-        </p:txBody>
-      </p:sp>
-      <p:sp>
-        <p:nvSpPr>
-          <p:cNvPr id="6" name="Oval 5">
-            <a:extLst>
-              <a:ext uri="{FF2B5EF4-FFF2-40B4-BE49-F238E27FC236}">
-                <a16:creationId xmlns:a16="http://schemas.microsoft.com/office/drawing/2014/main" id="{91083859-17EF-AB4D-A30F-15A6A10AA468}"/>
-              </a:ext>
-            </a:extLst>
-          </p:cNvPr>
-          <p:cNvSpPr/>
-          <p:nvPr/>
-        </p:nvSpPr>
-        <p:spPr>
-          <a:xfrm>
-            <a:off x="4261594" y="1609003"/>
-            <a:ext cx="1435826" cy="1435826"/>
-          </a:xfrm>
-          <a:prstGeom prst="ellipse">
-            <a:avLst/>
-          </a:prstGeom>
-          <a:noFill/>
-          <a:ln w="12700">
-            <a:solidFill>
-              <a:schemeClr val="tx1">
-                <a:lumMod val="75000"/>
-                <a:lumOff val="25000"/>
-              </a:schemeClr>
-            </a:solidFill>
-            <a:prstDash val="dash"/>
-          </a:ln>
-        </p:spPr>
-        <p:style>
-          <a:lnRef idx="2">
-            <a:schemeClr val="accent1">
-              <a:shade val="50000"/>
-            </a:schemeClr>
-          </a:lnRef>
-          <a:fillRef idx="1">
-            <a:schemeClr val="accent1"/>
-          </a:fillRef>
-          <a:effectRef idx="0">
-            <a:schemeClr val="accent1"/>
-          </a:effectRef>
-          <a:fontRef idx="minor">
-            <a:schemeClr val="lt1"/>
-          </a:fontRef>
-        </p:style>
-        <p:txBody>
-          <a:bodyPr rtlCol="0" anchor="ctr"/>
-          <a:lstStyle/>
-          <a:p>
-            <a:pPr algn="ctr"/>
-            <a:endParaRPr lang="en-VN"/>
-          </a:p>
-        </p:txBody>
-      </p:sp>
-      <p:sp>
-        <p:nvSpPr>
-          <p:cNvPr id="10" name="Flowchart: Connector 17">
-            <a:extLst>
-              <a:ext uri="{FF2B5EF4-FFF2-40B4-BE49-F238E27FC236}">
-                <a16:creationId xmlns:a16="http://schemas.microsoft.com/office/drawing/2014/main" id="{4C66238B-1F04-AB4A-9E69-4D0A7568A7C6}"/>
-              </a:ext>
-            </a:extLst>
-          </p:cNvPr>
-          <p:cNvSpPr/>
-          <p:nvPr/>
-        </p:nvSpPr>
-        <p:spPr>
-          <a:xfrm>
-            <a:off x="7765238" y="3325678"/>
-            <a:ext cx="180000" cy="180000"/>
-          </a:xfrm>
-          <a:prstGeom prst="flowChartConnector">
-            <a:avLst/>
-          </a:prstGeom>
-          <a:solidFill>
-            <a:srgbClr val="006082"/>
-          </a:solidFill>
-          <a:ln>
-            <a:noFill/>
-          </a:ln>
-        </p:spPr>
-        <p:style>
-          <a:lnRef idx="2">
-            <a:schemeClr val="accent1">
-              <a:shade val="50000"/>
-            </a:schemeClr>
-          </a:lnRef>
-          <a:fillRef idx="1">
-            <a:schemeClr val="accent1"/>
-          </a:fillRef>
-          <a:effectRef idx="0">
-            <a:schemeClr val="accent1"/>
-          </a:effectRef>
-          <a:fontRef idx="minor">
-            <a:schemeClr val="lt1"/>
-          </a:fontRef>
-        </p:style>
-        <p:txBody>
-          <a:bodyPr rtlCol="0" anchor="ctr"/>
-          <a:lstStyle/>
-          <a:p>
-            <a:pPr algn="ctr"/>
-            <a:endParaRPr lang="en-US"/>
-          </a:p>
-        </p:txBody>
-      </p:sp>
-      <p:sp>
-        <p:nvSpPr>
-          <p:cNvPr id="11" name="Oval 10">
-            <a:extLst>
-              <a:ext uri="{FF2B5EF4-FFF2-40B4-BE49-F238E27FC236}">
-                <a16:creationId xmlns:a16="http://schemas.microsoft.com/office/drawing/2014/main" id="{ECB1A2AE-04F2-9D47-839F-65FB7DB43B3B}"/>
-              </a:ext>
-            </a:extLst>
-          </p:cNvPr>
-          <p:cNvSpPr/>
-          <p:nvPr/>
-        </p:nvSpPr>
-        <p:spPr>
-          <a:xfrm>
-            <a:off x="5686518" y="1246957"/>
-            <a:ext cx="4337440" cy="4337442"/>
-          </a:xfrm>
-          <a:prstGeom prst="ellipse">
-            <a:avLst/>
-          </a:prstGeom>
-          <a:noFill/>
-          <a:ln w="12700">
-            <a:solidFill>
-              <a:schemeClr val="tx1">
-                <a:lumMod val="75000"/>
-                <a:lumOff val="25000"/>
-              </a:schemeClr>
-            </a:solidFill>
-            <a:prstDash val="dash"/>
-          </a:ln>
-        </p:spPr>
-        <p:style>
-          <a:lnRef idx="2">
-            <a:schemeClr val="accent1">
-              <a:shade val="50000"/>
-            </a:schemeClr>
-          </a:lnRef>
-          <a:fillRef idx="1">
-            <a:schemeClr val="accent1"/>
-          </a:fillRef>
-          <a:effectRef idx="0">
-            <a:schemeClr val="accent1"/>
-          </a:effectRef>
-          <a:fontRef idx="minor">
-            <a:schemeClr val="lt1"/>
-          </a:fontRef>
-        </p:style>
-        <p:txBody>
-          <a:bodyPr rtlCol="0" anchor="ctr"/>
-          <a:lstStyle/>
-          <a:p>
-            <a:pPr algn="ctr"/>
-            <a:endParaRPr lang="en-VN"/>
-          </a:p>
-        </p:txBody>
-      </p:sp>
-      <p:cxnSp>
-        <p:nvCxnSpPr>
-          <p:cNvPr id="12" name="Straight Connector 11">
-            <a:extLst>
-              <a:ext uri="{FF2B5EF4-FFF2-40B4-BE49-F238E27FC236}">
-                <a16:creationId xmlns:a16="http://schemas.microsoft.com/office/drawing/2014/main" id="{B836E133-7F94-754E-A9FE-5C3E998F2E7B}"/>
-              </a:ext>
-            </a:extLst>
-          </p:cNvPr>
-          <p:cNvCxnSpPr>
-            <a:cxnSpLocks/>
-            <a:stCxn id="10" idx="2"/>
-            <a:endCxn id="11" idx="2"/>
-          </p:cNvCxnSpPr>
-          <p:nvPr/>
-        </p:nvCxnSpPr>
-        <p:spPr>
-          <a:xfrm flipH="1">
-            <a:off x="5686518" y="3415678"/>
-            <a:ext cx="2078720" cy="0"/>
-          </a:xfrm>
-          <a:prstGeom prst="line">
-            <a:avLst/>
-          </a:prstGeom>
-          <a:ln w="19050">
-            <a:solidFill>
-              <a:schemeClr val="tx1">
-                <a:lumMod val="75000"/>
-                <a:lumOff val="25000"/>
-              </a:schemeClr>
-            </a:solidFill>
-          </a:ln>
-        </p:spPr>
-        <p:style>
-          <a:lnRef idx="1">
-            <a:schemeClr val="accent1"/>
-          </a:lnRef>
-          <a:fillRef idx="0">
-            <a:schemeClr val="accent1"/>
-          </a:fillRef>
-          <a:effectRef idx="0">
-            <a:schemeClr val="accent1"/>
-          </a:effectRef>
-          <a:fontRef idx="minor">
-            <a:schemeClr val="tx1"/>
-          </a:fontRef>
-        </p:style>
-      </p:cxnSp>
-      <p:sp>
-        <p:nvSpPr>
-          <p:cNvPr id="3" name="Flowchart: Connector 17">
-            <a:extLst>
-              <a:ext uri="{FF2B5EF4-FFF2-40B4-BE49-F238E27FC236}">
-                <a16:creationId xmlns:a16="http://schemas.microsoft.com/office/drawing/2014/main" id="{B7301C5D-BE16-DA4A-9CC9-C08185280924}"/>
-              </a:ext>
-            </a:extLst>
-          </p:cNvPr>
-          <p:cNvSpPr/>
-          <p:nvPr/>
-        </p:nvSpPr>
-        <p:spPr>
-          <a:xfrm>
-            <a:off x="5992678" y="3325678"/>
-            <a:ext cx="180000" cy="180000"/>
-          </a:xfrm>
-          <a:prstGeom prst="flowChartConnector">
-            <a:avLst/>
-          </a:prstGeom>
-          <a:solidFill>
-            <a:srgbClr val="C00000"/>
-          </a:solidFill>
-          <a:ln>
-            <a:noFill/>
-          </a:ln>
-        </p:spPr>
-        <p:style>
-          <a:lnRef idx="2">
-            <a:schemeClr val="accent1">
-              <a:shade val="50000"/>
-            </a:schemeClr>
-          </a:lnRef>
-          <a:fillRef idx="1">
-            <a:schemeClr val="accent1"/>
-          </a:fillRef>
-          <a:effectRef idx="0">
-            <a:schemeClr val="accent1"/>
-          </a:effectRef>
-          <a:fontRef idx="minor">
-            <a:schemeClr val="lt1"/>
-          </a:fontRef>
-        </p:style>
-        <p:txBody>
-          <a:bodyPr rtlCol="0" anchor="ctr"/>
-          <a:lstStyle/>
-          <a:p>
-            <a:pPr algn="ctr"/>
-            <a:endParaRPr lang="en-US"/>
-          </a:p>
-        </p:txBody>
-      </p:sp>
-      <p:sp>
-        <p:nvSpPr>
-          <p:cNvPr id="28" name="TextBox 27">
-            <a:extLst>
-              <a:ext uri="{FF2B5EF4-FFF2-40B4-BE49-F238E27FC236}">
-                <a16:creationId xmlns:a16="http://schemas.microsoft.com/office/drawing/2014/main" id="{AF5F2F17-42A0-A846-A605-5659FA616B03}"/>
-              </a:ext>
-            </a:extLst>
-          </p:cNvPr>
-          <p:cNvSpPr txBox="1"/>
-          <p:nvPr/>
-        </p:nvSpPr>
-        <p:spPr>
-          <a:xfrm>
-            <a:off x="5814122" y="3417262"/>
-            <a:ext cx="530486" cy="400110"/>
-          </a:xfrm>
-          <a:prstGeom prst="rect">
-            <a:avLst/>
-          </a:prstGeom>
-          <a:noFill/>
-        </p:spPr>
-        <p:txBody>
-          <a:bodyPr wrap="square" lIns="90000" rtlCol="0" anchor="ctr" anchorCtr="0">
-            <a:spAutoFit/>
-          </a:bodyPr>
-          <a:lstStyle/>
-          <a:p>
-            <a:pPr algn="ctr"/>
-            <a:r>
-              <a:rPr lang="en-VN" sz="2000">
-                <a:latin typeface="Times New Roman" panose="02020603050405020304" pitchFamily="18" charset="0"/>
-                <a:cs typeface="Times New Roman" panose="02020603050405020304" pitchFamily="18" charset="0"/>
-              </a:rPr>
-              <a:t>p</a:t>
-            </a:r>
-            <a:r>
-              <a:rPr lang="en-VN" sz="2000" baseline="-25000">
-                <a:latin typeface="Times New Roman" panose="02020603050405020304" pitchFamily="18" charset="0"/>
-                <a:cs typeface="Times New Roman" panose="02020603050405020304" pitchFamily="18" charset="0"/>
-              </a:rPr>
-              <a:t>n</a:t>
-            </a:r>
-          </a:p>
-        </p:txBody>
-      </p:sp>
-      <p:sp>
-        <p:nvSpPr>
-          <p:cNvPr id="30" name="TextBox 29">
-            <a:extLst>
-              <a:ext uri="{FF2B5EF4-FFF2-40B4-BE49-F238E27FC236}">
-                <a16:creationId xmlns:a16="http://schemas.microsoft.com/office/drawing/2014/main" id="{CFBCEDF7-5625-2649-AA0B-3107537FDF2E}"/>
-              </a:ext>
-            </a:extLst>
-          </p:cNvPr>
-          <p:cNvSpPr txBox="1"/>
-          <p:nvPr/>
-        </p:nvSpPr>
-        <p:spPr>
-          <a:xfrm>
-            <a:off x="4714264" y="1836806"/>
-            <a:ext cx="530486" cy="400110"/>
-          </a:xfrm>
-          <a:prstGeom prst="rect">
-            <a:avLst/>
-          </a:prstGeom>
-          <a:noFill/>
-        </p:spPr>
-        <p:txBody>
-          <a:bodyPr wrap="square" rtlCol="0">
-            <a:spAutoFit/>
-          </a:bodyPr>
-          <a:lstStyle/>
-          <a:p>
-            <a:pPr algn="ctr"/>
-            <a:r>
-              <a:rPr lang="en-VN" sz="2000">
-                <a:latin typeface="Times New Roman" panose="02020603050405020304" pitchFamily="18" charset="0"/>
-                <a:cs typeface="Times New Roman" panose="02020603050405020304" pitchFamily="18" charset="0"/>
-              </a:rPr>
-              <a:t>p</a:t>
-            </a:r>
-            <a:r>
-              <a:rPr lang="en-VN" sz="2000" baseline="-25000">
-                <a:latin typeface="Times New Roman" panose="02020603050405020304" pitchFamily="18" charset="0"/>
-                <a:cs typeface="Times New Roman" panose="02020603050405020304" pitchFamily="18" charset="0"/>
-              </a:rPr>
-              <a:t>1</a:t>
-            </a:r>
-          </a:p>
-        </p:txBody>
-      </p:sp>
-      <p:sp>
-        <p:nvSpPr>
-          <p:cNvPr id="31" name="TextBox 30">
-            <a:extLst>
-              <a:ext uri="{FF2B5EF4-FFF2-40B4-BE49-F238E27FC236}">
-                <a16:creationId xmlns:a16="http://schemas.microsoft.com/office/drawing/2014/main" id="{DD8E8A6E-CFEB-7C46-8ABD-C96AD439439E}"/>
-              </a:ext>
-            </a:extLst>
-          </p:cNvPr>
-          <p:cNvSpPr txBox="1"/>
-          <p:nvPr/>
-        </p:nvSpPr>
-        <p:spPr>
-          <a:xfrm>
-            <a:off x="7589995" y="3417262"/>
-            <a:ext cx="530486" cy="400110"/>
-          </a:xfrm>
-          <a:prstGeom prst="rect">
-            <a:avLst/>
-          </a:prstGeom>
-          <a:noFill/>
-        </p:spPr>
-        <p:txBody>
-          <a:bodyPr wrap="square" rtlCol="0">
-            <a:spAutoFit/>
-          </a:bodyPr>
-          <a:lstStyle/>
-          <a:p>
-            <a:pPr algn="ctr"/>
-            <a:r>
-              <a:rPr lang="en-VN" sz="2000">
-                <a:latin typeface="Times New Roman" panose="02020603050405020304" pitchFamily="18" charset="0"/>
-                <a:cs typeface="Times New Roman" panose="02020603050405020304" pitchFamily="18" charset="0"/>
-              </a:rPr>
-              <a:t>p</a:t>
-            </a:r>
-            <a:r>
-              <a:rPr lang="en-VN" sz="2000" baseline="-25000">
-                <a:latin typeface="Times New Roman" panose="02020603050405020304" pitchFamily="18" charset="0"/>
-                <a:cs typeface="Times New Roman" panose="02020603050405020304" pitchFamily="18" charset="0"/>
-              </a:rPr>
-              <a:t>2</a:t>
-            </a:r>
-          </a:p>
-        </p:txBody>
-      </p:sp>
-      <p:sp>
-        <p:nvSpPr>
-          <p:cNvPr id="42" name="TextBox 41">
-            <a:extLst>
-              <a:ext uri="{FF2B5EF4-FFF2-40B4-BE49-F238E27FC236}">
-                <a16:creationId xmlns:a16="http://schemas.microsoft.com/office/drawing/2014/main" id="{C7105E69-F86A-AF45-A37D-019F139CE360}"/>
-              </a:ext>
-            </a:extLst>
-          </p:cNvPr>
-          <p:cNvSpPr txBox="1"/>
-          <p:nvPr/>
-        </p:nvSpPr>
-        <p:spPr>
-          <a:xfrm rot="2700000">
-            <a:off x="4974072" y="2797107"/>
-            <a:ext cx="789935" cy="400110"/>
-          </a:xfrm>
-          <a:prstGeom prst="rect">
-            <a:avLst/>
-          </a:prstGeom>
-          <a:noFill/>
-        </p:spPr>
-        <p:txBody>
-          <a:bodyPr wrap="square" rtlCol="0">
-            <a:spAutoFit/>
-          </a:bodyPr>
-          <a:lstStyle/>
-          <a:p>
-            <a:pPr algn="ctr"/>
-            <a:r>
-              <a:rPr lang="en-VN" sz="2000">
-                <a:latin typeface="Times New Roman" panose="02020603050405020304" pitchFamily="18" charset="0"/>
-                <a:cs typeface="Times New Roman" panose="02020603050405020304" pitchFamily="18" charset="0"/>
-              </a:rPr>
-              <a:t>RD</a:t>
-            </a:r>
-            <a:r>
-              <a:rPr lang="en-VN" sz="2000" baseline="-25000">
-                <a:latin typeface="Times New Roman" panose="02020603050405020304" pitchFamily="18" charset="0"/>
-                <a:cs typeface="Times New Roman" panose="02020603050405020304" pitchFamily="18" charset="0"/>
-              </a:rPr>
-              <a:t>n1</a:t>
-            </a:r>
-          </a:p>
-        </p:txBody>
-      </p:sp>
-      <p:sp>
-        <p:nvSpPr>
-          <p:cNvPr id="43" name="TextBox 42">
-            <a:extLst>
-              <a:ext uri="{FF2B5EF4-FFF2-40B4-BE49-F238E27FC236}">
-                <a16:creationId xmlns:a16="http://schemas.microsoft.com/office/drawing/2014/main" id="{AB0B664D-BC4A-AF46-AE03-8058667FFDB8}"/>
-              </a:ext>
-            </a:extLst>
-          </p:cNvPr>
-          <p:cNvSpPr txBox="1"/>
-          <p:nvPr/>
-        </p:nvSpPr>
-        <p:spPr>
-          <a:xfrm>
-            <a:off x="6371571" y="2997850"/>
-            <a:ext cx="789935" cy="400110"/>
-          </a:xfrm>
-          <a:prstGeom prst="rect">
-            <a:avLst/>
-          </a:prstGeom>
-          <a:noFill/>
-        </p:spPr>
-        <p:txBody>
-          <a:bodyPr wrap="square" rtlCol="0">
-            <a:spAutoFit/>
-          </a:bodyPr>
-          <a:lstStyle/>
-          <a:p>
-            <a:pPr algn="ctr"/>
-            <a:r>
-              <a:rPr lang="en-VN" sz="2000">
-                <a:latin typeface="Times New Roman" panose="02020603050405020304" pitchFamily="18" charset="0"/>
-                <a:cs typeface="Times New Roman" panose="02020603050405020304" pitchFamily="18" charset="0"/>
-              </a:rPr>
-              <a:t>RD</a:t>
-            </a:r>
-            <a:r>
-              <a:rPr lang="en-VN" sz="2000" baseline="-25000">
-                <a:latin typeface="Times New Roman" panose="02020603050405020304" pitchFamily="18" charset="0"/>
-                <a:cs typeface="Times New Roman" panose="02020603050405020304" pitchFamily="18" charset="0"/>
-              </a:rPr>
-              <a:t>n2</a:t>
-            </a:r>
-          </a:p>
-        </p:txBody>
-      </p:sp>
-      <p:cxnSp>
-        <p:nvCxnSpPr>
-          <p:cNvPr id="47" name="Straight Connector 46">
-            <a:extLst>
-              <a:ext uri="{FF2B5EF4-FFF2-40B4-BE49-F238E27FC236}">
-                <a16:creationId xmlns:a16="http://schemas.microsoft.com/office/drawing/2014/main" id="{E1128FF9-2ED2-5142-9D25-8290073317F4}"/>
-              </a:ext>
-            </a:extLst>
-          </p:cNvPr>
-          <p:cNvCxnSpPr>
-            <a:cxnSpLocks/>
-            <a:stCxn id="3" idx="1"/>
-            <a:endCxn id="5" idx="5"/>
-          </p:cNvCxnSpPr>
-          <p:nvPr/>
-        </p:nvCxnSpPr>
-        <p:spPr>
-          <a:xfrm flipH="1" flipV="1">
-            <a:off x="5043147" y="2390556"/>
-            <a:ext cx="975891" cy="961482"/>
-          </a:xfrm>
-          <a:prstGeom prst="line">
-            <a:avLst/>
-          </a:prstGeom>
-          <a:ln w="19050">
-            <a:solidFill>
-              <a:schemeClr val="tx1">
-                <a:lumMod val="75000"/>
-                <a:lumOff val="25000"/>
-              </a:schemeClr>
-            </a:solidFill>
-          </a:ln>
-        </p:spPr>
-        <p:style>
-          <a:lnRef idx="1">
-            <a:schemeClr val="accent1"/>
-          </a:lnRef>
-          <a:fillRef idx="0">
-            <a:schemeClr val="accent1"/>
-          </a:fillRef>
-          <a:effectRef idx="0">
-            <a:schemeClr val="accent1"/>
-          </a:effectRef>
-          <a:fontRef idx="minor">
-            <a:schemeClr val="tx1"/>
-          </a:fontRef>
-        </p:style>
-      </p:cxnSp>
-    </p:spTree>
-    <p:extLst>
-      <p:ext uri="{BB962C8B-B14F-4D97-AF65-F5344CB8AC3E}">
-        <p14:creationId xmlns:p14="http://schemas.microsoft.com/office/powerpoint/2010/main" val="1022539145"/>
-      </p:ext>
-    </p:extLst>
-  </p:cSld>
-  <p:clrMapOvr>
-    <a:masterClrMapping/>
-  </p:clrMapOvr>
-</p:sld>
-</file>
-
-<file path=ppt/slides/slide5.xml><?xml version="1.0" encoding="utf-8"?>
-<p:sld xmlns:a="http://schemas.openxmlformats.org/drawingml/2006/main" xmlns:r="http://schemas.openxmlformats.org/officeDocument/2006/relationships" xmlns:p="http://schemas.openxmlformats.org/presentationml/2006/main">
-  <p:cSld>
-    <p:spTree>
-      <p:nvGrpSpPr>
-        <p:cNvPr id="1" name=""/>
-        <p:cNvGrpSpPr/>
-        <p:nvPr/>
-      </p:nvGrpSpPr>
-      <p:grpSpPr>
-        <a:xfrm>
-          <a:off x="0" y="0"/>
-          <a:ext cx="0" cy="0"/>
-          <a:chOff x="0" y="0"/>
-          <a:chExt cx="0" cy="0"/>
-        </a:xfrm>
-      </p:grpSpPr>
-      <p:sp>
-        <p:nvSpPr>
-          <p:cNvPr id="3" name="Flowchart: Connector 2">
-            <a:extLst>
-              <a:ext uri="{FF2B5EF4-FFF2-40B4-BE49-F238E27FC236}">
-                <a16:creationId xmlns:a16="http://schemas.microsoft.com/office/drawing/2014/main" id="{C9437FFD-FC9F-5375-39E6-D88AD2BE2F3D}"/>
-              </a:ext>
-            </a:extLst>
-          </p:cNvPr>
-          <p:cNvSpPr/>
-          <p:nvPr/>
-        </p:nvSpPr>
-        <p:spPr>
-          <a:xfrm>
-            <a:off x="5900980" y="1831706"/>
-            <a:ext cx="206644" cy="206644"/>
-          </a:xfrm>
-          <a:prstGeom prst="flowChartConnector">
-            <a:avLst/>
-          </a:prstGeom>
-          <a:solidFill>
-            <a:srgbClr val="006082"/>
-          </a:solidFill>
-          <a:ln>
-            <a:noFill/>
-          </a:ln>
-        </p:spPr>
-        <p:style>
-          <a:lnRef idx="2">
-            <a:schemeClr val="accent1">
-              <a:shade val="50000"/>
-            </a:schemeClr>
-          </a:lnRef>
-          <a:fillRef idx="1">
-            <a:schemeClr val="accent1"/>
-          </a:fillRef>
-          <a:effectRef idx="0">
-            <a:schemeClr val="accent1"/>
-          </a:effectRef>
-          <a:fontRef idx="minor">
-            <a:schemeClr val="lt1"/>
-          </a:fontRef>
-        </p:style>
-        <p:txBody>
-          <a:bodyPr rtlCol="0" anchor="ctr"/>
-          <a:lstStyle/>
-          <a:p>
-            <a:pPr algn="ctr"/>
-            <a:endParaRPr lang="en-US"/>
-          </a:p>
-        </p:txBody>
-      </p:sp>
-      <p:sp>
-        <p:nvSpPr>
-          <p:cNvPr id="4" name="Flowchart: Connector 3">
-            <a:extLst>
-              <a:ext uri="{FF2B5EF4-FFF2-40B4-BE49-F238E27FC236}">
-                <a16:creationId xmlns:a16="http://schemas.microsoft.com/office/drawing/2014/main" id="{A22D562B-062A-CD5F-B8DA-5903E56D36C1}"/>
-              </a:ext>
-            </a:extLst>
-          </p:cNvPr>
-          <p:cNvSpPr/>
-          <p:nvPr/>
-        </p:nvSpPr>
-        <p:spPr>
-          <a:xfrm>
-            <a:off x="7000877" y="1831706"/>
-            <a:ext cx="206644" cy="206644"/>
-          </a:xfrm>
-          <a:prstGeom prst="flowChartConnector">
-            <a:avLst/>
-          </a:prstGeom>
-          <a:solidFill>
-            <a:srgbClr val="006082"/>
-          </a:solidFill>
-          <a:ln>
-            <a:noFill/>
-          </a:ln>
-        </p:spPr>
-        <p:style>
-          <a:lnRef idx="2">
-            <a:schemeClr val="accent1">
-              <a:shade val="50000"/>
-            </a:schemeClr>
-          </a:lnRef>
-          <a:fillRef idx="1">
-            <a:schemeClr val="accent1"/>
-          </a:fillRef>
-          <a:effectRef idx="0">
-            <a:schemeClr val="accent1"/>
-          </a:effectRef>
-          <a:fontRef idx="minor">
-            <a:schemeClr val="lt1"/>
-          </a:fontRef>
-        </p:style>
-        <p:txBody>
-          <a:bodyPr rtlCol="0" anchor="ctr"/>
-          <a:lstStyle/>
-          <a:p>
-            <a:pPr algn="ctr"/>
-            <a:endParaRPr lang="en-US"/>
-          </a:p>
-        </p:txBody>
-      </p:sp>
-      <p:sp>
-        <p:nvSpPr>
-          <p:cNvPr id="5" name="Flowchart: Connector 4">
-            <a:extLst>
-              <a:ext uri="{FF2B5EF4-FFF2-40B4-BE49-F238E27FC236}">
-                <a16:creationId xmlns:a16="http://schemas.microsoft.com/office/drawing/2014/main" id="{74D39E05-C8C1-E68A-B29C-0CD8C1233958}"/>
-              </a:ext>
-            </a:extLst>
-          </p:cNvPr>
-          <p:cNvSpPr/>
-          <p:nvPr/>
-        </p:nvSpPr>
-        <p:spPr>
-          <a:xfrm>
-            <a:off x="5422631" y="2765156"/>
-            <a:ext cx="206644" cy="206644"/>
-          </a:xfrm>
-          <a:prstGeom prst="flowChartConnector">
-            <a:avLst/>
-          </a:prstGeom>
-          <a:solidFill>
-            <a:srgbClr val="006082"/>
-          </a:solidFill>
-          <a:ln>
-            <a:noFill/>
-          </a:ln>
-        </p:spPr>
-        <p:style>
-          <a:lnRef idx="2">
-            <a:schemeClr val="accent1">
-              <a:shade val="50000"/>
-            </a:schemeClr>
-          </a:lnRef>
-          <a:fillRef idx="1">
-            <a:schemeClr val="accent1"/>
-          </a:fillRef>
-          <a:effectRef idx="0">
-            <a:schemeClr val="accent1"/>
-          </a:effectRef>
-          <a:fontRef idx="minor">
-            <a:schemeClr val="lt1"/>
-          </a:fontRef>
-        </p:style>
-        <p:txBody>
-          <a:bodyPr rtlCol="0" anchor="ctr"/>
-          <a:lstStyle/>
-          <a:p>
-            <a:pPr algn="ctr"/>
-            <a:endParaRPr lang="en-US"/>
-          </a:p>
-        </p:txBody>
-      </p:sp>
-      <p:sp>
-        <p:nvSpPr>
-          <p:cNvPr id="7" name="Flowchart: Connector 6">
-            <a:extLst>
-              <a:ext uri="{FF2B5EF4-FFF2-40B4-BE49-F238E27FC236}">
-                <a16:creationId xmlns:a16="http://schemas.microsoft.com/office/drawing/2014/main" id="{BA7C2E02-1483-B689-5588-2276A5BD9BAB}"/>
-              </a:ext>
-            </a:extLst>
-          </p:cNvPr>
-          <p:cNvSpPr/>
-          <p:nvPr/>
-        </p:nvSpPr>
-        <p:spPr>
-          <a:xfrm>
-            <a:off x="6594206" y="4031981"/>
-            <a:ext cx="206644" cy="206644"/>
-          </a:xfrm>
-          <a:prstGeom prst="flowChartConnector">
-            <a:avLst/>
-          </a:prstGeom>
-          <a:solidFill>
-            <a:srgbClr val="C00000"/>
-          </a:solidFill>
-          <a:ln>
-            <a:noFill/>
-          </a:ln>
-        </p:spPr>
-        <p:style>
-          <a:lnRef idx="2">
-            <a:schemeClr val="accent1">
-              <a:shade val="50000"/>
-            </a:schemeClr>
-          </a:lnRef>
-          <a:fillRef idx="1">
-            <a:schemeClr val="accent1"/>
-          </a:fillRef>
-          <a:effectRef idx="0">
-            <a:schemeClr val="accent1"/>
-          </a:effectRef>
-          <a:fontRef idx="minor">
-            <a:schemeClr val="lt1"/>
-          </a:fontRef>
-        </p:style>
-        <p:txBody>
-          <a:bodyPr rtlCol="0" anchor="ctr"/>
-          <a:lstStyle/>
-          <a:p>
-            <a:pPr algn="ctr"/>
-            <a:endParaRPr lang="en-US"/>
-          </a:p>
-        </p:txBody>
-      </p:sp>
-      <p:cxnSp>
-        <p:nvCxnSpPr>
-          <p:cNvPr id="10" name="Straight Connector 9">
-            <a:extLst>
-              <a:ext uri="{FF2B5EF4-FFF2-40B4-BE49-F238E27FC236}">
-                <a16:creationId xmlns:a16="http://schemas.microsoft.com/office/drawing/2014/main" id="{63F1FB18-1915-4868-7EEF-A1AC532CD59E}"/>
-              </a:ext>
-            </a:extLst>
-          </p:cNvPr>
-          <p:cNvCxnSpPr>
-            <a:cxnSpLocks/>
-            <a:stCxn id="7" idx="1"/>
-            <a:endCxn id="5" idx="5"/>
-          </p:cNvCxnSpPr>
-          <p:nvPr/>
-        </p:nvCxnSpPr>
-        <p:spPr>
-          <a:xfrm flipH="1" flipV="1">
-            <a:off x="5599013" y="2941538"/>
-            <a:ext cx="1025455" cy="1120705"/>
-          </a:xfrm>
-          <a:prstGeom prst="line">
-            <a:avLst/>
-          </a:prstGeom>
-          <a:ln w="19050">
-            <a:solidFill>
-              <a:schemeClr val="tx1">
-                <a:lumMod val="75000"/>
-                <a:lumOff val="25000"/>
-              </a:schemeClr>
-            </a:solidFill>
-          </a:ln>
-        </p:spPr>
-        <p:style>
-          <a:lnRef idx="1">
-            <a:schemeClr val="accent1"/>
-          </a:lnRef>
-          <a:fillRef idx="0">
-            <a:schemeClr val="accent1"/>
-          </a:fillRef>
-          <a:effectRef idx="0">
-            <a:schemeClr val="accent1"/>
-          </a:effectRef>
-          <a:fontRef idx="minor">
-            <a:schemeClr val="tx1"/>
-          </a:fontRef>
-        </p:style>
-      </p:cxnSp>
-      <p:cxnSp>
-        <p:nvCxnSpPr>
-          <p:cNvPr id="11" name="Straight Connector 10">
-            <a:extLst>
-              <a:ext uri="{FF2B5EF4-FFF2-40B4-BE49-F238E27FC236}">
-                <a16:creationId xmlns:a16="http://schemas.microsoft.com/office/drawing/2014/main" id="{63359752-9C8F-AFFC-B505-F46B4FC3E8E5}"/>
-              </a:ext>
-            </a:extLst>
-          </p:cNvPr>
-          <p:cNvCxnSpPr>
-            <a:cxnSpLocks/>
-            <a:stCxn id="3" idx="3"/>
-            <a:endCxn id="5" idx="0"/>
-          </p:cNvCxnSpPr>
-          <p:nvPr/>
-        </p:nvCxnSpPr>
-        <p:spPr>
-          <a:xfrm flipH="1">
-            <a:off x="5525953" y="2008088"/>
-            <a:ext cx="405289" cy="757068"/>
-          </a:xfrm>
-          <a:prstGeom prst="line">
-            <a:avLst/>
-          </a:prstGeom>
-          <a:ln w="19050">
-            <a:solidFill>
-              <a:schemeClr val="tx1">
-                <a:lumMod val="75000"/>
-                <a:lumOff val="25000"/>
-              </a:schemeClr>
-            </a:solidFill>
-          </a:ln>
-        </p:spPr>
-        <p:style>
-          <a:lnRef idx="1">
-            <a:schemeClr val="accent1"/>
-          </a:lnRef>
-          <a:fillRef idx="0">
-            <a:schemeClr val="accent1"/>
-          </a:fillRef>
-          <a:effectRef idx="0">
-            <a:schemeClr val="accent1"/>
-          </a:effectRef>
-          <a:fontRef idx="minor">
-            <a:schemeClr val="tx1"/>
-          </a:fontRef>
-        </p:style>
-      </p:cxnSp>
-      <p:sp>
-        <p:nvSpPr>
-          <p:cNvPr id="22" name="TextBox 21">
-            <a:extLst>
-              <a:ext uri="{FF2B5EF4-FFF2-40B4-BE49-F238E27FC236}">
-                <a16:creationId xmlns:a16="http://schemas.microsoft.com/office/drawing/2014/main" id="{1C6D323F-50D5-B4B4-E263-9982E2FFD83E}"/>
-              </a:ext>
-            </a:extLst>
-          </p:cNvPr>
-          <p:cNvSpPr txBox="1"/>
-          <p:nvPr/>
-        </p:nvSpPr>
-        <p:spPr>
-          <a:xfrm>
-            <a:off x="5652029" y="2214732"/>
-            <a:ext cx="558425" cy="369332"/>
-          </a:xfrm>
-          <a:prstGeom prst="rect">
-            <a:avLst/>
-          </a:prstGeom>
-          <a:noFill/>
-        </p:spPr>
-        <p:txBody>
-          <a:bodyPr wrap="square" rtlCol="0">
-            <a:spAutoFit/>
-          </a:bodyPr>
-          <a:lstStyle/>
-          <a:p>
-            <a:pPr algn="ctr"/>
-            <a:r>
-              <a:rPr lang="en-US" i="1" dirty="0">
-                <a:latin typeface="Times New Roman" panose="02020603050405020304" pitchFamily="18" charset="0"/>
-                <a:cs typeface="Times New Roman" panose="02020603050405020304" pitchFamily="18" charset="0"/>
-              </a:rPr>
-              <a:t>e</a:t>
-            </a:r>
-            <a:r>
-              <a:rPr lang="en-US" baseline="-25000" dirty="0">
-                <a:latin typeface="Times New Roman" panose="02020603050405020304" pitchFamily="18" charset="0"/>
-                <a:cs typeface="Times New Roman" panose="02020603050405020304" pitchFamily="18" charset="0"/>
-              </a:rPr>
-              <a:t>2</a:t>
-            </a:r>
-          </a:p>
-        </p:txBody>
-      </p:sp>
-      <p:cxnSp>
-        <p:nvCxnSpPr>
-          <p:cNvPr id="23" name="Straight Connector 22">
-            <a:extLst>
-              <a:ext uri="{FF2B5EF4-FFF2-40B4-BE49-F238E27FC236}">
-                <a16:creationId xmlns:a16="http://schemas.microsoft.com/office/drawing/2014/main" id="{6EECE3F9-26E5-ACB2-2057-40DD9958701D}"/>
-              </a:ext>
-            </a:extLst>
-          </p:cNvPr>
-          <p:cNvCxnSpPr>
-            <a:cxnSpLocks/>
-            <a:stCxn id="4" idx="2"/>
-            <a:endCxn id="3" idx="6"/>
-          </p:cNvCxnSpPr>
-          <p:nvPr/>
-        </p:nvCxnSpPr>
-        <p:spPr>
-          <a:xfrm flipH="1">
-            <a:off x="6107624" y="1935028"/>
-            <a:ext cx="893253" cy="0"/>
-          </a:xfrm>
-          <a:prstGeom prst="line">
-            <a:avLst/>
-          </a:prstGeom>
-          <a:ln w="19050">
-            <a:solidFill>
-              <a:schemeClr val="tx1">
-                <a:lumMod val="75000"/>
-                <a:lumOff val="25000"/>
-              </a:schemeClr>
-            </a:solidFill>
-          </a:ln>
-        </p:spPr>
-        <p:style>
-          <a:lnRef idx="1">
-            <a:schemeClr val="accent1"/>
-          </a:lnRef>
-          <a:fillRef idx="0">
-            <a:schemeClr val="accent1"/>
-          </a:fillRef>
-          <a:effectRef idx="0">
-            <a:schemeClr val="accent1"/>
-          </a:effectRef>
-          <a:fontRef idx="minor">
-            <a:schemeClr val="tx1"/>
-          </a:fontRef>
-        </p:style>
-      </p:cxnSp>
-      <p:sp>
-        <p:nvSpPr>
-          <p:cNvPr id="15" name="TextBox 14">
-            <a:extLst>
-              <a:ext uri="{FF2B5EF4-FFF2-40B4-BE49-F238E27FC236}">
-                <a16:creationId xmlns:a16="http://schemas.microsoft.com/office/drawing/2014/main" id="{AF2B5AD7-2D5F-B44A-85C6-FBEC37D003C2}"/>
-              </a:ext>
-            </a:extLst>
-          </p:cNvPr>
-          <p:cNvSpPr txBox="1"/>
-          <p:nvPr/>
-        </p:nvSpPr>
-        <p:spPr>
-          <a:xfrm>
-            <a:off x="6004302" y="3101780"/>
-            <a:ext cx="558425" cy="369332"/>
-          </a:xfrm>
-          <a:prstGeom prst="rect">
-            <a:avLst/>
-          </a:prstGeom>
-          <a:noFill/>
-        </p:spPr>
-        <p:txBody>
-          <a:bodyPr wrap="square" rtlCol="0">
-            <a:spAutoFit/>
-          </a:bodyPr>
-          <a:lstStyle/>
-          <a:p>
-            <a:pPr algn="ctr"/>
-            <a:r>
-              <a:rPr lang="en-US" i="1" dirty="0">
-                <a:latin typeface="Times New Roman" panose="02020603050405020304" pitchFamily="18" charset="0"/>
-                <a:cs typeface="Times New Roman" panose="02020603050405020304" pitchFamily="18" charset="0"/>
-              </a:rPr>
-              <a:t>e</a:t>
-            </a:r>
-            <a:r>
-              <a:rPr lang="en-US" baseline="-25000" dirty="0">
-                <a:latin typeface="Times New Roman" panose="02020603050405020304" pitchFamily="18" charset="0"/>
-                <a:cs typeface="Times New Roman" panose="02020603050405020304" pitchFamily="18" charset="0"/>
-              </a:rPr>
-              <a:t>1</a:t>
-            </a:r>
-          </a:p>
-        </p:txBody>
-      </p:sp>
-      <p:sp>
-        <p:nvSpPr>
-          <p:cNvPr id="16" name="TextBox 15">
-            <a:extLst>
-              <a:ext uri="{FF2B5EF4-FFF2-40B4-BE49-F238E27FC236}">
-                <a16:creationId xmlns:a16="http://schemas.microsoft.com/office/drawing/2014/main" id="{E67A4EDF-D496-3941-99C1-80D3E1237419}"/>
-              </a:ext>
-            </a:extLst>
-          </p:cNvPr>
-          <p:cNvSpPr txBox="1"/>
-          <p:nvPr/>
-        </p:nvSpPr>
-        <p:spPr>
-          <a:xfrm>
-            <a:off x="6270533" y="1896303"/>
-            <a:ext cx="558425" cy="369332"/>
-          </a:xfrm>
-          <a:prstGeom prst="rect">
-            <a:avLst/>
-          </a:prstGeom>
-          <a:noFill/>
-        </p:spPr>
-        <p:txBody>
-          <a:bodyPr wrap="square" rtlCol="0">
-            <a:spAutoFit/>
-          </a:bodyPr>
-          <a:lstStyle/>
-          <a:p>
-            <a:pPr algn="ctr"/>
-            <a:r>
-              <a:rPr lang="en-US" i="1" dirty="0">
-                <a:latin typeface="Times New Roman" panose="02020603050405020304" pitchFamily="18" charset="0"/>
-                <a:cs typeface="Times New Roman" panose="02020603050405020304" pitchFamily="18" charset="0"/>
-              </a:rPr>
-              <a:t>e</a:t>
-            </a:r>
-            <a:r>
-              <a:rPr lang="en-US" baseline="-25000" dirty="0">
-                <a:latin typeface="Times New Roman" panose="02020603050405020304" pitchFamily="18" charset="0"/>
-                <a:cs typeface="Times New Roman" panose="02020603050405020304" pitchFamily="18" charset="0"/>
-              </a:rPr>
-              <a:t>3</a:t>
-            </a:r>
-          </a:p>
-        </p:txBody>
-      </p:sp>
-      <p:sp>
-        <p:nvSpPr>
-          <p:cNvPr id="17" name="TextBox 16">
-            <a:extLst>
-              <a:ext uri="{FF2B5EF4-FFF2-40B4-BE49-F238E27FC236}">
-                <a16:creationId xmlns:a16="http://schemas.microsoft.com/office/drawing/2014/main" id="{693AA40C-37FC-2744-8E2C-FF714EBE65EF}"/>
-              </a:ext>
-            </a:extLst>
-          </p:cNvPr>
-          <p:cNvSpPr txBox="1"/>
-          <p:nvPr/>
-        </p:nvSpPr>
-        <p:spPr>
-          <a:xfrm>
-            <a:off x="6721664" y="3935248"/>
-            <a:ext cx="558425" cy="400110"/>
-          </a:xfrm>
-          <a:prstGeom prst="rect">
-            <a:avLst/>
-          </a:prstGeom>
-          <a:noFill/>
-        </p:spPr>
-        <p:txBody>
-          <a:bodyPr wrap="square" rtlCol="0">
-            <a:spAutoFit/>
-          </a:bodyPr>
-          <a:lstStyle/>
-          <a:p>
-            <a:pPr algn="ctr"/>
-            <a:r>
-              <a:rPr lang="en-US" sz="2000" dirty="0">
-                <a:latin typeface="Times New Roman" panose="02020603050405020304" pitchFamily="18" charset="0"/>
-                <a:cs typeface="Times New Roman" panose="02020603050405020304" pitchFamily="18" charset="0"/>
-              </a:rPr>
-              <a:t>p</a:t>
-            </a:r>
-            <a:r>
-              <a:rPr lang="en-US" sz="2000" baseline="-25000" dirty="0">
-                <a:latin typeface="Times New Roman" panose="02020603050405020304" pitchFamily="18" charset="0"/>
-                <a:cs typeface="Times New Roman" panose="02020603050405020304" pitchFamily="18" charset="0"/>
-              </a:rPr>
-              <a:t>1</a:t>
-            </a:r>
-          </a:p>
-        </p:txBody>
-      </p:sp>
-      <p:sp>
-        <p:nvSpPr>
-          <p:cNvPr id="18" name="TextBox 17">
-            <a:extLst>
-              <a:ext uri="{FF2B5EF4-FFF2-40B4-BE49-F238E27FC236}">
-                <a16:creationId xmlns:a16="http://schemas.microsoft.com/office/drawing/2014/main" id="{D65D5E27-6F56-7B44-B879-F6A36E6CA3BF}"/>
-              </a:ext>
-            </a:extLst>
-          </p:cNvPr>
-          <p:cNvSpPr txBox="1"/>
-          <p:nvPr/>
-        </p:nvSpPr>
-        <p:spPr>
-          <a:xfrm>
-            <a:off x="4939017" y="2633698"/>
-            <a:ext cx="558425" cy="400110"/>
-          </a:xfrm>
-          <a:prstGeom prst="rect">
-            <a:avLst/>
-          </a:prstGeom>
-          <a:noFill/>
-        </p:spPr>
-        <p:txBody>
-          <a:bodyPr wrap="square" rtlCol="0">
-            <a:spAutoFit/>
-          </a:bodyPr>
-          <a:lstStyle/>
-          <a:p>
-            <a:pPr algn="ctr"/>
-            <a:r>
-              <a:rPr lang="en-US" sz="2000" dirty="0">
-                <a:latin typeface="Times New Roman" panose="02020603050405020304" pitchFamily="18" charset="0"/>
-                <a:cs typeface="Times New Roman" panose="02020603050405020304" pitchFamily="18" charset="0"/>
-              </a:rPr>
-              <a:t>p</a:t>
-            </a:r>
-            <a:r>
-              <a:rPr lang="en-US" sz="2000" baseline="-25000" dirty="0">
-                <a:latin typeface="Times New Roman" panose="02020603050405020304" pitchFamily="18" charset="0"/>
-                <a:cs typeface="Times New Roman" panose="02020603050405020304" pitchFamily="18" charset="0"/>
-              </a:rPr>
-              <a:t>2</a:t>
-            </a:r>
-          </a:p>
-        </p:txBody>
-      </p:sp>
-      <p:sp>
-        <p:nvSpPr>
-          <p:cNvPr id="19" name="TextBox 18">
-            <a:extLst>
-              <a:ext uri="{FF2B5EF4-FFF2-40B4-BE49-F238E27FC236}">
-                <a16:creationId xmlns:a16="http://schemas.microsoft.com/office/drawing/2014/main" id="{5586DBC2-49F1-CC44-9A3A-EF8955265D2F}"/>
-              </a:ext>
-            </a:extLst>
-          </p:cNvPr>
-          <p:cNvSpPr txBox="1"/>
-          <p:nvPr/>
-        </p:nvSpPr>
-        <p:spPr>
-          <a:xfrm>
-            <a:off x="5580826" y="1447735"/>
-            <a:ext cx="558425" cy="400110"/>
-          </a:xfrm>
-          <a:prstGeom prst="rect">
-            <a:avLst/>
-          </a:prstGeom>
-          <a:noFill/>
-        </p:spPr>
-        <p:txBody>
-          <a:bodyPr wrap="square" rtlCol="0">
-            <a:spAutoFit/>
-          </a:bodyPr>
-          <a:lstStyle/>
-          <a:p>
-            <a:pPr algn="ctr"/>
-            <a:r>
-              <a:rPr lang="en-US" sz="2000" dirty="0">
-                <a:latin typeface="Times New Roman" panose="02020603050405020304" pitchFamily="18" charset="0"/>
-                <a:cs typeface="Times New Roman" panose="02020603050405020304" pitchFamily="18" charset="0"/>
-              </a:rPr>
-              <a:t>p</a:t>
-            </a:r>
-            <a:r>
-              <a:rPr lang="en-US" sz="2000" baseline="-25000" dirty="0">
-                <a:latin typeface="Times New Roman" panose="02020603050405020304" pitchFamily="18" charset="0"/>
-                <a:cs typeface="Times New Roman" panose="02020603050405020304" pitchFamily="18" charset="0"/>
-              </a:rPr>
-              <a:t>3</a:t>
-            </a:r>
-          </a:p>
-        </p:txBody>
-      </p:sp>
-      <p:sp>
-        <p:nvSpPr>
-          <p:cNvPr id="20" name="TextBox 19">
-            <a:extLst>
-              <a:ext uri="{FF2B5EF4-FFF2-40B4-BE49-F238E27FC236}">
-                <a16:creationId xmlns:a16="http://schemas.microsoft.com/office/drawing/2014/main" id="{25734564-D51A-8D40-83FD-69ED5109356E}"/>
-              </a:ext>
-            </a:extLst>
-          </p:cNvPr>
-          <p:cNvSpPr txBox="1"/>
-          <p:nvPr/>
-        </p:nvSpPr>
-        <p:spPr>
-          <a:xfrm>
-            <a:off x="7046324" y="1447735"/>
-            <a:ext cx="558425" cy="400110"/>
-          </a:xfrm>
-          <a:prstGeom prst="rect">
-            <a:avLst/>
-          </a:prstGeom>
-          <a:noFill/>
-        </p:spPr>
-        <p:txBody>
-          <a:bodyPr wrap="square" rtlCol="0">
-            <a:spAutoFit/>
-          </a:bodyPr>
-          <a:lstStyle/>
-          <a:p>
-            <a:pPr algn="ctr"/>
-            <a:r>
-              <a:rPr lang="en-US" sz="2000" dirty="0">
-                <a:latin typeface="Times New Roman" panose="02020603050405020304" pitchFamily="18" charset="0"/>
-                <a:cs typeface="Times New Roman" panose="02020603050405020304" pitchFamily="18" charset="0"/>
-              </a:rPr>
-              <a:t>p</a:t>
-            </a:r>
-            <a:r>
-              <a:rPr lang="en-US" sz="2000" baseline="-25000" dirty="0">
-                <a:latin typeface="Times New Roman" panose="02020603050405020304" pitchFamily="18" charset="0"/>
-                <a:cs typeface="Times New Roman" panose="02020603050405020304" pitchFamily="18" charset="0"/>
-              </a:rPr>
-              <a:t>4</a:t>
-            </a:r>
-          </a:p>
-        </p:txBody>
-      </p:sp>
-    </p:spTree>
-    <p:extLst>
-      <p:ext uri="{BB962C8B-B14F-4D97-AF65-F5344CB8AC3E}">
-        <p14:creationId xmlns:p14="http://schemas.microsoft.com/office/powerpoint/2010/main" val="3207991652"/>
-      </p:ext>
-    </p:extLst>
-  </p:cSld>
-  <p:clrMapOvr>
-    <a:masterClrMapping/>
-  </p:clrMapOvr>
-</p:sld>
-</file>
-
-<file path=ppt/slides/slide6.xml><?xml version="1.0" encoding="utf-8"?>
 <p:sld xmlns:a="http://schemas.openxmlformats.org/drawingml/2006/main" xmlns:r="http://schemas.openxmlformats.org/officeDocument/2006/relationships" xmlns:p="http://schemas.openxmlformats.org/presentationml/2006/main">
   <p:cSld>
     <p:spTree>
@@ -11875,7 +5514,7 @@
 </p:sld>
 </file>
 
-<file path=ppt/slides/slide7.xml><?xml version="1.0" encoding="utf-8"?>
+<file path=ppt/slides/slide2.xml><?xml version="1.0" encoding="utf-8"?>
 <p:sld xmlns:a="http://schemas.openxmlformats.org/drawingml/2006/main" xmlns:r="http://schemas.openxmlformats.org/officeDocument/2006/relationships" xmlns:p="http://schemas.openxmlformats.org/presentationml/2006/main">
   <p:cSld>
     <p:spTree>
